--- a/exports/pptx/lessons/senior-module-02-panchabhuta/day-03-tanmatras.pptx
+++ b/exports/pptx/lessons/senior-module-02-panchabhuta/day-03-tanmatras.pptx
@@ -3181,7 +3181,297 @@
         </p:nvSpPr>
         <p:spPr>
           <a:xfrm>
-            <a:off x="634901" y="3766096"/>
+            <a:off x="406301" y="1757065"/>
+            <a:ext cx="8498026" cy="213271"/>
+          </a:xfrm>
+          <a:prstGeom prst="rect">
+            <a:avLst/>
+          </a:prstGeom>
+          <a:noFill/>
+          <a:ln/>
+        </p:spPr>
+        <p:txBody>
+          <a:bodyPr wrap="square" lIns="0" tIns="0" rIns="0" bIns="0" rtlCol="0" anchor="t"/>
+          <a:lstStyle/>
+          <a:p>
+            <a:pPr algn="l" indent="0" marL="0">
+              <a:lnSpc>
+                <a:spcPts val="1680"/>
+              </a:lnSpc>
+              <a:spcBef>
+                <a:spcPts val="300"/>
+              </a:spcBef>
+              <a:spcAft>
+                <a:spcPts val="300"/>
+              </a:spcAft>
+              <a:buNone/>
+            </a:pPr>
+            <a:r>
+              <a:rPr lang="en-US" sz="1200" i="1" dirty="0">
+                <a:solidFill>
+                  <a:srgbClr val="1A1A1A"/>
+                </a:solidFill>
+                <a:latin typeface="Georgia" pitchFamily="34" charset="0"/>
+                <a:ea typeface="Georgia" pitchFamily="34" charset="-122"/>
+                <a:cs typeface="Georgia" pitchFamily="34" charset="-120"/>
+              </a:rPr>
+              <a:t>Each row: Element · Qualities · Source-verse anchor.</a:t>
+            </a:r>
+            <a:endParaRPr lang="en-US" sz="1200" dirty="0"/>
+          </a:p>
+        </p:txBody>
+      </p:sp>
+      <p:sp>
+        <p:nvSpPr>
+          <p:cNvPr id="7" name="Text 5"/>
+          <p:cNvSpPr/>
+          <p:nvPr/>
+        </p:nvSpPr>
+        <p:spPr>
+          <a:xfrm>
+            <a:off x="634901" y="2059186"/>
+            <a:ext cx="8102798" cy="1462683"/>
+          </a:xfrm>
+          <a:prstGeom prst="rect">
+            <a:avLst/>
+          </a:prstGeom>
+          <a:noFill/>
+          <a:ln/>
+        </p:spPr>
+        <p:txBody>
+          <a:bodyPr wrap="square" lIns="0" tIns="0" rIns="0" bIns="0" rtlCol="0" anchor="t"/>
+          <a:lstStyle/>
+          <a:p>
+            <a:pPr algn="l" marL="342900" indent="-342900">
+              <a:lnSpc>
+                <a:spcPts val="1620"/>
+              </a:lnSpc>
+              <a:spcAft>
+                <a:spcPts val="300"/>
+              </a:spcAft>
+              <a:buSzPct val="100000"/>
+              <a:buChar char="•"/>
+            </a:pPr>
+            <a:r>
+              <a:rPr lang="en-US" sz="1200" b="1" dirty="0">
+                <a:solidFill>
+                  <a:srgbClr val="1A1A1A"/>
+                </a:solidFill>
+                <a:latin typeface="Georgia" pitchFamily="34" charset="0"/>
+                <a:ea typeface="Georgia" pitchFamily="34" charset="-122"/>
+                <a:cs typeface="Georgia" pitchFamily="34" charset="-120"/>
+              </a:rPr>
+              <a:t>ākāśa</a:t>
+            </a:r>
+            <a:pPr algn="l" indent="0" marL="0">
+              <a:lnSpc>
+                <a:spcPts val="1620"/>
+              </a:lnSpc>
+              <a:spcAft>
+                <a:spcPts val="300"/>
+              </a:spcAft>
+              <a:buNone/>
+            </a:pPr>
+            <a:r>
+              <a:rPr lang="en-US" sz="1200" dirty="0">
+                <a:solidFill>
+                  <a:srgbClr val="1A1A1A"/>
+                </a:solidFill>
+                <a:latin typeface="Georgia" pitchFamily="34" charset="0"/>
+                <a:ea typeface="Georgia" pitchFamily="34" charset="-122"/>
+                <a:cs typeface="Georgia" pitchFamily="34" charset="-120"/>
+              </a:rPr>
+              <a:t> — śabda · SB 3.26 (qualities-of-space)</a:t>
+            </a:r>
+            <a:endParaRPr lang="en-US" sz="1200" dirty="0"/>
+          </a:p>
+          <a:p>
+            <a:pPr algn="l" marL="342900" indent="-342900">
+              <a:lnSpc>
+                <a:spcPts val="1620"/>
+              </a:lnSpc>
+              <a:spcAft>
+                <a:spcPts val="300"/>
+              </a:spcAft>
+              <a:buSzPct val="100000"/>
+              <a:buChar char="•"/>
+            </a:pPr>
+            <a:r>
+              <a:rPr lang="en-US" sz="1200" b="1" dirty="0">
+                <a:solidFill>
+                  <a:srgbClr val="1A1A1A"/>
+                </a:solidFill>
+                <a:latin typeface="Georgia" pitchFamily="34" charset="0"/>
+                <a:ea typeface="Georgia" pitchFamily="34" charset="-122"/>
+                <a:cs typeface="Georgia" pitchFamily="34" charset="-120"/>
+              </a:rPr>
+              <a:t>vāyu</a:t>
+            </a:r>
+            <a:pPr algn="l" indent="0" marL="0">
+              <a:lnSpc>
+                <a:spcPts val="1620"/>
+              </a:lnSpc>
+              <a:spcAft>
+                <a:spcPts val="300"/>
+              </a:spcAft>
+              <a:buNone/>
+            </a:pPr>
+            <a:r>
+              <a:rPr lang="en-US" sz="1200" dirty="0">
+                <a:solidFill>
+                  <a:srgbClr val="1A1A1A"/>
+                </a:solidFill>
+                <a:latin typeface="Georgia" pitchFamily="34" charset="0"/>
+                <a:ea typeface="Georgia" pitchFamily="34" charset="-122"/>
+                <a:cs typeface="Georgia" pitchFamily="34" charset="-120"/>
+              </a:rPr>
+              <a:t> — śabda + sparśa · SB 3.26.36 (directly quoted: "softness, hardness, cold, heat — qualities of touch, tanmātra of air")</a:t>
+            </a:r>
+            <a:endParaRPr lang="en-US" sz="1200" dirty="0"/>
+          </a:p>
+          <a:p>
+            <a:pPr algn="l" marL="342900" indent="-342900">
+              <a:lnSpc>
+                <a:spcPts val="1620"/>
+              </a:lnSpc>
+              <a:spcAft>
+                <a:spcPts val="300"/>
+              </a:spcAft>
+              <a:buSzPct val="100000"/>
+              <a:buChar char="•"/>
+            </a:pPr>
+            <a:r>
+              <a:rPr lang="en-US" sz="1200" b="1" dirty="0">
+                <a:solidFill>
+                  <a:srgbClr val="1A1A1A"/>
+                </a:solidFill>
+                <a:latin typeface="Georgia" pitchFamily="34" charset="0"/>
+                <a:ea typeface="Georgia" pitchFamily="34" charset="-122"/>
+                <a:cs typeface="Georgia" pitchFamily="34" charset="-120"/>
+              </a:rPr>
+              <a:t>tejas</a:t>
+            </a:r>
+            <a:pPr algn="l" indent="0" marL="0">
+              <a:lnSpc>
+                <a:spcPts val="1620"/>
+              </a:lnSpc>
+              <a:spcAft>
+                <a:spcPts val="300"/>
+              </a:spcAft>
+              <a:buNone/>
+            </a:pPr>
+            <a:r>
+              <a:rPr lang="en-US" sz="1200" dirty="0">
+                <a:solidFill>
+                  <a:srgbClr val="1A1A1A"/>
+                </a:solidFill>
+                <a:latin typeface="Georgia" pitchFamily="34" charset="0"/>
+                <a:ea typeface="Georgia" pitchFamily="34" charset="-122"/>
+                <a:cs typeface="Georgia" pitchFamily="34" charset="-120"/>
+              </a:rPr>
+              <a:t> — śabda + sparśa + rūpa · —</a:t>
+            </a:r>
+            <a:endParaRPr lang="en-US" sz="1200" dirty="0"/>
+          </a:p>
+          <a:p>
+            <a:pPr algn="l" marL="342900" indent="-342900">
+              <a:lnSpc>
+                <a:spcPts val="1620"/>
+              </a:lnSpc>
+              <a:spcAft>
+                <a:spcPts val="300"/>
+              </a:spcAft>
+              <a:buSzPct val="100000"/>
+              <a:buChar char="•"/>
+            </a:pPr>
+            <a:r>
+              <a:rPr lang="en-US" sz="1200" b="1" dirty="0">
+                <a:solidFill>
+                  <a:srgbClr val="1A1A1A"/>
+                </a:solidFill>
+                <a:latin typeface="Georgia" pitchFamily="34" charset="0"/>
+                <a:ea typeface="Georgia" pitchFamily="34" charset="-122"/>
+                <a:cs typeface="Georgia" pitchFamily="34" charset="-120"/>
+              </a:rPr>
+              <a:t>ap</a:t>
+            </a:r>
+            <a:pPr algn="l" indent="0" marL="0">
+              <a:lnSpc>
+                <a:spcPts val="1620"/>
+              </a:lnSpc>
+              <a:spcAft>
+                <a:spcPts val="300"/>
+              </a:spcAft>
+              <a:buNone/>
+            </a:pPr>
+            <a:r>
+              <a:rPr lang="en-US" sz="1200" dirty="0">
+                <a:solidFill>
+                  <a:srgbClr val="1A1A1A"/>
+                </a:solidFill>
+                <a:latin typeface="Georgia" pitchFamily="34" charset="0"/>
+                <a:ea typeface="Georgia" pitchFamily="34" charset="-122"/>
+                <a:cs typeface="Georgia" pitchFamily="34" charset="-120"/>
+              </a:rPr>
+              <a:t> — śabda + sparśa + rūpa + rasa · —</a:t>
+            </a:r>
+            <a:endParaRPr lang="en-US" sz="1200" dirty="0"/>
+          </a:p>
+          <a:p>
+            <a:pPr algn="l" marL="342900" indent="-342900">
+              <a:lnSpc>
+                <a:spcPts val="1620"/>
+              </a:lnSpc>
+              <a:spcAft>
+                <a:spcPts val="300"/>
+              </a:spcAft>
+              <a:buSzPct val="100000"/>
+              <a:buChar char="•"/>
+            </a:pPr>
+            <a:r>
+              <a:rPr lang="en-US" sz="1200" b="1" dirty="0">
+                <a:solidFill>
+                  <a:srgbClr val="1A1A1A"/>
+                </a:solidFill>
+                <a:latin typeface="Georgia" pitchFamily="34" charset="0"/>
+                <a:ea typeface="Georgia" pitchFamily="34" charset="-122"/>
+                <a:cs typeface="Georgia" pitchFamily="34" charset="-120"/>
+              </a:rPr>
+              <a:t>pṛthvī</a:t>
+            </a:r>
+            <a:pPr algn="l" indent="0" marL="0">
+              <a:lnSpc>
+                <a:spcPts val="1620"/>
+              </a:lnSpc>
+              <a:spcAft>
+                <a:spcPts val="300"/>
+              </a:spcAft>
+              <a:buNone/>
+            </a:pPr>
+            <a:r>
+              <a:rPr lang="en-US" sz="1200" dirty="0">
+                <a:solidFill>
+                  <a:srgbClr val="1A1A1A"/>
+                </a:solidFill>
+                <a:latin typeface="Georgia" pitchFamily="34" charset="0"/>
+                <a:ea typeface="Georgia" pitchFamily="34" charset="-122"/>
+                <a:cs typeface="Georgia" pitchFamily="34" charset="-120"/>
+              </a:rPr>
+              <a:t> — śabda + sparśa + rūpa + rasa + gandha · SB 3.26.44 (taste → smell as the last new quality)</a:t>
+            </a:r>
+            <a:endParaRPr lang="en-US" sz="1200" dirty="0"/>
+          </a:p>
+        </p:txBody>
+      </p:sp>
+      <p:sp>
+        <p:nvSpPr>
+          <p:cNvPr id="8" name="Text 6"/>
+          <p:cNvSpPr/>
+          <p:nvPr/>
+        </p:nvSpPr>
+        <p:spPr>
+          <a:xfrm>
+            <a:off x="634901" y="3623370"/>
             <a:ext cx="8102798" cy="281880"/>
           </a:xfrm>
           <a:prstGeom prst="rect">
@@ -3281,13 +3571,13 @@
       </p:sp>
       <p:sp>
         <p:nvSpPr>
-          <p:cNvPr id="7" name="Text 5"/>
+          <p:cNvPr id="9" name="Text 7"/>
           <p:cNvSpPr/>
           <p:nvPr/>
         </p:nvSpPr>
         <p:spPr>
           <a:xfrm>
-            <a:off x="406301" y="4136827"/>
+            <a:off x="406301" y="3994100"/>
             <a:ext cx="8498026" cy="639812"/>
           </a:xfrm>
           <a:prstGeom prst="rect">
@@ -3375,13 +3665,13 @@
       </p:sp>
       <p:sp>
         <p:nvSpPr>
-          <p:cNvPr id="8" name="Text 6"/>
+          <p:cNvPr id="10" name="Text 8"/>
           <p:cNvSpPr/>
           <p:nvPr/>
         </p:nvSpPr>
         <p:spPr>
           <a:xfrm>
-            <a:off x="634901" y="4865489"/>
+            <a:off x="634901" y="4722763"/>
             <a:ext cx="8102798" cy="281880"/>
           </a:xfrm>
           <a:prstGeom prst="rect">
@@ -3441,13 +3731,13 @@
       </p:sp>
       <p:sp>
         <p:nvSpPr>
-          <p:cNvPr id="9" name="Text 7"/>
+          <p:cNvPr id="11" name="Text 9"/>
           <p:cNvSpPr/>
           <p:nvPr/>
         </p:nvSpPr>
         <p:spPr>
           <a:xfrm>
-            <a:off x="406301" y="5236220"/>
+            <a:off x="406301" y="5093494"/>
             <a:ext cx="8498026" cy="639812"/>
           </a:xfrm>
           <a:prstGeom prst="rect">
@@ -3673,13 +3963,13 @@
       </p:sp>
       <p:sp>
         <p:nvSpPr>
-          <p:cNvPr id="10" name="Text 8"/>
+          <p:cNvPr id="12" name="Text 10"/>
           <p:cNvSpPr/>
           <p:nvPr/>
         </p:nvSpPr>
         <p:spPr>
           <a:xfrm>
-            <a:off x="406301" y="5952232"/>
+            <a:off x="406301" y="5809506"/>
             <a:ext cx="8498026" cy="426541"/>
           </a:xfrm>
           <a:prstGeom prst="rect">
@@ -4043,13 +4333,13 @@
       </p:sp>
       <p:sp>
         <p:nvSpPr>
-          <p:cNvPr id="11" name="Text 9"/>
+          <p:cNvPr id="13" name="Text 11"/>
           <p:cNvSpPr/>
           <p:nvPr/>
         </p:nvSpPr>
         <p:spPr>
           <a:xfrm>
-            <a:off x="406301" y="6454973"/>
+            <a:off x="406301" y="6312247"/>
             <a:ext cx="8498026" cy="426541"/>
           </a:xfrm>
           <a:prstGeom prst="rect">
@@ -4137,13 +4427,13 @@
       </p:sp>
       <p:sp>
         <p:nvSpPr>
-          <p:cNvPr id="12" name="Text 10"/>
+          <p:cNvPr id="14" name="Text 12"/>
           <p:cNvSpPr/>
           <p:nvPr/>
         </p:nvSpPr>
         <p:spPr>
           <a:xfrm>
-            <a:off x="406301" y="7033915"/>
+            <a:off x="406301" y="6891189"/>
             <a:ext cx="8498026" cy="213271"/>
           </a:xfrm>
           <a:prstGeom prst="rect">

--- a/exports/pptx/lessons/senior-module-02-panchabhuta/day-03-tanmatras.pptx
+++ b/exports/pptx/lessons/senior-module-02-panchabhuta/day-03-tanmatras.pptx
@@ -15,9 +15,14 @@
     <p:sldId id="263" r:id="rId9"/>
     <p:sldId id="264" r:id="rId10"/>
     <p:sldId id="265" r:id="rId11"/>
+    <p:sldId id="266" r:id="rId12"/>
+    <p:sldId id="267" r:id="rId13"/>
+    <p:sldId id="268" r:id="rId14"/>
+    <p:sldId id="269" r:id="rId15"/>
+    <p:sldId id="270" r:id="rId16"/>
   </p:sldIdLst>
   <p:notesMasterIdLst>
-    <p:notesMasterId r:id="rId12"/>
+    <p:notesMasterId r:id="rId17"/>
   </p:notesMasterIdLst>
   <p:sldSz cx="9144000" cy="5143500"/>
   <p:notesSz cx="5143500" cy="9144000"/>
@@ -623,6 +628,446 @@
             <a:fld id="{F7021451-1387-4CA6-816F-3879F97B5CBC}" type="slidenum">
               <a:rPr lang="en-US"/>
               <a:t>10</a:t>
+            </a:fld>
+            <a:endParaRPr lang="en-US"/>
+          </a:p>
+        </p:txBody>
+      </p:sp>
+    </p:spTree>
+    <p:extLst>
+      <p:ext uri="{BB962C8B-B14F-4D97-AF65-F5344CB8AC3E}">
+        <p14:creationId xmlns:p14="http://schemas.microsoft.com/office/powerpoint/2010/main" val="1024086991"/>
+      </p:ext>
+    </p:extLst>
+  </p:cSld>
+  <p:clrMapOvr>
+    <a:masterClrMapping/>
+  </p:clrMapOvr>
+</p:notes>
+</file>
+
+<file path=ppt/notesSlides/notesSlide11.xml><?xml version="1.0" encoding="utf-8"?>
+<p:notes xmlns:a="http://schemas.openxmlformats.org/drawingml/2006/main" xmlns:r="http://schemas.openxmlformats.org/officeDocument/2006/relationships" xmlns:p="http://schemas.openxmlformats.org/presentationml/2006/main">
+  <p:cSld>
+    <p:spTree>
+      <p:nvGrpSpPr>
+        <p:cNvPr id="1" name=""/>
+        <p:cNvGrpSpPr/>
+        <p:nvPr/>
+      </p:nvGrpSpPr>
+      <p:grpSpPr>
+        <a:xfrm>
+          <a:off x="0" y="0"/>
+          <a:ext cx="0" cy="0"/>
+          <a:chOff x="0" y="0"/>
+          <a:chExt cx="0" cy="0"/>
+        </a:xfrm>
+      </p:grpSpPr>
+      <p:sp>
+        <p:nvSpPr>
+          <p:cNvPr id="2" name="Slide Image Placeholder 1"/>
+          <p:cNvSpPr>
+            <a:spLocks noGrp="1" noRot="1" noChangeAspect="1"/>
+          </p:cNvSpPr>
+          <p:nvPr>
+            <p:ph type="sldImg"/>
+          </p:nvPr>
+        </p:nvSpPr>
+        <p:spPr/>
+      </p:sp>
+      <p:sp>
+        <p:nvSpPr>
+          <p:cNvPr id="3" name="Notes Placeholder 2"/>
+          <p:cNvSpPr>
+            <a:spLocks noGrp="1"/>
+          </p:cNvSpPr>
+          <p:nvPr>
+            <p:ph type="body" idx="1"/>
+          </p:nvPr>
+        </p:nvSpPr>
+        <p:spPr/>
+        <p:txBody>
+          <a:bodyPr/>
+          <a:lstStyle/>
+          <a:p>
+            <a:r>
+              <a:rPr lang="en-US" dirty="0"/>
+              <a:t/>
+            </a:r>
+            <a:endParaRPr lang="en-US" dirty="0"/>
+          </a:p>
+        </p:txBody>
+      </p:sp>
+      <p:sp>
+        <p:nvSpPr>
+          <p:cNvPr id="4" name="Slide Number Placeholder 3"/>
+          <p:cNvSpPr>
+            <a:spLocks noGrp="1"/>
+          </p:cNvSpPr>
+          <p:nvPr>
+            <p:ph type="sldNum" sz="quarter" idx="10"/>
+          </p:nvPr>
+        </p:nvSpPr>
+        <p:spPr/>
+        <p:txBody>
+          <a:bodyPr/>
+          <a:lstStyle/>
+          <a:p>
+            <a:fld id="{F7021451-1387-4CA6-816F-3879F97B5CBC}" type="slidenum">
+              <a:rPr lang="en-US"/>
+              <a:t>11</a:t>
+            </a:fld>
+            <a:endParaRPr lang="en-US"/>
+          </a:p>
+        </p:txBody>
+      </p:sp>
+    </p:spTree>
+    <p:extLst>
+      <p:ext uri="{BB962C8B-B14F-4D97-AF65-F5344CB8AC3E}">
+        <p14:creationId xmlns:p14="http://schemas.microsoft.com/office/powerpoint/2010/main" val="1024086991"/>
+      </p:ext>
+    </p:extLst>
+  </p:cSld>
+  <p:clrMapOvr>
+    <a:masterClrMapping/>
+  </p:clrMapOvr>
+</p:notes>
+</file>
+
+<file path=ppt/notesSlides/notesSlide12.xml><?xml version="1.0" encoding="utf-8"?>
+<p:notes xmlns:a="http://schemas.openxmlformats.org/drawingml/2006/main" xmlns:r="http://schemas.openxmlformats.org/officeDocument/2006/relationships" xmlns:p="http://schemas.openxmlformats.org/presentationml/2006/main">
+  <p:cSld>
+    <p:spTree>
+      <p:nvGrpSpPr>
+        <p:cNvPr id="1" name=""/>
+        <p:cNvGrpSpPr/>
+        <p:nvPr/>
+      </p:nvGrpSpPr>
+      <p:grpSpPr>
+        <a:xfrm>
+          <a:off x="0" y="0"/>
+          <a:ext cx="0" cy="0"/>
+          <a:chOff x="0" y="0"/>
+          <a:chExt cx="0" cy="0"/>
+        </a:xfrm>
+      </p:grpSpPr>
+      <p:sp>
+        <p:nvSpPr>
+          <p:cNvPr id="2" name="Slide Image Placeholder 1"/>
+          <p:cNvSpPr>
+            <a:spLocks noGrp="1" noRot="1" noChangeAspect="1"/>
+          </p:cNvSpPr>
+          <p:nvPr>
+            <p:ph type="sldImg"/>
+          </p:nvPr>
+        </p:nvSpPr>
+        <p:spPr/>
+      </p:sp>
+      <p:sp>
+        <p:nvSpPr>
+          <p:cNvPr id="3" name="Notes Placeholder 2"/>
+          <p:cNvSpPr>
+            <a:spLocks noGrp="1"/>
+          </p:cNvSpPr>
+          <p:nvPr>
+            <p:ph type="body" idx="1"/>
+          </p:nvPr>
+        </p:nvSpPr>
+        <p:spPr/>
+        <p:txBody>
+          <a:bodyPr/>
+          <a:lstStyle/>
+          <a:p>
+            <a:r>
+              <a:rPr lang="en-US" dirty="0"/>
+              <a:t/>
+            </a:r>
+            <a:endParaRPr lang="en-US" dirty="0"/>
+          </a:p>
+        </p:txBody>
+      </p:sp>
+      <p:sp>
+        <p:nvSpPr>
+          <p:cNvPr id="4" name="Slide Number Placeholder 3"/>
+          <p:cNvSpPr>
+            <a:spLocks noGrp="1"/>
+          </p:cNvSpPr>
+          <p:nvPr>
+            <p:ph type="sldNum" sz="quarter" idx="10"/>
+          </p:nvPr>
+        </p:nvSpPr>
+        <p:spPr/>
+        <p:txBody>
+          <a:bodyPr/>
+          <a:lstStyle/>
+          <a:p>
+            <a:fld id="{F7021451-1387-4CA6-816F-3879F97B5CBC}" type="slidenum">
+              <a:rPr lang="en-US"/>
+              <a:t>12</a:t>
+            </a:fld>
+            <a:endParaRPr lang="en-US"/>
+          </a:p>
+        </p:txBody>
+      </p:sp>
+    </p:spTree>
+    <p:extLst>
+      <p:ext uri="{BB962C8B-B14F-4D97-AF65-F5344CB8AC3E}">
+        <p14:creationId xmlns:p14="http://schemas.microsoft.com/office/powerpoint/2010/main" val="1024086991"/>
+      </p:ext>
+    </p:extLst>
+  </p:cSld>
+  <p:clrMapOvr>
+    <a:masterClrMapping/>
+  </p:clrMapOvr>
+</p:notes>
+</file>
+
+<file path=ppt/notesSlides/notesSlide13.xml><?xml version="1.0" encoding="utf-8"?>
+<p:notes xmlns:a="http://schemas.openxmlformats.org/drawingml/2006/main" xmlns:r="http://schemas.openxmlformats.org/officeDocument/2006/relationships" xmlns:p="http://schemas.openxmlformats.org/presentationml/2006/main">
+  <p:cSld>
+    <p:spTree>
+      <p:nvGrpSpPr>
+        <p:cNvPr id="1" name=""/>
+        <p:cNvGrpSpPr/>
+        <p:nvPr/>
+      </p:nvGrpSpPr>
+      <p:grpSpPr>
+        <a:xfrm>
+          <a:off x="0" y="0"/>
+          <a:ext cx="0" cy="0"/>
+          <a:chOff x="0" y="0"/>
+          <a:chExt cx="0" cy="0"/>
+        </a:xfrm>
+      </p:grpSpPr>
+      <p:sp>
+        <p:nvSpPr>
+          <p:cNvPr id="2" name="Slide Image Placeholder 1"/>
+          <p:cNvSpPr>
+            <a:spLocks noGrp="1" noRot="1" noChangeAspect="1"/>
+          </p:cNvSpPr>
+          <p:nvPr>
+            <p:ph type="sldImg"/>
+          </p:nvPr>
+        </p:nvSpPr>
+        <p:spPr/>
+      </p:sp>
+      <p:sp>
+        <p:nvSpPr>
+          <p:cNvPr id="3" name="Notes Placeholder 2"/>
+          <p:cNvSpPr>
+            <a:spLocks noGrp="1"/>
+          </p:cNvSpPr>
+          <p:nvPr>
+            <p:ph type="body" idx="1"/>
+          </p:nvPr>
+        </p:nvSpPr>
+        <p:spPr/>
+        <p:txBody>
+          <a:bodyPr/>
+          <a:lstStyle/>
+          <a:p>
+            <a:r>
+              <a:rPr lang="en-US" dirty="0"/>
+              <a:t/>
+            </a:r>
+            <a:endParaRPr lang="en-US" dirty="0"/>
+          </a:p>
+        </p:txBody>
+      </p:sp>
+      <p:sp>
+        <p:nvSpPr>
+          <p:cNvPr id="4" name="Slide Number Placeholder 3"/>
+          <p:cNvSpPr>
+            <a:spLocks noGrp="1"/>
+          </p:cNvSpPr>
+          <p:nvPr>
+            <p:ph type="sldNum" sz="quarter" idx="10"/>
+          </p:nvPr>
+        </p:nvSpPr>
+        <p:spPr/>
+        <p:txBody>
+          <a:bodyPr/>
+          <a:lstStyle/>
+          <a:p>
+            <a:fld id="{F7021451-1387-4CA6-816F-3879F97B5CBC}" type="slidenum">
+              <a:rPr lang="en-US"/>
+              <a:t>13</a:t>
+            </a:fld>
+            <a:endParaRPr lang="en-US"/>
+          </a:p>
+        </p:txBody>
+      </p:sp>
+    </p:spTree>
+    <p:extLst>
+      <p:ext uri="{BB962C8B-B14F-4D97-AF65-F5344CB8AC3E}">
+        <p14:creationId xmlns:p14="http://schemas.microsoft.com/office/powerpoint/2010/main" val="1024086991"/>
+      </p:ext>
+    </p:extLst>
+  </p:cSld>
+  <p:clrMapOvr>
+    <a:masterClrMapping/>
+  </p:clrMapOvr>
+</p:notes>
+</file>
+
+<file path=ppt/notesSlides/notesSlide14.xml><?xml version="1.0" encoding="utf-8"?>
+<p:notes xmlns:a="http://schemas.openxmlformats.org/drawingml/2006/main" xmlns:r="http://schemas.openxmlformats.org/officeDocument/2006/relationships" xmlns:p="http://schemas.openxmlformats.org/presentationml/2006/main">
+  <p:cSld>
+    <p:spTree>
+      <p:nvGrpSpPr>
+        <p:cNvPr id="1" name=""/>
+        <p:cNvGrpSpPr/>
+        <p:nvPr/>
+      </p:nvGrpSpPr>
+      <p:grpSpPr>
+        <a:xfrm>
+          <a:off x="0" y="0"/>
+          <a:ext cx="0" cy="0"/>
+          <a:chOff x="0" y="0"/>
+          <a:chExt cx="0" cy="0"/>
+        </a:xfrm>
+      </p:grpSpPr>
+      <p:sp>
+        <p:nvSpPr>
+          <p:cNvPr id="2" name="Slide Image Placeholder 1"/>
+          <p:cNvSpPr>
+            <a:spLocks noGrp="1" noRot="1" noChangeAspect="1"/>
+          </p:cNvSpPr>
+          <p:nvPr>
+            <p:ph type="sldImg"/>
+          </p:nvPr>
+        </p:nvSpPr>
+        <p:spPr/>
+      </p:sp>
+      <p:sp>
+        <p:nvSpPr>
+          <p:cNvPr id="3" name="Notes Placeholder 2"/>
+          <p:cNvSpPr>
+            <a:spLocks noGrp="1"/>
+          </p:cNvSpPr>
+          <p:nvPr>
+            <p:ph type="body" idx="1"/>
+          </p:nvPr>
+        </p:nvSpPr>
+        <p:spPr/>
+        <p:txBody>
+          <a:bodyPr/>
+          <a:lstStyle/>
+          <a:p>
+            <a:r>
+              <a:rPr lang="en-US" dirty="0"/>
+              <a:t/>
+            </a:r>
+            <a:endParaRPr lang="en-US" dirty="0"/>
+          </a:p>
+        </p:txBody>
+      </p:sp>
+      <p:sp>
+        <p:nvSpPr>
+          <p:cNvPr id="4" name="Slide Number Placeholder 3"/>
+          <p:cNvSpPr>
+            <a:spLocks noGrp="1"/>
+          </p:cNvSpPr>
+          <p:nvPr>
+            <p:ph type="sldNum" sz="quarter" idx="10"/>
+          </p:nvPr>
+        </p:nvSpPr>
+        <p:spPr/>
+        <p:txBody>
+          <a:bodyPr/>
+          <a:lstStyle/>
+          <a:p>
+            <a:fld id="{F7021451-1387-4CA6-816F-3879F97B5CBC}" type="slidenum">
+              <a:rPr lang="en-US"/>
+              <a:t>14</a:t>
+            </a:fld>
+            <a:endParaRPr lang="en-US"/>
+          </a:p>
+        </p:txBody>
+      </p:sp>
+    </p:spTree>
+    <p:extLst>
+      <p:ext uri="{BB962C8B-B14F-4D97-AF65-F5344CB8AC3E}">
+        <p14:creationId xmlns:p14="http://schemas.microsoft.com/office/powerpoint/2010/main" val="1024086991"/>
+      </p:ext>
+    </p:extLst>
+  </p:cSld>
+  <p:clrMapOvr>
+    <a:masterClrMapping/>
+  </p:clrMapOvr>
+</p:notes>
+</file>
+
+<file path=ppt/notesSlides/notesSlide15.xml><?xml version="1.0" encoding="utf-8"?>
+<p:notes xmlns:a="http://schemas.openxmlformats.org/drawingml/2006/main" xmlns:r="http://schemas.openxmlformats.org/officeDocument/2006/relationships" xmlns:p="http://schemas.openxmlformats.org/presentationml/2006/main">
+  <p:cSld>
+    <p:spTree>
+      <p:nvGrpSpPr>
+        <p:cNvPr id="1" name=""/>
+        <p:cNvGrpSpPr/>
+        <p:nvPr/>
+      </p:nvGrpSpPr>
+      <p:grpSpPr>
+        <a:xfrm>
+          <a:off x="0" y="0"/>
+          <a:ext cx="0" cy="0"/>
+          <a:chOff x="0" y="0"/>
+          <a:chExt cx="0" cy="0"/>
+        </a:xfrm>
+      </p:grpSpPr>
+      <p:sp>
+        <p:nvSpPr>
+          <p:cNvPr id="2" name="Slide Image Placeholder 1"/>
+          <p:cNvSpPr>
+            <a:spLocks noGrp="1" noRot="1" noChangeAspect="1"/>
+          </p:cNvSpPr>
+          <p:nvPr>
+            <p:ph type="sldImg"/>
+          </p:nvPr>
+        </p:nvSpPr>
+        <p:spPr/>
+      </p:sp>
+      <p:sp>
+        <p:nvSpPr>
+          <p:cNvPr id="3" name="Notes Placeholder 2"/>
+          <p:cNvSpPr>
+            <a:spLocks noGrp="1"/>
+          </p:cNvSpPr>
+          <p:nvPr>
+            <p:ph type="body" idx="1"/>
+          </p:nvPr>
+        </p:nvSpPr>
+        <p:spPr/>
+        <p:txBody>
+          <a:bodyPr/>
+          <a:lstStyle/>
+          <a:p>
+            <a:r>
+              <a:rPr lang="en-US" dirty="0"/>
+              <a:t/>
+            </a:r>
+            <a:endParaRPr lang="en-US" dirty="0"/>
+          </a:p>
+        </p:txBody>
+      </p:sp>
+      <p:sp>
+        <p:nvSpPr>
+          <p:cNvPr id="4" name="Slide Number Placeholder 3"/>
+          <p:cNvSpPr>
+            <a:spLocks noGrp="1"/>
+          </p:cNvSpPr>
+          <p:nvPr>
+            <p:ph type="sldNum" sz="quarter" idx="10"/>
+          </p:nvPr>
+        </p:nvSpPr>
+        <p:spPr/>
+        <p:txBody>
+          <a:bodyPr/>
+          <a:lstStyle/>
+          <a:p>
+            <a:fld id="{F7021451-1387-4CA6-816F-3879F97B5CBC}" type="slidenum">
+              <a:rPr lang="en-US"/>
+              <a:t>15</a:t>
             </a:fld>
             <a:endParaRPr lang="en-US"/>
           </a:p>
@@ -1876,148 +2321,6 @@
         </p:nvSpPr>
         <p:spPr>
           <a:xfrm>
-            <a:off x="406301" y="1223963"/>
-            <a:ext cx="8498026" cy="274290"/>
-          </a:xfrm>
-          <a:prstGeom prst="rect">
-            <a:avLst/>
-          </a:prstGeom>
-          <a:noFill/>
-          <a:ln/>
-        </p:spPr>
-        <p:txBody>
-          <a:bodyPr wrap="square" lIns="0" tIns="0" rIns="0" bIns="0" rtlCol="0" anchor="t"/>
-          <a:lstStyle/>
-          <a:p>
-            <a:pPr algn="l" indent="0" marL="0">
-              <a:lnSpc>
-                <a:spcPts val="2160"/>
-              </a:lnSpc>
-              <a:spcBef>
-                <a:spcPts val="600"/>
-              </a:spcBef>
-              <a:spcAft>
-                <a:spcPts val="800"/>
-              </a:spcAft>
-              <a:buNone/>
-            </a:pPr>
-            <a:r>
-              <a:rPr lang="en-US" sz="1800" b="1" dirty="0">
-                <a:solidFill>
-                  <a:srgbClr val="997929"/>
-                </a:solidFill>
-                <a:latin typeface="Times New Roman" pitchFamily="34" charset="0"/>
-                <a:ea typeface="Times New Roman" pitchFamily="34" charset="-122"/>
-                <a:cs typeface="Times New Roman" pitchFamily="34" charset="-120"/>
-              </a:rPr>
-              <a:t>Learning objective</a:t>
-            </a:r>
-            <a:endParaRPr lang="en-US" sz="1800" dirty="0"/>
-          </a:p>
-        </p:txBody>
-      </p:sp>
-      <p:sp>
-        <p:nvSpPr>
-          <p:cNvPr id="6" name="Text 4"/>
-          <p:cNvSpPr/>
-          <p:nvPr/>
-        </p:nvSpPr>
-        <p:spPr>
-          <a:xfrm>
-            <a:off x="406301" y="1637854"/>
-            <a:ext cx="8498026" cy="426541"/>
-          </a:xfrm>
-          <a:prstGeom prst="rect">
-            <a:avLst/>
-          </a:prstGeom>
-          <a:noFill/>
-          <a:ln/>
-        </p:spPr>
-        <p:txBody>
-          <a:bodyPr wrap="square" lIns="0" tIns="0" rIns="0" bIns="0" rtlCol="0" anchor="t"/>
-          <a:lstStyle/>
-          <a:p>
-            <a:pPr algn="l" indent="0" marL="0">
-              <a:lnSpc>
-                <a:spcPts val="1680"/>
-              </a:lnSpc>
-              <a:spcBef>
-                <a:spcPts val="300"/>
-              </a:spcBef>
-              <a:spcAft>
-                <a:spcPts val="300"/>
-              </a:spcAft>
-              <a:buNone/>
-            </a:pPr>
-            <a:r>
-              <a:rPr lang="en-US" sz="1200" dirty="0">
-                <a:solidFill>
-                  <a:srgbClr val="1A1A1A"/>
-                </a:solidFill>
-                <a:latin typeface="Georgia" pitchFamily="34" charset="0"/>
-                <a:ea typeface="Georgia" pitchFamily="34" charset="-122"/>
-                <a:cs typeface="Georgia" pitchFamily="34" charset="-120"/>
-              </a:rPr>
-              <a:t>Students explain the </a:t>
-            </a:r>
-            <a:pPr algn="l" indent="0" marL="0">
-              <a:lnSpc>
-                <a:spcPts val="1680"/>
-              </a:lnSpc>
-              <a:spcBef>
-                <a:spcPts val="300"/>
-              </a:spcBef>
-              <a:spcAft>
-                <a:spcPts val="300"/>
-              </a:spcAft>
-              <a:buNone/>
-            </a:pPr>
-            <a:r>
-              <a:rPr lang="en-US" sz="1200" i="1" dirty="0">
-                <a:solidFill>
-                  <a:srgbClr val="1A1A1A"/>
-                </a:solidFill>
-                <a:latin typeface="Georgia" pitchFamily="34" charset="0"/>
-                <a:ea typeface="Georgia" pitchFamily="34" charset="-122"/>
-                <a:cs typeface="Georgia" pitchFamily="34" charset="-120"/>
-              </a:rPr>
-              <a:t>bhūta–tanmātra</a:t>
-            </a:r>
-            <a:pPr algn="l" indent="0" marL="0">
-              <a:lnSpc>
-                <a:spcPts val="1680"/>
-              </a:lnSpc>
-              <a:spcBef>
-                <a:spcPts val="300"/>
-              </a:spcBef>
-              <a:spcAft>
-                <a:spcPts val="300"/>
-              </a:spcAft>
-              <a:buNone/>
-            </a:pPr>
-            <a:r>
-              <a:rPr lang="en-US" sz="1200" dirty="0">
-                <a:solidFill>
-                  <a:srgbClr val="1A1A1A"/>
-                </a:solidFill>
-                <a:latin typeface="Georgia" pitchFamily="34" charset="0"/>
-                <a:ea typeface="Georgia" pitchFamily="34" charset="-122"/>
-                <a:cs typeface="Georgia" pitchFamily="34" charset="-120"/>
-              </a:rPr>
-              <a:t> pairing and prove the quality-count rule (1, 2, 3, 4, 5 for sky, air, fire, water, earth) is internally consistent given the emergence sequence.</a:t>
-            </a:r>
-            <a:endParaRPr lang="en-US" sz="1200" dirty="0"/>
-          </a:p>
-        </p:txBody>
-      </p:sp>
-      <p:sp>
-        <p:nvSpPr>
-          <p:cNvPr id="7" name="Text 5"/>
-          <p:cNvSpPr/>
-          <p:nvPr/>
-        </p:nvSpPr>
-        <p:spPr>
-          <a:xfrm>
             <a:off x="406301" y="4434929"/>
             <a:ext cx="8498026" cy="213271"/>
           </a:xfrm>
@@ -2162,7 +2465,7 @@
                 <a:ea typeface="Times New Roman" pitchFamily="34" charset="-122"/>
                 <a:cs typeface="Times New Roman" pitchFamily="34" charset="-120"/>
               </a:rPr>
-              <a:t>Citation(s) used</a:t>
+              <a:t>Core (25 min) (cont.)</a:t>
             </a:r>
             <a:endParaRPr lang="en-US" sz="1800" dirty="0"/>
           </a:p>
@@ -2176,8 +2479,8 @@
         </p:nvSpPr>
         <p:spPr>
           <a:xfrm>
-            <a:off x="406301" y="870942"/>
-            <a:ext cx="8498026" cy="445591"/>
+            <a:off x="634901" y="883593"/>
+            <a:ext cx="8102798" cy="487561"/>
           </a:xfrm>
           <a:prstGeom prst="rect">
             <a:avLst/>
@@ -2189,6 +2492,418 @@
           <a:bodyPr wrap="square" lIns="0" tIns="0" rIns="0" bIns="0" rtlCol="0" anchor="t"/>
           <a:lstStyle/>
           <a:p>
+            <a:pPr algn="l" marL="342900" indent="-342900">
+              <a:lnSpc>
+                <a:spcPts val="1620"/>
+              </a:lnSpc>
+              <a:spcAft>
+                <a:spcPts val="300"/>
+              </a:spcAft>
+              <a:buSzPct val="100000"/>
+              <a:buChar char="•"/>
+            </a:pPr>
+            <a:r>
+              <a:rPr lang="en-US" sz="1200" dirty="0">
+                <a:solidFill>
+                  <a:srgbClr val="1A1A1A"/>
+                </a:solidFill>
+                <a:latin typeface="Georgia" pitchFamily="34" charset="0"/>
+                <a:ea typeface="Georgia" pitchFamily="34" charset="-122"/>
+                <a:cs typeface="Georgia" pitchFamily="34" charset="-120"/>
+              </a:rPr>
+              <a:t>Word-by-word with class: </a:t>
+            </a:r>
+            <a:pPr algn="l" indent="0" marL="0">
+              <a:lnSpc>
+                <a:spcPts val="1620"/>
+              </a:lnSpc>
+              <a:spcAft>
+                <a:spcPts val="300"/>
+              </a:spcAft>
+              <a:buNone/>
+            </a:pPr>
+            <a:r>
+              <a:rPr lang="en-US" sz="1200" i="1" dirty="0">
+                <a:solidFill>
+                  <a:srgbClr val="1A1A1A"/>
+                </a:solidFill>
+                <a:latin typeface="Georgia" pitchFamily="34" charset="0"/>
+                <a:ea typeface="Georgia" pitchFamily="34" charset="-122"/>
+                <a:cs typeface="Georgia" pitchFamily="34" charset="-120"/>
+              </a:rPr>
+              <a:t>mṛdutvam</a:t>
+            </a:r>
+            <a:pPr algn="l" indent="0" marL="0">
+              <a:lnSpc>
+                <a:spcPts val="1620"/>
+              </a:lnSpc>
+              <a:spcAft>
+                <a:spcPts val="300"/>
+              </a:spcAft>
+              <a:buNone/>
+            </a:pPr>
+            <a:r>
+              <a:rPr lang="en-US" sz="1200" dirty="0">
+                <a:solidFill>
+                  <a:srgbClr val="1A1A1A"/>
+                </a:solidFill>
+                <a:latin typeface="Georgia" pitchFamily="34" charset="0"/>
+                <a:ea typeface="Georgia" pitchFamily="34" charset="-122"/>
+                <a:cs typeface="Georgia" pitchFamily="34" charset="-120"/>
+              </a:rPr>
+              <a:t> = softness, </a:t>
+            </a:r>
+            <a:pPr algn="l" indent="0" marL="0">
+              <a:lnSpc>
+                <a:spcPts val="1620"/>
+              </a:lnSpc>
+              <a:spcAft>
+                <a:spcPts val="300"/>
+              </a:spcAft>
+              <a:buNone/>
+            </a:pPr>
+            <a:r>
+              <a:rPr lang="en-US" sz="1200" i="1" dirty="0">
+                <a:solidFill>
+                  <a:srgbClr val="1A1A1A"/>
+                </a:solidFill>
+                <a:latin typeface="Georgia" pitchFamily="34" charset="0"/>
+                <a:ea typeface="Georgia" pitchFamily="34" charset="-122"/>
+                <a:cs typeface="Georgia" pitchFamily="34" charset="-120"/>
+              </a:rPr>
+              <a:t>kaṭhinatvam</a:t>
+            </a:r>
+            <a:pPr algn="l" indent="0" marL="0">
+              <a:lnSpc>
+                <a:spcPts val="1620"/>
+              </a:lnSpc>
+              <a:spcAft>
+                <a:spcPts val="300"/>
+              </a:spcAft>
+              <a:buNone/>
+            </a:pPr>
+            <a:r>
+              <a:rPr lang="en-US" sz="1200" dirty="0">
+                <a:solidFill>
+                  <a:srgbClr val="1A1A1A"/>
+                </a:solidFill>
+                <a:latin typeface="Georgia" pitchFamily="34" charset="0"/>
+                <a:ea typeface="Georgia" pitchFamily="34" charset="-122"/>
+                <a:cs typeface="Georgia" pitchFamily="34" charset="-120"/>
+              </a:rPr>
+              <a:t> = hardness, </a:t>
+            </a:r>
+            <a:pPr algn="l" indent="0" marL="0">
+              <a:lnSpc>
+                <a:spcPts val="1620"/>
+              </a:lnSpc>
+              <a:spcAft>
+                <a:spcPts val="300"/>
+              </a:spcAft>
+              <a:buNone/>
+            </a:pPr>
+            <a:r>
+              <a:rPr lang="en-US" sz="1200" i="1" dirty="0">
+                <a:solidFill>
+                  <a:srgbClr val="1A1A1A"/>
+                </a:solidFill>
+                <a:latin typeface="Georgia" pitchFamily="34" charset="0"/>
+                <a:ea typeface="Georgia" pitchFamily="34" charset="-122"/>
+                <a:cs typeface="Georgia" pitchFamily="34" charset="-120"/>
+              </a:rPr>
+              <a:t>śaityam</a:t>
+            </a:r>
+            <a:pPr algn="l" indent="0" marL="0">
+              <a:lnSpc>
+                <a:spcPts val="1620"/>
+              </a:lnSpc>
+              <a:spcAft>
+                <a:spcPts val="300"/>
+              </a:spcAft>
+              <a:buNone/>
+            </a:pPr>
+            <a:r>
+              <a:rPr lang="en-US" sz="1200" dirty="0">
+                <a:solidFill>
+                  <a:srgbClr val="1A1A1A"/>
+                </a:solidFill>
+                <a:latin typeface="Georgia" pitchFamily="34" charset="0"/>
+                <a:ea typeface="Georgia" pitchFamily="34" charset="-122"/>
+                <a:cs typeface="Georgia" pitchFamily="34" charset="-120"/>
+              </a:rPr>
+              <a:t> = cold, </a:t>
+            </a:r>
+            <a:pPr algn="l" indent="0" marL="0">
+              <a:lnSpc>
+                <a:spcPts val="1620"/>
+              </a:lnSpc>
+              <a:spcAft>
+                <a:spcPts val="300"/>
+              </a:spcAft>
+              <a:buNone/>
+            </a:pPr>
+            <a:r>
+              <a:rPr lang="en-US" sz="1200" i="1" dirty="0">
+                <a:solidFill>
+                  <a:srgbClr val="1A1A1A"/>
+                </a:solidFill>
+                <a:latin typeface="Georgia" pitchFamily="34" charset="0"/>
+                <a:ea typeface="Georgia" pitchFamily="34" charset="-122"/>
+                <a:cs typeface="Georgia" pitchFamily="34" charset="-120"/>
+              </a:rPr>
+              <a:t>uṣṇatvam</a:t>
+            </a:r>
+            <a:pPr algn="l" indent="0" marL="0">
+              <a:lnSpc>
+                <a:spcPts val="1620"/>
+              </a:lnSpc>
+              <a:spcAft>
+                <a:spcPts val="300"/>
+              </a:spcAft>
+              <a:buNone/>
+            </a:pPr>
+            <a:r>
+              <a:rPr lang="en-US" sz="1200" dirty="0">
+                <a:solidFill>
+                  <a:srgbClr val="1A1A1A"/>
+                </a:solidFill>
+                <a:latin typeface="Georgia" pitchFamily="34" charset="0"/>
+                <a:ea typeface="Georgia" pitchFamily="34" charset="-122"/>
+                <a:cs typeface="Georgia" pitchFamily="34" charset="-120"/>
+              </a:rPr>
+              <a:t> = heat. </a:t>
+            </a:r>
+            <a:pPr algn="l" indent="0" marL="0">
+              <a:lnSpc>
+                <a:spcPts val="1620"/>
+              </a:lnSpc>
+              <a:spcAft>
+                <a:spcPts val="300"/>
+              </a:spcAft>
+              <a:buNone/>
+            </a:pPr>
+            <a:r>
+              <a:rPr lang="en-US" sz="1200" i="1" dirty="0">
+                <a:solidFill>
+                  <a:srgbClr val="1A1A1A"/>
+                </a:solidFill>
+                <a:latin typeface="Georgia" pitchFamily="34" charset="0"/>
+                <a:ea typeface="Georgia" pitchFamily="34" charset="-122"/>
+                <a:cs typeface="Georgia" pitchFamily="34" charset="-120"/>
+              </a:rPr>
+              <a:t>etat</a:t>
+            </a:r>
+            <a:pPr algn="l" indent="0" marL="0">
+              <a:lnSpc>
+                <a:spcPts val="1620"/>
+              </a:lnSpc>
+              <a:spcAft>
+                <a:spcPts val="300"/>
+              </a:spcAft>
+              <a:buNone/>
+            </a:pPr>
+            <a:r>
+              <a:rPr lang="en-US" sz="1200" dirty="0">
+                <a:solidFill>
+                  <a:srgbClr val="1A1A1A"/>
+                </a:solidFill>
+                <a:latin typeface="Georgia" pitchFamily="34" charset="0"/>
+                <a:ea typeface="Georgia" pitchFamily="34" charset="-122"/>
+                <a:cs typeface="Georgia" pitchFamily="34" charset="-120"/>
+              </a:rPr>
+              <a:t> = these. </a:t>
+            </a:r>
+            <a:pPr algn="l" indent="0" marL="0">
+              <a:lnSpc>
+                <a:spcPts val="1620"/>
+              </a:lnSpc>
+              <a:spcAft>
+                <a:spcPts val="300"/>
+              </a:spcAft>
+              <a:buNone/>
+            </a:pPr>
+            <a:r>
+              <a:rPr lang="en-US" sz="1200" i="1" dirty="0">
+                <a:solidFill>
+                  <a:srgbClr val="1A1A1A"/>
+                </a:solidFill>
+                <a:latin typeface="Georgia" pitchFamily="34" charset="0"/>
+                <a:ea typeface="Georgia" pitchFamily="34" charset="-122"/>
+                <a:cs typeface="Georgia" pitchFamily="34" charset="-120"/>
+              </a:rPr>
+              <a:t>sparśasya sparśatvam</a:t>
+            </a:r>
+            <a:pPr algn="l" indent="0" marL="0">
+              <a:lnSpc>
+                <a:spcPts val="1620"/>
+              </a:lnSpc>
+              <a:spcAft>
+                <a:spcPts val="300"/>
+              </a:spcAft>
+              <a:buNone/>
+            </a:pPr>
+            <a:r>
+              <a:rPr lang="en-US" sz="1200" dirty="0">
+                <a:solidFill>
+                  <a:srgbClr val="1A1A1A"/>
+                </a:solidFill>
+                <a:latin typeface="Georgia" pitchFamily="34" charset="0"/>
+                <a:ea typeface="Georgia" pitchFamily="34" charset="-122"/>
+                <a:cs typeface="Georgia" pitchFamily="34" charset="-120"/>
+              </a:rPr>
+              <a:t> = the touch-ness of touch. </a:t>
+            </a:r>
+            <a:pPr algn="l" indent="0" marL="0">
+              <a:lnSpc>
+                <a:spcPts val="1620"/>
+              </a:lnSpc>
+              <a:spcAft>
+                <a:spcPts val="300"/>
+              </a:spcAft>
+              <a:buNone/>
+            </a:pPr>
+            <a:r>
+              <a:rPr lang="en-US" sz="1200" i="1" dirty="0">
+                <a:solidFill>
+                  <a:srgbClr val="1A1A1A"/>
+                </a:solidFill>
+                <a:latin typeface="Georgia" pitchFamily="34" charset="0"/>
+                <a:ea typeface="Georgia" pitchFamily="34" charset="-122"/>
+                <a:cs typeface="Georgia" pitchFamily="34" charset="-120"/>
+              </a:rPr>
+              <a:t>tanmātratvam nabhasvataḥ</a:t>
+            </a:r>
+            <a:pPr algn="l" indent="0" marL="0">
+              <a:lnSpc>
+                <a:spcPts val="1620"/>
+              </a:lnSpc>
+              <a:spcAft>
+                <a:spcPts val="300"/>
+              </a:spcAft>
+              <a:buNone/>
+            </a:pPr>
+            <a:r>
+              <a:rPr lang="en-US" sz="1200" dirty="0">
+                <a:solidFill>
+                  <a:srgbClr val="1A1A1A"/>
+                </a:solidFill>
+                <a:latin typeface="Georgia" pitchFamily="34" charset="0"/>
+                <a:ea typeface="Georgia" pitchFamily="34" charset="-122"/>
+                <a:cs typeface="Georgia" pitchFamily="34" charset="-120"/>
+              </a:rPr>
+              <a:t> = the subtle-essence-ness of air.</a:t>
+            </a:r>
+            <a:endParaRPr lang="en-US" sz="1200" dirty="0"/>
+          </a:p>
+        </p:txBody>
+      </p:sp>
+      <p:sp>
+        <p:nvSpPr>
+          <p:cNvPr id="5" name="Text 3"/>
+          <p:cNvSpPr/>
+          <p:nvPr/>
+        </p:nvSpPr>
+        <p:spPr>
+          <a:xfrm>
+            <a:off x="634901" y="1472654"/>
+            <a:ext cx="8102798" cy="693241"/>
+          </a:xfrm>
+          <a:prstGeom prst="rect">
+            <a:avLst/>
+          </a:prstGeom>
+          <a:noFill/>
+          <a:ln/>
+        </p:spPr>
+        <p:txBody>
+          <a:bodyPr wrap="square" lIns="0" tIns="0" rIns="0" bIns="0" rtlCol="0" anchor="t"/>
+          <a:lstStyle/>
+          <a:p>
+            <a:pPr algn="l" marL="342900" indent="-342900">
+              <a:lnSpc>
+                <a:spcPts val="1620"/>
+              </a:lnSpc>
+              <a:spcAft>
+                <a:spcPts val="300"/>
+              </a:spcAft>
+              <a:buSzPct val="100000"/>
+              <a:buChar char="•"/>
+            </a:pPr>
+            <a:r>
+              <a:rPr lang="en-US" sz="1200" dirty="0">
+                <a:solidFill>
+                  <a:srgbClr val="1A1A1A"/>
+                </a:solidFill>
+                <a:latin typeface="Georgia" pitchFamily="34" charset="0"/>
+                <a:ea typeface="Georgia" pitchFamily="34" charset="-122"/>
+                <a:cs typeface="Georgia" pitchFamily="34" charset="-120"/>
+              </a:rPr>
+              <a:t>Discussion: notice that </a:t>
+            </a:r>
+            <a:pPr algn="l" indent="0" marL="0">
+              <a:lnSpc>
+                <a:spcPts val="1620"/>
+              </a:lnSpc>
+              <a:spcAft>
+                <a:spcPts val="300"/>
+              </a:spcAft>
+              <a:buNone/>
+            </a:pPr>
+            <a:r>
+              <a:rPr lang="en-US" sz="1200" i="1" dirty="0">
+                <a:solidFill>
+                  <a:srgbClr val="1A1A1A"/>
+                </a:solidFill>
+                <a:latin typeface="Georgia" pitchFamily="34" charset="0"/>
+                <a:ea typeface="Georgia" pitchFamily="34" charset="-122"/>
+                <a:cs typeface="Georgia" pitchFamily="34" charset="-120"/>
+              </a:rPr>
+              <a:t>sparśa</a:t>
+            </a:r>
+            <a:pPr algn="l" indent="0" marL="0">
+              <a:lnSpc>
+                <a:spcPts val="1620"/>
+              </a:lnSpc>
+              <a:spcAft>
+                <a:spcPts val="300"/>
+              </a:spcAft>
+              <a:buNone/>
+            </a:pPr>
+            <a:r>
+              <a:rPr lang="en-US" sz="1200" dirty="0">
+                <a:solidFill>
+                  <a:srgbClr val="1A1A1A"/>
+                </a:solidFill>
+                <a:latin typeface="Georgia" pitchFamily="34" charset="0"/>
+                <a:ea typeface="Georgia" pitchFamily="34" charset="-122"/>
+                <a:cs typeface="Georgia" pitchFamily="34" charset="-120"/>
+              </a:rPr>
+              <a:t> (touch) here includes thermal sensations (cold, heat). This is broader than modern English "touch" (which usually means pressure/texture). The framework is more inclusive than we'd assume from a casual reading.</a:t>
+            </a:r>
+            <a:endParaRPr lang="en-US" sz="1200" dirty="0"/>
+          </a:p>
+        </p:txBody>
+      </p:sp>
+      <p:sp>
+        <p:nvSpPr>
+          <p:cNvPr id="6" name="Text 4"/>
+          <p:cNvSpPr/>
+          <p:nvPr/>
+        </p:nvSpPr>
+        <p:spPr>
+          <a:xfrm>
+            <a:off x="406301" y="4434929"/>
+            <a:ext cx="8498026" cy="213271"/>
+          </a:xfrm>
+          <a:prstGeom prst="rect">
+            <a:avLst/>
+          </a:prstGeom>
+          <a:noFill/>
+          <a:ln/>
+        </p:spPr>
+        <p:txBody>
+          <a:bodyPr wrap="square" lIns="0" tIns="0" rIns="0" bIns="0" rtlCol="0" anchor="t"/>
+          <a:lstStyle/>
+          <a:p>
             <a:pPr algn="l" indent="0" marL="0">
               <a:lnSpc>
                 <a:spcPts val="1680"/>
@@ -2210,8 +2925,143 @@
                 <a:ea typeface="Georgia" pitchFamily="34" charset="-122"/>
                 <a:cs typeface="Georgia" pitchFamily="34" charset="-120"/>
               </a:rPr>
-              <a:t>– SB 3.26.36 — vidya-karana RAG cache </a:t>
-            </a:r>
+              <a:t>Senior ·  · IKS Curriculum</a:t>
+            </a:r>
+            <a:endParaRPr lang="en-US" sz="1200" dirty="0"/>
+          </a:p>
+        </p:txBody>
+      </p:sp>
+    </p:spTree>
+  </p:cSld>
+  <p:clrMapOvr>
+    <a:masterClrMapping/>
+  </p:clrMapOvr>
+</p:sld>
+</file>
+
+<file path=ppt/slides/slide11.xml><?xml version="1.0" encoding="utf-8"?>
+<p:sld xmlns:a="http://schemas.openxmlformats.org/drawingml/2006/main" xmlns:r="http://schemas.openxmlformats.org/officeDocument/2006/relationships" xmlns:p="http://schemas.openxmlformats.org/presentationml/2006/main">
+  <p:cSld name="Slide 11">
+    <p:bg>
+      <p:bgPr>
+        <a:solidFill>
+          <a:srgbClr val="FAF7F2"/>
+        </a:solidFill>
+      </p:bgPr>
+    </p:bg>
+    <p:spTree>
+      <p:nvGrpSpPr>
+        <p:cNvPr id="1" name=""/>
+        <p:cNvGrpSpPr/>
+        <p:nvPr/>
+      </p:nvGrpSpPr>
+      <p:grpSpPr>
+        <a:xfrm>
+          <a:off x="0" y="0"/>
+          <a:ext cx="0" cy="0"/>
+          <a:chOff x="0" y="0"/>
+          <a:chExt cx="0" cy="0"/>
+        </a:xfrm>
+      </p:grpSpPr>
+      <p:sp>
+        <p:nvSpPr>
+          <p:cNvPr id="2" name="Text 0"/>
+          <p:cNvSpPr/>
+          <p:nvPr/>
+        </p:nvSpPr>
+        <p:spPr>
+          <a:xfrm>
+            <a:off x="0" y="0"/>
+            <a:ext cx="9144000" cy="101501"/>
+          </a:xfrm>
+          <a:prstGeom prst="rect">
+            <a:avLst/>
+          </a:prstGeom>
+          <a:solidFill>
+            <a:srgbClr val="5D1D2E"/>
+          </a:solidFill>
+          <a:ln/>
+        </p:spPr>
+        <p:txBody>
+          <a:bodyPr wrap="square" rtlCol="0" anchor="ctr"/>
+          <a:lstStyle/>
+          <a:p>
+            <a:pPr indent="0" marL="0">
+              <a:buNone/>
+            </a:pPr>
+            <a:endParaRPr lang="en-US" dirty="0"/>
+          </a:p>
+        </p:txBody>
+      </p:sp>
+      <p:sp>
+        <p:nvSpPr>
+          <p:cNvPr id="3" name="Text 1"/>
+          <p:cNvSpPr/>
+          <p:nvPr/>
+        </p:nvSpPr>
+        <p:spPr>
+          <a:xfrm>
+            <a:off x="406301" y="457051"/>
+            <a:ext cx="8498026" cy="274290"/>
+          </a:xfrm>
+          <a:prstGeom prst="rect">
+            <a:avLst/>
+          </a:prstGeom>
+          <a:noFill/>
+          <a:ln/>
+        </p:spPr>
+        <p:txBody>
+          <a:bodyPr wrap="square" lIns="0" tIns="0" rIns="0" bIns="0" rtlCol="0" anchor="t"/>
+          <a:lstStyle/>
+          <a:p>
+            <a:pPr algn="l" indent="0" marL="0">
+              <a:lnSpc>
+                <a:spcPts val="2160"/>
+              </a:lnSpc>
+              <a:spcBef>
+                <a:spcPts val="600"/>
+              </a:spcBef>
+              <a:spcAft>
+                <a:spcPts val="800"/>
+              </a:spcAft>
+              <a:buNone/>
+            </a:pPr>
+            <a:r>
+              <a:rPr lang="en-US" sz="1800" b="1" dirty="0">
+                <a:solidFill>
+                  <a:srgbClr val="997929"/>
+                </a:solidFill>
+                <a:latin typeface="Times New Roman" pitchFamily="34" charset="0"/>
+                <a:ea typeface="Times New Roman" pitchFamily="34" charset="-122"/>
+                <a:cs typeface="Times New Roman" pitchFamily="34" charset="-120"/>
+              </a:rPr>
+              <a:t>Concept check (10 min)</a:t>
+            </a:r>
+            <a:endParaRPr lang="en-US" sz="1800" dirty="0"/>
+          </a:p>
+        </p:txBody>
+      </p:sp>
+      <p:sp>
+        <p:nvSpPr>
+          <p:cNvPr id="4" name="Text 2"/>
+          <p:cNvSpPr/>
+          <p:nvPr/>
+        </p:nvSpPr>
+        <p:spPr>
+          <a:xfrm>
+            <a:off x="406301" y="870942"/>
+            <a:ext cx="8498026" cy="213271"/>
+          </a:xfrm>
+          <a:prstGeom prst="rect">
+            <a:avLst/>
+          </a:prstGeom>
+          <a:noFill/>
+          <a:ln/>
+        </p:spPr>
+        <p:txBody>
+          <a:bodyPr wrap="square" lIns="0" tIns="0" rIns="0" bIns="0" rtlCol="0" anchor="t"/>
+          <a:lstStyle/>
+          <a:p>
             <a:pPr algn="l" indent="0" marL="0">
               <a:lnSpc>
                 <a:spcPts val="1680"/>
@@ -2233,19 +3083,1306 @@
                 <a:ea typeface="Georgia" pitchFamily="34" charset="-122"/>
                 <a:cs typeface="Georgia" pitchFamily="34" charset="-120"/>
               </a:rPr>
+              <a:t>Worksheet question (1 mark each):</a:t>
+            </a:r>
+            <a:endParaRPr lang="en-US" sz="1200" dirty="0"/>
+          </a:p>
+        </p:txBody>
+      </p:sp>
+      <p:sp>
+        <p:nvSpPr>
+          <p:cNvPr id="5" name="Text 3"/>
+          <p:cNvSpPr/>
+          <p:nvPr/>
+        </p:nvSpPr>
+        <p:spPr>
+          <a:xfrm>
+            <a:off x="634901" y="1173063"/>
+            <a:ext cx="8102798" cy="1257002"/>
+          </a:xfrm>
+          <a:prstGeom prst="rect">
+            <a:avLst/>
+          </a:prstGeom>
+          <a:noFill/>
+          <a:ln/>
+        </p:spPr>
+        <p:txBody>
+          <a:bodyPr wrap="square" lIns="0" tIns="0" rIns="0" bIns="0" rtlCol="0" anchor="t"/>
+          <a:lstStyle/>
+          <a:p>
+            <a:pPr algn="l" marL="342900" indent="-342900">
+              <a:lnSpc>
+                <a:spcPts val="1620"/>
+              </a:lnSpc>
+              <a:spcAft>
+                <a:spcPts val="300"/>
+              </a:spcAft>
+              <a:buSzPct val="100000"/>
+              <a:buChar char="•"/>
+            </a:pPr>
+            <a:r>
+              <a:rPr lang="en-US" sz="1200" dirty="0">
+                <a:solidFill>
+                  <a:srgbClr val="1A1A1A"/>
+                </a:solidFill>
+                <a:latin typeface="Georgia" pitchFamily="34" charset="0"/>
+                <a:ea typeface="Georgia" pitchFamily="34" charset="-122"/>
+                <a:cs typeface="Georgia" pitchFamily="34" charset="-120"/>
+              </a:rPr>
+              <a:t>Why does </a:t>
+            </a:r>
+            <a:pPr algn="l" indent="0" marL="0">
+              <a:lnSpc>
+                <a:spcPts val="1620"/>
+              </a:lnSpc>
+              <a:spcAft>
+                <a:spcPts val="300"/>
+              </a:spcAft>
+              <a:buNone/>
+            </a:pPr>
+            <a:r>
+              <a:rPr lang="en-US" sz="1200" i="1" dirty="0">
+                <a:solidFill>
+                  <a:srgbClr val="1A1A1A"/>
+                </a:solidFill>
+                <a:latin typeface="Georgia" pitchFamily="34" charset="0"/>
+                <a:ea typeface="Georgia" pitchFamily="34" charset="-122"/>
+                <a:cs typeface="Georgia" pitchFamily="34" charset="-120"/>
+              </a:rPr>
+              <a:t>ākāśa</a:t>
+            </a:r>
+            <a:pPr algn="l" indent="0" marL="0">
+              <a:lnSpc>
+                <a:spcPts val="1620"/>
+              </a:lnSpc>
+              <a:spcAft>
+                <a:spcPts val="300"/>
+              </a:spcAft>
+              <a:buNone/>
+            </a:pPr>
+            <a:r>
+              <a:rPr lang="en-US" sz="1200" dirty="0">
+                <a:solidFill>
+                  <a:srgbClr val="1A1A1A"/>
+                </a:solidFill>
+                <a:latin typeface="Georgia" pitchFamily="34" charset="0"/>
+                <a:ea typeface="Georgia" pitchFamily="34" charset="-122"/>
+                <a:cs typeface="Georgia" pitchFamily="34" charset="-120"/>
+              </a:rPr>
+              <a:t> have only one quality?</a:t>
+            </a:r>
+            <a:endParaRPr lang="en-US" sz="1200" dirty="0"/>
+          </a:p>
+          <a:p>
+            <a:pPr algn="l" marL="342900" indent="-342900">
+              <a:lnSpc>
+                <a:spcPts val="1620"/>
+              </a:lnSpc>
+              <a:spcAft>
+                <a:spcPts val="300"/>
+              </a:spcAft>
+              <a:buSzPct val="100000"/>
+              <a:buChar char="•"/>
+            </a:pPr>
+            <a:r>
+              <a:rPr lang="en-US" sz="1200" dirty="0">
+                <a:solidFill>
+                  <a:srgbClr val="1A1A1A"/>
+                </a:solidFill>
+                <a:latin typeface="Georgia" pitchFamily="34" charset="0"/>
+                <a:ea typeface="Georgia" pitchFamily="34" charset="-122"/>
+                <a:cs typeface="Georgia" pitchFamily="34" charset="-120"/>
+              </a:rPr>
+              <a:t>Why does </a:t>
+            </a:r>
+            <a:pPr algn="l" indent="0" marL="0">
+              <a:lnSpc>
+                <a:spcPts val="1620"/>
+              </a:lnSpc>
+              <a:spcAft>
+                <a:spcPts val="300"/>
+              </a:spcAft>
+              <a:buNone/>
+            </a:pPr>
+            <a:r>
+              <a:rPr lang="en-US" sz="1200" i="1" dirty="0">
+                <a:solidFill>
+                  <a:srgbClr val="1A1A1A"/>
+                </a:solidFill>
+                <a:latin typeface="Georgia" pitchFamily="34" charset="0"/>
+                <a:ea typeface="Georgia" pitchFamily="34" charset="-122"/>
+                <a:cs typeface="Georgia" pitchFamily="34" charset="-120"/>
+              </a:rPr>
+              <a:t>pṛthvī</a:t>
+            </a:r>
+            <a:pPr algn="l" indent="0" marL="0">
+              <a:lnSpc>
+                <a:spcPts val="1620"/>
+              </a:lnSpc>
+              <a:spcAft>
+                <a:spcPts val="300"/>
+              </a:spcAft>
+              <a:buNone/>
+            </a:pPr>
+            <a:r>
+              <a:rPr lang="en-US" sz="1200" dirty="0">
+                <a:solidFill>
+                  <a:srgbClr val="1A1A1A"/>
+                </a:solidFill>
+                <a:latin typeface="Georgia" pitchFamily="34" charset="0"/>
+                <a:ea typeface="Georgia" pitchFamily="34" charset="-122"/>
+                <a:cs typeface="Georgia" pitchFamily="34" charset="-120"/>
+              </a:rPr>
+              <a:t> have five?</a:t>
+            </a:r>
+            <a:endParaRPr lang="en-US" sz="1200" dirty="0"/>
+          </a:p>
+          <a:p>
+            <a:pPr algn="l" marL="342900" indent="-342900">
+              <a:lnSpc>
+                <a:spcPts val="1620"/>
+              </a:lnSpc>
+              <a:spcAft>
+                <a:spcPts val="300"/>
+              </a:spcAft>
+              <a:buSzPct val="100000"/>
+              <a:buChar char="•"/>
+            </a:pPr>
+            <a:r>
+              <a:rPr lang="en-US" sz="1200" dirty="0">
+                <a:solidFill>
+                  <a:srgbClr val="1A1A1A"/>
+                </a:solidFill>
+                <a:latin typeface="Georgia" pitchFamily="34" charset="0"/>
+                <a:ea typeface="Georgia" pitchFamily="34" charset="-122"/>
+                <a:cs typeface="Georgia" pitchFamily="34" charset="-120"/>
+              </a:rPr>
+              <a:t>What does </a:t>
+            </a:r>
+            <a:pPr algn="l" indent="0" marL="0">
+              <a:lnSpc>
+                <a:spcPts val="1620"/>
+              </a:lnSpc>
+              <a:spcAft>
+                <a:spcPts val="300"/>
+              </a:spcAft>
+              <a:buNone/>
+            </a:pPr>
+            <a:r>
+              <a:rPr lang="en-US" sz="1200" i="1" dirty="0">
+                <a:solidFill>
+                  <a:srgbClr val="1A1A1A"/>
+                </a:solidFill>
+                <a:latin typeface="Georgia" pitchFamily="34" charset="0"/>
+                <a:ea typeface="Georgia" pitchFamily="34" charset="-122"/>
+                <a:cs typeface="Georgia" pitchFamily="34" charset="-120"/>
+              </a:rPr>
+              <a:t>sparśa</a:t>
+            </a:r>
+            <a:pPr algn="l" indent="0" marL="0">
+              <a:lnSpc>
+                <a:spcPts val="1620"/>
+              </a:lnSpc>
+              <a:spcAft>
+                <a:spcPts val="300"/>
+              </a:spcAft>
+              <a:buNone/>
+            </a:pPr>
+            <a:r>
+              <a:rPr lang="en-US" sz="1200" dirty="0">
+                <a:solidFill>
+                  <a:srgbClr val="1A1A1A"/>
+                </a:solidFill>
+                <a:latin typeface="Georgia" pitchFamily="34" charset="0"/>
+                <a:ea typeface="Georgia" pitchFamily="34" charset="-122"/>
+                <a:cs typeface="Georgia" pitchFamily="34" charset="-120"/>
+              </a:rPr>
+              <a:t> include that modern English "touch" doesn't?</a:t>
+            </a:r>
+            <a:endParaRPr lang="en-US" sz="1200" dirty="0"/>
+          </a:p>
+          <a:p>
+            <a:pPr algn="l" marL="342900" indent="-342900">
+              <a:lnSpc>
+                <a:spcPts val="1620"/>
+              </a:lnSpc>
+              <a:spcAft>
+                <a:spcPts val="300"/>
+              </a:spcAft>
+              <a:buSzPct val="100000"/>
+              <a:buChar char="•"/>
+            </a:pPr>
+            <a:r>
+              <a:rPr lang="en-US" sz="1200" dirty="0">
+                <a:solidFill>
+                  <a:srgbClr val="1A1A1A"/>
+                </a:solidFill>
+                <a:latin typeface="Georgia" pitchFamily="34" charset="0"/>
+                <a:ea typeface="Georgia" pitchFamily="34" charset="-122"/>
+                <a:cs typeface="Georgia" pitchFamily="34" charset="-120"/>
+              </a:rPr>
+              <a:t>Why is the bhūta-tanmātra mapping called "one-to-one"?</a:t>
+            </a:r>
+            <a:endParaRPr lang="en-US" sz="1200" dirty="0"/>
+          </a:p>
+          <a:p>
+            <a:pPr algn="l" marL="342900" indent="-342900">
+              <a:lnSpc>
+                <a:spcPts val="1620"/>
+              </a:lnSpc>
+              <a:spcAft>
+                <a:spcPts val="300"/>
+              </a:spcAft>
+              <a:buSzPct val="100000"/>
+              <a:buChar char="•"/>
+            </a:pPr>
+            <a:r>
+              <a:rPr lang="en-US" sz="1200" dirty="0">
+                <a:solidFill>
+                  <a:srgbClr val="1A1A1A"/>
+                </a:solidFill>
+                <a:latin typeface="Georgia" pitchFamily="34" charset="0"/>
+                <a:ea typeface="Georgia" pitchFamily="34" charset="-122"/>
+                <a:cs typeface="Georgia" pitchFamily="34" charset="-120"/>
+              </a:rPr>
+              <a:t>If a sixth element existed, how many qualities would it have, and what would they be? (Discussion question.)</a:t>
+            </a:r>
+            <a:endParaRPr lang="en-US" sz="1200" dirty="0"/>
+          </a:p>
+        </p:txBody>
+      </p:sp>
+      <p:sp>
+        <p:nvSpPr>
+          <p:cNvPr id="6" name="Text 4"/>
+          <p:cNvSpPr/>
+          <p:nvPr/>
+        </p:nvSpPr>
+        <p:spPr>
+          <a:xfrm>
+            <a:off x="406301" y="4434929"/>
+            <a:ext cx="8498026" cy="213271"/>
+          </a:xfrm>
+          <a:prstGeom prst="rect">
+            <a:avLst/>
+          </a:prstGeom>
+          <a:noFill/>
+          <a:ln/>
+        </p:spPr>
+        <p:txBody>
+          <a:bodyPr wrap="square" lIns="0" tIns="0" rIns="0" bIns="0" rtlCol="0" anchor="t"/>
+          <a:lstStyle/>
+          <a:p>
+            <a:pPr algn="l" indent="0" marL="0">
+              <a:lnSpc>
+                <a:spcPts val="1680"/>
+              </a:lnSpc>
+              <a:spcBef>
+                <a:spcPts val="300"/>
+              </a:spcBef>
+              <a:spcAft>
+                <a:spcPts val="300"/>
+              </a:spcAft>
+              <a:buNone/>
+            </a:pPr>
+            <a:r>
+              <a:rPr lang="en-US" sz="1200" dirty="0">
+                <a:solidFill>
+                  <a:srgbClr val="1A1A1A"/>
+                </a:solidFill>
+                <a:latin typeface="Georgia" pitchFamily="34" charset="0"/>
+                <a:ea typeface="Georgia" pitchFamily="34" charset="-122"/>
+                <a:cs typeface="Georgia" pitchFamily="34" charset="-120"/>
+              </a:rPr>
+              <a:t>Senior ·  · IKS Curriculum</a:t>
+            </a:r>
+            <a:endParaRPr lang="en-US" sz="1200" dirty="0"/>
+          </a:p>
+        </p:txBody>
+      </p:sp>
+    </p:spTree>
+  </p:cSld>
+  <p:clrMapOvr>
+    <a:masterClrMapping/>
+  </p:clrMapOvr>
+</p:sld>
+</file>
+
+<file path=ppt/slides/slide12.xml><?xml version="1.0" encoding="utf-8"?>
+<p:sld xmlns:a="http://schemas.openxmlformats.org/drawingml/2006/main" xmlns:r="http://schemas.openxmlformats.org/officeDocument/2006/relationships" xmlns:p="http://schemas.openxmlformats.org/presentationml/2006/main">
+  <p:cSld name="Slide 12">
+    <p:bg>
+      <p:bgPr>
+        <a:solidFill>
+          <a:srgbClr val="FAF7F2"/>
+        </a:solidFill>
+      </p:bgPr>
+    </p:bg>
+    <p:spTree>
+      <p:nvGrpSpPr>
+        <p:cNvPr id="1" name=""/>
+        <p:cNvGrpSpPr/>
+        <p:nvPr/>
+      </p:nvGrpSpPr>
+      <p:grpSpPr>
+        <a:xfrm>
+          <a:off x="0" y="0"/>
+          <a:ext cx="0" cy="0"/>
+          <a:chOff x="0" y="0"/>
+          <a:chExt cx="0" cy="0"/>
+        </a:xfrm>
+      </p:grpSpPr>
+      <p:sp>
+        <p:nvSpPr>
+          <p:cNvPr id="2" name="Text 0"/>
+          <p:cNvSpPr/>
+          <p:nvPr/>
+        </p:nvSpPr>
+        <p:spPr>
+          <a:xfrm>
+            <a:off x="0" y="0"/>
+            <a:ext cx="9144000" cy="101501"/>
+          </a:xfrm>
+          <a:prstGeom prst="rect">
+            <a:avLst/>
+          </a:prstGeom>
+          <a:solidFill>
+            <a:srgbClr val="5D1D2E"/>
+          </a:solidFill>
+          <a:ln/>
+        </p:spPr>
+        <p:txBody>
+          <a:bodyPr wrap="square" rtlCol="0" anchor="ctr"/>
+          <a:lstStyle/>
+          <a:p>
+            <a:pPr indent="0" marL="0">
+              <a:buNone/>
+            </a:pPr>
+            <a:endParaRPr lang="en-US" dirty="0"/>
+          </a:p>
+        </p:txBody>
+      </p:sp>
+      <p:sp>
+        <p:nvSpPr>
+          <p:cNvPr id="3" name="Text 1"/>
+          <p:cNvSpPr/>
+          <p:nvPr/>
+        </p:nvSpPr>
+        <p:spPr>
+          <a:xfrm>
+            <a:off x="406301" y="457051"/>
+            <a:ext cx="8498026" cy="274290"/>
+          </a:xfrm>
+          <a:prstGeom prst="rect">
+            <a:avLst/>
+          </a:prstGeom>
+          <a:noFill/>
+          <a:ln/>
+        </p:spPr>
+        <p:txBody>
+          <a:bodyPr wrap="square" lIns="0" tIns="0" rIns="0" bIns="0" rtlCol="0" anchor="t"/>
+          <a:lstStyle/>
+          <a:p>
+            <a:pPr algn="l" indent="0" marL="0">
+              <a:lnSpc>
+                <a:spcPts val="2160"/>
+              </a:lnSpc>
+              <a:spcBef>
+                <a:spcPts val="600"/>
+              </a:spcBef>
+              <a:spcAft>
+                <a:spcPts val="800"/>
+              </a:spcAft>
+              <a:buNone/>
+            </a:pPr>
+            <a:r>
+              <a:rPr lang="en-US" sz="1800" b="1" dirty="0">
+                <a:solidFill>
+                  <a:srgbClr val="997929"/>
+                </a:solidFill>
+                <a:latin typeface="Times New Roman" pitchFamily="34" charset="0"/>
+                <a:ea typeface="Times New Roman" pitchFamily="34" charset="-122"/>
+                <a:cs typeface="Times New Roman" pitchFamily="34" charset="-120"/>
+              </a:rPr>
+              <a:t>Wrap-up (5 min)</a:t>
+            </a:r>
+            <a:endParaRPr lang="en-US" sz="1800" dirty="0"/>
+          </a:p>
+        </p:txBody>
+      </p:sp>
+      <p:sp>
+        <p:nvSpPr>
+          <p:cNvPr id="4" name="Text 2"/>
+          <p:cNvSpPr/>
+          <p:nvPr/>
+        </p:nvSpPr>
+        <p:spPr>
+          <a:xfrm>
+            <a:off x="634901" y="883593"/>
+            <a:ext cx="8102798" cy="281880"/>
+          </a:xfrm>
+          <a:prstGeom prst="rect">
+            <a:avLst/>
+          </a:prstGeom>
+          <a:noFill/>
+          <a:ln/>
+        </p:spPr>
+        <p:txBody>
+          <a:bodyPr wrap="square" lIns="0" tIns="0" rIns="0" bIns="0" rtlCol="0" anchor="t"/>
+          <a:lstStyle/>
+          <a:p>
+            <a:pPr algn="l" marL="342900" indent="-342900">
+              <a:lnSpc>
+                <a:spcPts val="1620"/>
+              </a:lnSpc>
+              <a:spcAft>
+                <a:spcPts val="300"/>
+              </a:spcAft>
+              <a:buSzPct val="100000"/>
+              <a:buChar char="•"/>
+            </a:pPr>
+            <a:r>
+              <a:rPr lang="en-US" sz="1200" dirty="0">
+                <a:solidFill>
+                  <a:srgbClr val="1A1A1A"/>
+                </a:solidFill>
+                <a:latin typeface="Georgia" pitchFamily="34" charset="0"/>
+                <a:ea typeface="Georgia" pitchFamily="34" charset="-122"/>
+                <a:cs typeface="Georgia" pitchFamily="34" charset="-120"/>
+              </a:rPr>
+              <a:t>Preview Day 4: </a:t>
+            </a:r>
+            <a:pPr algn="l" indent="0" marL="0">
+              <a:lnSpc>
+                <a:spcPts val="1620"/>
+              </a:lnSpc>
+              <a:spcAft>
+                <a:spcPts val="300"/>
+              </a:spcAft>
+              <a:buNone/>
+            </a:pPr>
+            <a:r>
+              <a:rPr lang="en-US" sz="1200" i="1" dirty="0">
+                <a:solidFill>
+                  <a:srgbClr val="1A1A1A"/>
+                </a:solidFill>
+                <a:latin typeface="Georgia" pitchFamily="34" charset="0"/>
+                <a:ea typeface="Georgia" pitchFamily="34" charset="-122"/>
+                <a:cs typeface="Georgia" pitchFamily="34" charset="-120"/>
+              </a:rPr>
+              <a:t>"Tomorrow — Empedocles and Aristotle. Greek and Indian elemental schemes side by side."</a:t>
+            </a:r>
+            <a:endParaRPr lang="en-US" sz="1200" dirty="0"/>
+          </a:p>
+        </p:txBody>
+      </p:sp>
+      <p:sp>
+        <p:nvSpPr>
+          <p:cNvPr id="5" name="Text 3"/>
+          <p:cNvSpPr/>
+          <p:nvPr/>
+        </p:nvSpPr>
+        <p:spPr>
+          <a:xfrm>
+            <a:off x="406301" y="4434929"/>
+            <a:ext cx="8498026" cy="213271"/>
+          </a:xfrm>
+          <a:prstGeom prst="rect">
+            <a:avLst/>
+          </a:prstGeom>
+          <a:noFill/>
+          <a:ln/>
+        </p:spPr>
+        <p:txBody>
+          <a:bodyPr wrap="square" lIns="0" tIns="0" rIns="0" bIns="0" rtlCol="0" anchor="t"/>
+          <a:lstStyle/>
+          <a:p>
+            <a:pPr algn="l" indent="0" marL="0">
+              <a:lnSpc>
+                <a:spcPts val="1680"/>
+              </a:lnSpc>
+              <a:spcBef>
+                <a:spcPts val="300"/>
+              </a:spcBef>
+              <a:spcAft>
+                <a:spcPts val="300"/>
+              </a:spcAft>
+              <a:buNone/>
+            </a:pPr>
+            <a:r>
+              <a:rPr lang="en-US" sz="1200" dirty="0">
+                <a:solidFill>
+                  <a:srgbClr val="1A1A1A"/>
+                </a:solidFill>
+                <a:latin typeface="Georgia" pitchFamily="34" charset="0"/>
+                <a:ea typeface="Georgia" pitchFamily="34" charset="-122"/>
+                <a:cs typeface="Georgia" pitchFamily="34" charset="-120"/>
+              </a:rPr>
+              <a:t>Senior ·  · IKS Curriculum</a:t>
+            </a:r>
+            <a:endParaRPr lang="en-US" sz="1200" dirty="0"/>
+          </a:p>
+        </p:txBody>
+      </p:sp>
+    </p:spTree>
+  </p:cSld>
+  <p:clrMapOvr>
+    <a:masterClrMapping/>
+  </p:clrMapOvr>
+</p:sld>
+</file>
+
+<file path=ppt/slides/slide13.xml><?xml version="1.0" encoding="utf-8"?>
+<p:sld xmlns:a="http://schemas.openxmlformats.org/drawingml/2006/main" xmlns:r="http://schemas.openxmlformats.org/officeDocument/2006/relationships" xmlns:p="http://schemas.openxmlformats.org/presentationml/2006/main">
+  <p:cSld name="Slide 13">
+    <p:bg>
+      <p:bgPr>
+        <a:solidFill>
+          <a:srgbClr val="FAF7F2"/>
+        </a:solidFill>
+      </p:bgPr>
+    </p:bg>
+    <p:spTree>
+      <p:nvGrpSpPr>
+        <p:cNvPr id="1" name=""/>
+        <p:cNvGrpSpPr/>
+        <p:nvPr/>
+      </p:nvGrpSpPr>
+      <p:grpSpPr>
+        <a:xfrm>
+          <a:off x="0" y="0"/>
+          <a:ext cx="0" cy="0"/>
+          <a:chOff x="0" y="0"/>
+          <a:chExt cx="0" cy="0"/>
+        </a:xfrm>
+      </p:grpSpPr>
+      <p:sp>
+        <p:nvSpPr>
+          <p:cNvPr id="2" name="Text 0"/>
+          <p:cNvSpPr/>
+          <p:nvPr/>
+        </p:nvSpPr>
+        <p:spPr>
+          <a:xfrm>
+            <a:off x="0" y="0"/>
+            <a:ext cx="9144000" cy="101501"/>
+          </a:xfrm>
+          <a:prstGeom prst="rect">
+            <a:avLst/>
+          </a:prstGeom>
+          <a:solidFill>
+            <a:srgbClr val="5D1D2E"/>
+          </a:solidFill>
+          <a:ln/>
+        </p:spPr>
+        <p:txBody>
+          <a:bodyPr wrap="square" rtlCol="0" anchor="ctr"/>
+          <a:lstStyle/>
+          <a:p>
+            <a:pPr indent="0" marL="0">
+              <a:buNone/>
+            </a:pPr>
+            <a:endParaRPr lang="en-US" dirty="0"/>
+          </a:p>
+        </p:txBody>
+      </p:sp>
+      <p:sp>
+        <p:nvSpPr>
+          <p:cNvPr id="3" name="Text 1"/>
+          <p:cNvSpPr/>
+          <p:nvPr/>
+        </p:nvSpPr>
+        <p:spPr>
+          <a:xfrm>
+            <a:off x="406301" y="457051"/>
+            <a:ext cx="8498026" cy="274290"/>
+          </a:xfrm>
+          <a:prstGeom prst="rect">
+            <a:avLst/>
+          </a:prstGeom>
+          <a:noFill/>
+          <a:ln/>
+        </p:spPr>
+        <p:txBody>
+          <a:bodyPr wrap="square" lIns="0" tIns="0" rIns="0" bIns="0" rtlCol="0" anchor="t"/>
+          <a:lstStyle/>
+          <a:p>
+            <a:pPr algn="l" indent="0" marL="0">
+              <a:lnSpc>
+                <a:spcPts val="2160"/>
+              </a:lnSpc>
+              <a:spcBef>
+                <a:spcPts val="600"/>
+              </a:spcBef>
+              <a:spcAft>
+                <a:spcPts val="800"/>
+              </a:spcAft>
+              <a:buNone/>
+            </a:pPr>
+            <a:r>
+              <a:rPr lang="en-US" sz="1800" b="1" dirty="0">
+                <a:solidFill>
+                  <a:srgbClr val="997929"/>
+                </a:solidFill>
+                <a:latin typeface="Times New Roman" pitchFamily="34" charset="0"/>
+                <a:ea typeface="Times New Roman" pitchFamily="34" charset="-122"/>
+                <a:cs typeface="Times New Roman" pitchFamily="34" charset="-120"/>
+              </a:rPr>
+              <a:t>Differentiation</a:t>
+            </a:r>
+            <a:endParaRPr lang="en-US" sz="1800" dirty="0"/>
+          </a:p>
+        </p:txBody>
+      </p:sp>
+      <p:sp>
+        <p:nvSpPr>
+          <p:cNvPr id="4" name="Text 2"/>
+          <p:cNvSpPr/>
+          <p:nvPr/>
+        </p:nvSpPr>
+        <p:spPr>
+          <a:xfrm>
+            <a:off x="634901" y="883593"/>
+            <a:ext cx="8102798" cy="731341"/>
+          </a:xfrm>
+          <a:prstGeom prst="rect">
+            <a:avLst/>
+          </a:prstGeom>
+          <a:noFill/>
+          <a:ln/>
+        </p:spPr>
+        <p:txBody>
+          <a:bodyPr wrap="square" lIns="0" tIns="0" rIns="0" bIns="0" rtlCol="0" anchor="t"/>
+          <a:lstStyle/>
+          <a:p>
+            <a:pPr algn="l" marL="342900" indent="-342900">
+              <a:lnSpc>
+                <a:spcPts val="1620"/>
+              </a:lnSpc>
+              <a:spcAft>
+                <a:spcPts val="300"/>
+              </a:spcAft>
+              <a:buSzPct val="100000"/>
+              <a:buChar char="•"/>
+            </a:pPr>
+            <a:r>
+              <a:rPr lang="en-US" sz="1200" b="1" dirty="0">
+                <a:solidFill>
+                  <a:srgbClr val="1A1A1A"/>
+                </a:solidFill>
+                <a:latin typeface="Georgia" pitchFamily="34" charset="0"/>
+                <a:ea typeface="Georgia" pitchFamily="34" charset="-122"/>
+                <a:cs typeface="Georgia" pitchFamily="34" charset="-120"/>
+              </a:rPr>
+              <a:t>Tier up:</a:t>
+            </a:r>
+            <a:pPr algn="l" indent="0" marL="0">
+              <a:lnSpc>
+                <a:spcPts val="1620"/>
+              </a:lnSpc>
+              <a:spcAft>
+                <a:spcPts val="300"/>
+              </a:spcAft>
+              <a:buNone/>
+            </a:pPr>
+            <a:r>
+              <a:rPr lang="en-US" sz="1200" dirty="0">
+                <a:solidFill>
+                  <a:srgbClr val="1A1A1A"/>
+                </a:solidFill>
+                <a:latin typeface="Georgia" pitchFamily="34" charset="0"/>
+                <a:ea typeface="Georgia" pitchFamily="34" charset="-122"/>
+                <a:cs typeface="Georgia" pitchFamily="34" charset="-120"/>
+              </a:rPr>
+              <a:t> Write a 1-page response to "if a sixth element existed (e.g. 'information'), where would it sit and what would its tanmātra be?"</a:t>
+            </a:r>
+            <a:endParaRPr lang="en-US" sz="1200" dirty="0"/>
+          </a:p>
+          <a:p>
+            <a:pPr algn="l" marL="342900" indent="-342900">
+              <a:lnSpc>
+                <a:spcPts val="1620"/>
+              </a:lnSpc>
+              <a:spcAft>
+                <a:spcPts val="300"/>
+              </a:spcAft>
+              <a:buSzPct val="100000"/>
+              <a:buChar char="•"/>
+            </a:pPr>
+            <a:r>
+              <a:rPr lang="en-US" sz="1200" b="1" dirty="0">
+                <a:solidFill>
+                  <a:srgbClr val="1A1A1A"/>
+                </a:solidFill>
+                <a:latin typeface="Georgia" pitchFamily="34" charset="0"/>
+                <a:ea typeface="Georgia" pitchFamily="34" charset="-122"/>
+                <a:cs typeface="Georgia" pitchFamily="34" charset="-120"/>
+              </a:rPr>
+              <a:t>Tier down:</a:t>
+            </a:r>
+            <a:pPr algn="l" indent="0" marL="0">
+              <a:lnSpc>
+                <a:spcPts val="1620"/>
+              </a:lnSpc>
+              <a:spcAft>
+                <a:spcPts val="300"/>
+              </a:spcAft>
+              <a:buNone/>
+            </a:pPr>
+            <a:r>
+              <a:rPr lang="en-US" sz="1200" dirty="0">
+                <a:solidFill>
+                  <a:srgbClr val="1A1A1A"/>
+                </a:solidFill>
+                <a:latin typeface="Georgia" pitchFamily="34" charset="0"/>
+                <a:ea typeface="Georgia" pitchFamily="34" charset="-122"/>
+                <a:cs typeface="Georgia" pitchFamily="34" charset="-120"/>
+              </a:rPr>
+              <a:t> Focus on the quality-count rule; the bhūta-tanmātra pairing alone is the core skill.</a:t>
+            </a:r>
+            <a:endParaRPr lang="en-US" sz="1200" dirty="0"/>
+          </a:p>
+        </p:txBody>
+      </p:sp>
+      <p:sp>
+        <p:nvSpPr>
+          <p:cNvPr id="5" name="Text 3"/>
+          <p:cNvSpPr/>
+          <p:nvPr/>
+        </p:nvSpPr>
+        <p:spPr>
+          <a:xfrm>
+            <a:off x="406301" y="4434929"/>
+            <a:ext cx="8498026" cy="213271"/>
+          </a:xfrm>
+          <a:prstGeom prst="rect">
+            <a:avLst/>
+          </a:prstGeom>
+          <a:noFill/>
+          <a:ln/>
+        </p:spPr>
+        <p:txBody>
+          <a:bodyPr wrap="square" lIns="0" tIns="0" rIns="0" bIns="0" rtlCol="0" anchor="t"/>
+          <a:lstStyle/>
+          <a:p>
+            <a:pPr algn="l" indent="0" marL="0">
+              <a:lnSpc>
+                <a:spcPts val="1680"/>
+              </a:lnSpc>
+              <a:spcBef>
+                <a:spcPts val="300"/>
+              </a:spcBef>
+              <a:spcAft>
+                <a:spcPts val="300"/>
+              </a:spcAft>
+              <a:buNone/>
+            </a:pPr>
+            <a:r>
+              <a:rPr lang="en-US" sz="1200" dirty="0">
+                <a:solidFill>
+                  <a:srgbClr val="1A1A1A"/>
+                </a:solidFill>
+                <a:latin typeface="Georgia" pitchFamily="34" charset="0"/>
+                <a:ea typeface="Georgia" pitchFamily="34" charset="-122"/>
+                <a:cs typeface="Georgia" pitchFamily="34" charset="-120"/>
+              </a:rPr>
+              <a:t>Senior ·  · IKS Curriculum</a:t>
+            </a:r>
+            <a:endParaRPr lang="en-US" sz="1200" dirty="0"/>
+          </a:p>
+        </p:txBody>
+      </p:sp>
+    </p:spTree>
+  </p:cSld>
+  <p:clrMapOvr>
+    <a:masterClrMapping/>
+  </p:clrMapOvr>
+</p:sld>
+</file>
+
+<file path=ppt/slides/slide14.xml><?xml version="1.0" encoding="utf-8"?>
+<p:sld xmlns:a="http://schemas.openxmlformats.org/drawingml/2006/main" xmlns:r="http://schemas.openxmlformats.org/officeDocument/2006/relationships" xmlns:p="http://schemas.openxmlformats.org/presentationml/2006/main">
+  <p:cSld name="Slide 14">
+    <p:bg>
+      <p:bgPr>
+        <a:solidFill>
+          <a:srgbClr val="FAF7F2"/>
+        </a:solidFill>
+      </p:bgPr>
+    </p:bg>
+    <p:spTree>
+      <p:nvGrpSpPr>
+        <p:cNvPr id="1" name=""/>
+        <p:cNvGrpSpPr/>
+        <p:nvPr/>
+      </p:nvGrpSpPr>
+      <p:grpSpPr>
+        <a:xfrm>
+          <a:off x="0" y="0"/>
+          <a:ext cx="0" cy="0"/>
+          <a:chOff x="0" y="0"/>
+          <a:chExt cx="0" cy="0"/>
+        </a:xfrm>
+      </p:grpSpPr>
+      <p:sp>
+        <p:nvSpPr>
+          <p:cNvPr id="2" name="Text 0"/>
+          <p:cNvSpPr/>
+          <p:nvPr/>
+        </p:nvSpPr>
+        <p:spPr>
+          <a:xfrm>
+            <a:off x="0" y="0"/>
+            <a:ext cx="9144000" cy="101501"/>
+          </a:xfrm>
+          <a:prstGeom prst="rect">
+            <a:avLst/>
+          </a:prstGeom>
+          <a:solidFill>
+            <a:srgbClr val="5D1D2E"/>
+          </a:solidFill>
+          <a:ln/>
+        </p:spPr>
+        <p:txBody>
+          <a:bodyPr wrap="square" rtlCol="0" anchor="ctr"/>
+          <a:lstStyle/>
+          <a:p>
+            <a:pPr indent="0" marL="0">
+              <a:buNone/>
+            </a:pPr>
+            <a:endParaRPr lang="en-US" dirty="0"/>
+          </a:p>
+        </p:txBody>
+      </p:sp>
+      <p:sp>
+        <p:nvSpPr>
+          <p:cNvPr id="3" name="Text 1"/>
+          <p:cNvSpPr/>
+          <p:nvPr/>
+        </p:nvSpPr>
+        <p:spPr>
+          <a:xfrm>
+            <a:off x="406301" y="457051"/>
+            <a:ext cx="8498026" cy="274290"/>
+          </a:xfrm>
+          <a:prstGeom prst="rect">
+            <a:avLst/>
+          </a:prstGeom>
+          <a:noFill/>
+          <a:ln/>
+        </p:spPr>
+        <p:txBody>
+          <a:bodyPr wrap="square" lIns="0" tIns="0" rIns="0" bIns="0" rtlCol="0" anchor="t"/>
+          <a:lstStyle/>
+          <a:p>
+            <a:pPr algn="l" indent="0" marL="0">
+              <a:lnSpc>
+                <a:spcPts val="2160"/>
+              </a:lnSpc>
+              <a:spcBef>
+                <a:spcPts val="600"/>
+              </a:spcBef>
+              <a:spcAft>
+                <a:spcPts val="800"/>
+              </a:spcAft>
+              <a:buNone/>
+            </a:pPr>
+            <a:r>
+              <a:rPr lang="en-US" sz="1800" b="1" dirty="0">
+                <a:solidFill>
+                  <a:srgbClr val="997929"/>
+                </a:solidFill>
+                <a:latin typeface="Times New Roman" pitchFamily="34" charset="0"/>
+                <a:ea typeface="Times New Roman" pitchFamily="34" charset="-122"/>
+                <a:cs typeface="Times New Roman" pitchFamily="34" charset="-120"/>
+              </a:rPr>
+              <a:t>Teacher notes</a:t>
+            </a:r>
+            <a:endParaRPr lang="en-US" sz="1800" dirty="0"/>
+          </a:p>
+        </p:txBody>
+      </p:sp>
+      <p:sp>
+        <p:nvSpPr>
+          <p:cNvPr id="4" name="Text 2"/>
+          <p:cNvSpPr/>
+          <p:nvPr/>
+        </p:nvSpPr>
+        <p:spPr>
+          <a:xfrm>
+            <a:off x="634901" y="883593"/>
+            <a:ext cx="8102798" cy="937022"/>
+          </a:xfrm>
+          <a:prstGeom prst="rect">
+            <a:avLst/>
+          </a:prstGeom>
+          <a:noFill/>
+          <a:ln/>
+        </p:spPr>
+        <p:txBody>
+          <a:bodyPr wrap="square" lIns="0" tIns="0" rIns="0" bIns="0" rtlCol="0" anchor="t"/>
+          <a:lstStyle/>
+          <a:p>
+            <a:pPr algn="l" marL="342900" indent="-342900">
+              <a:lnSpc>
+                <a:spcPts val="1620"/>
+              </a:lnSpc>
+              <a:spcAft>
+                <a:spcPts val="300"/>
+              </a:spcAft>
+              <a:buSzPct val="100000"/>
+              <a:buChar char="•"/>
+            </a:pPr>
+            <a:r>
+              <a:rPr lang="en-US" sz="1200" dirty="0">
+                <a:solidFill>
+                  <a:srgbClr val="1A1A1A"/>
+                </a:solidFill>
+                <a:latin typeface="Georgia" pitchFamily="34" charset="0"/>
+                <a:ea typeface="Georgia" pitchFamily="34" charset="-122"/>
+                <a:cs typeface="Georgia" pitchFamily="34" charset="-120"/>
+              </a:rPr>
+              <a:t>The </a:t>
+            </a:r>
+            <a:pPr algn="l" indent="0" marL="0">
+              <a:lnSpc>
+                <a:spcPts val="1620"/>
+              </a:lnSpc>
+              <a:spcAft>
+                <a:spcPts val="300"/>
+              </a:spcAft>
+              <a:buNone/>
+            </a:pPr>
+            <a:r>
+              <a:rPr lang="en-US" sz="1200" i="1" dirty="0">
+                <a:solidFill>
+                  <a:srgbClr val="1A1A1A"/>
+                </a:solidFill>
+                <a:latin typeface="Georgia" pitchFamily="34" charset="0"/>
+                <a:ea typeface="Georgia" pitchFamily="34" charset="-122"/>
+                <a:cs typeface="Georgia" pitchFamily="34" charset="-120"/>
+              </a:rPr>
+              <a:t>internal consistency</a:t>
+            </a:r>
+            <a:pPr algn="l" indent="0" marL="0">
+              <a:lnSpc>
+                <a:spcPts val="1620"/>
+              </a:lnSpc>
+              <a:spcAft>
+                <a:spcPts val="300"/>
+              </a:spcAft>
+              <a:buNone/>
+            </a:pPr>
+            <a:r>
+              <a:rPr lang="en-US" sz="1200" dirty="0">
+                <a:solidFill>
+                  <a:srgbClr val="1A1A1A"/>
+                </a:solidFill>
+                <a:latin typeface="Georgia" pitchFamily="34" charset="0"/>
+                <a:ea typeface="Georgia" pitchFamily="34" charset="-122"/>
+                <a:cs typeface="Georgia" pitchFamily="34" charset="-120"/>
+              </a:rPr>
+              <a:t> point matters more than students realise. Many will assume "old framework = primitive." The Sāṅkhya enumeration is </a:t>
+            </a:r>
+            <a:pPr algn="l" indent="0" marL="0">
+              <a:lnSpc>
+                <a:spcPts val="1620"/>
+              </a:lnSpc>
+              <a:spcAft>
+                <a:spcPts val="300"/>
+              </a:spcAft>
+              <a:buNone/>
+            </a:pPr>
+            <a:r>
+              <a:rPr lang="en-US" sz="1200" i="1" dirty="0">
+                <a:solidFill>
+                  <a:srgbClr val="1A1A1A"/>
+                </a:solidFill>
+                <a:latin typeface="Georgia" pitchFamily="34" charset="0"/>
+                <a:ea typeface="Georgia" pitchFamily="34" charset="-122"/>
+                <a:cs typeface="Georgia" pitchFamily="34" charset="-120"/>
+              </a:rPr>
+              <a:t>not</a:t>
+            </a:r>
+            <a:pPr algn="l" indent="0" marL="0">
+              <a:lnSpc>
+                <a:spcPts val="1620"/>
+              </a:lnSpc>
+              <a:spcAft>
+                <a:spcPts val="300"/>
+              </a:spcAft>
+              <a:buNone/>
+            </a:pPr>
+            <a:r>
+              <a:rPr lang="en-US" sz="1200" dirty="0">
+                <a:solidFill>
+                  <a:srgbClr val="1A1A1A"/>
+                </a:solidFill>
+                <a:latin typeface="Georgia" pitchFamily="34" charset="0"/>
+                <a:ea typeface="Georgia" pitchFamily="34" charset="-122"/>
+                <a:cs typeface="Georgia" pitchFamily="34" charset="-120"/>
+              </a:rPr>
+              <a:t> primitive — it's tightly self-consistent in a way that the Greek four-element scheme isn't.</a:t>
+            </a:r>
+            <a:endParaRPr lang="en-US" sz="1200" dirty="0"/>
+          </a:p>
+          <a:p>
+            <a:pPr algn="l" marL="342900" indent="-342900">
+              <a:lnSpc>
+                <a:spcPts val="1620"/>
+              </a:lnSpc>
+              <a:spcAft>
+                <a:spcPts val="300"/>
+              </a:spcAft>
+              <a:buSzPct val="100000"/>
+              <a:buChar char="•"/>
+            </a:pPr>
+            <a:r>
+              <a:rPr lang="en-US" sz="1200" dirty="0">
+                <a:solidFill>
+                  <a:srgbClr val="1A1A1A"/>
+                </a:solidFill>
+                <a:latin typeface="Georgia" pitchFamily="34" charset="0"/>
+                <a:ea typeface="Georgia" pitchFamily="34" charset="-122"/>
+                <a:cs typeface="Georgia" pitchFamily="34" charset="-120"/>
+              </a:rPr>
+              <a:t>The Empedocles scheme (Day 4) has NO equivalent of the tanmātra-indriya symmetry. That asymmetry is one of the most interesting cross-cultural points in the module.</a:t>
+            </a:r>
+            <a:endParaRPr lang="en-US" sz="1200" dirty="0"/>
+          </a:p>
+        </p:txBody>
+      </p:sp>
+      <p:sp>
+        <p:nvSpPr>
+          <p:cNvPr id="5" name="Text 3"/>
+          <p:cNvSpPr/>
+          <p:nvPr/>
+        </p:nvSpPr>
+        <p:spPr>
+          <a:xfrm>
+            <a:off x="406301" y="4434929"/>
+            <a:ext cx="8498026" cy="213271"/>
+          </a:xfrm>
+          <a:prstGeom prst="rect">
+            <a:avLst/>
+          </a:prstGeom>
+          <a:noFill/>
+          <a:ln/>
+        </p:spPr>
+        <p:txBody>
+          <a:bodyPr wrap="square" lIns="0" tIns="0" rIns="0" bIns="0" rtlCol="0" anchor="t"/>
+          <a:lstStyle/>
+          <a:p>
+            <a:pPr algn="l" indent="0" marL="0">
+              <a:lnSpc>
+                <a:spcPts val="1680"/>
+              </a:lnSpc>
+              <a:spcBef>
+                <a:spcPts val="300"/>
+              </a:spcBef>
+              <a:spcAft>
+                <a:spcPts val="300"/>
+              </a:spcAft>
+              <a:buNone/>
+            </a:pPr>
+            <a:r>
+              <a:rPr lang="en-US" sz="1200" dirty="0">
+                <a:solidFill>
+                  <a:srgbClr val="1A1A1A"/>
+                </a:solidFill>
+                <a:latin typeface="Georgia" pitchFamily="34" charset="0"/>
+                <a:ea typeface="Georgia" pitchFamily="34" charset="-122"/>
+                <a:cs typeface="Georgia" pitchFamily="34" charset="-120"/>
+              </a:rPr>
+              <a:t>Senior ·  · IKS Curriculum</a:t>
+            </a:r>
+            <a:endParaRPr lang="en-US" sz="1200" dirty="0"/>
+          </a:p>
+        </p:txBody>
+      </p:sp>
+    </p:spTree>
+  </p:cSld>
+  <p:clrMapOvr>
+    <a:masterClrMapping/>
+  </p:clrMapOvr>
+</p:sld>
+</file>
+
+<file path=ppt/slides/slide15.xml><?xml version="1.0" encoding="utf-8"?>
+<p:sld xmlns:a="http://schemas.openxmlformats.org/drawingml/2006/main" xmlns:r="http://schemas.openxmlformats.org/officeDocument/2006/relationships" xmlns:p="http://schemas.openxmlformats.org/presentationml/2006/main">
+  <p:cSld name="Slide 15">
+    <p:bg>
+      <p:bgPr>
+        <a:solidFill>
+          <a:srgbClr val="FAF7F2"/>
+        </a:solidFill>
+      </p:bgPr>
+    </p:bg>
+    <p:spTree>
+      <p:nvGrpSpPr>
+        <p:cNvPr id="1" name=""/>
+        <p:cNvGrpSpPr/>
+        <p:nvPr/>
+      </p:nvGrpSpPr>
+      <p:grpSpPr>
+        <a:xfrm>
+          <a:off x="0" y="0"/>
+          <a:ext cx="0" cy="0"/>
+          <a:chOff x="0" y="0"/>
+          <a:chExt cx="0" cy="0"/>
+        </a:xfrm>
+      </p:grpSpPr>
+      <p:sp>
+        <p:nvSpPr>
+          <p:cNvPr id="2" name="Text 0"/>
+          <p:cNvSpPr/>
+          <p:nvPr/>
+        </p:nvSpPr>
+        <p:spPr>
+          <a:xfrm>
+            <a:off x="0" y="0"/>
+            <a:ext cx="9144000" cy="101501"/>
+          </a:xfrm>
+          <a:prstGeom prst="rect">
+            <a:avLst/>
+          </a:prstGeom>
+          <a:solidFill>
+            <a:srgbClr val="5D1D2E"/>
+          </a:solidFill>
+          <a:ln/>
+        </p:spPr>
+        <p:txBody>
+          <a:bodyPr wrap="square" rtlCol="0" anchor="ctr"/>
+          <a:lstStyle/>
+          <a:p>
+            <a:pPr indent="0" marL="0">
+              <a:buNone/>
+            </a:pPr>
+            <a:endParaRPr lang="en-US" dirty="0"/>
+          </a:p>
+        </p:txBody>
+      </p:sp>
+      <p:sp>
+        <p:nvSpPr>
+          <p:cNvPr id="3" name="Text 1"/>
+          <p:cNvSpPr/>
+          <p:nvPr/>
+        </p:nvSpPr>
+        <p:spPr>
+          <a:xfrm>
+            <a:off x="406301" y="457051"/>
+            <a:ext cx="8498026" cy="274290"/>
+          </a:xfrm>
+          <a:prstGeom prst="rect">
+            <a:avLst/>
+          </a:prstGeom>
+          <a:noFill/>
+          <a:ln/>
+        </p:spPr>
+        <p:txBody>
+          <a:bodyPr wrap="square" lIns="0" tIns="0" rIns="0" bIns="0" rtlCol="0" anchor="t"/>
+          <a:lstStyle/>
+          <a:p>
+            <a:pPr algn="l" indent="0" marL="0">
+              <a:lnSpc>
+                <a:spcPts val="2160"/>
+              </a:lnSpc>
+              <a:spcBef>
+                <a:spcPts val="600"/>
+              </a:spcBef>
+              <a:spcAft>
+                <a:spcPts val="800"/>
+              </a:spcAft>
+              <a:buNone/>
+            </a:pPr>
+            <a:r>
+              <a:rPr lang="en-US" sz="1800" b="1" dirty="0">
+                <a:solidFill>
+                  <a:srgbClr val="997929"/>
+                </a:solidFill>
+                <a:latin typeface="Times New Roman" pitchFamily="34" charset="0"/>
+                <a:ea typeface="Times New Roman" pitchFamily="34" charset="-122"/>
+                <a:cs typeface="Times New Roman" pitchFamily="34" charset="-120"/>
+              </a:rPr>
+              <a:t>Citation(s) used</a:t>
+            </a:r>
+            <a:endParaRPr lang="en-US" sz="1800" dirty="0"/>
+          </a:p>
+        </p:txBody>
+      </p:sp>
+      <p:sp>
+        <p:nvSpPr>
+          <p:cNvPr id="4" name="Text 2"/>
+          <p:cNvSpPr/>
+          <p:nvPr/>
+        </p:nvSpPr>
+        <p:spPr>
+          <a:xfrm>
+            <a:off x="634901" y="883593"/>
+            <a:ext cx="8102798" cy="563761"/>
+          </a:xfrm>
+          <a:prstGeom prst="rect">
+            <a:avLst/>
+          </a:prstGeom>
+          <a:noFill/>
+          <a:ln/>
+        </p:spPr>
+        <p:txBody>
+          <a:bodyPr wrap="square" lIns="0" tIns="0" rIns="0" bIns="0" rtlCol="0" anchor="t"/>
+          <a:lstStyle/>
+          <a:p>
+            <a:pPr algn="l" marL="342900" indent="-342900">
+              <a:lnSpc>
+                <a:spcPts val="1620"/>
+              </a:lnSpc>
+              <a:spcAft>
+                <a:spcPts val="300"/>
+              </a:spcAft>
+              <a:buSzPct val="100000"/>
+              <a:buChar char="•"/>
+            </a:pPr>
+            <a:r>
+              <a:rPr lang="en-US" sz="1200" dirty="0">
+                <a:solidFill>
+                  <a:srgbClr val="1A1A1A"/>
+                </a:solidFill>
+                <a:latin typeface="Georgia" pitchFamily="34" charset="0"/>
+                <a:ea typeface="Georgia" pitchFamily="34" charset="-122"/>
+                <a:cs typeface="Georgia" pitchFamily="34" charset="-120"/>
+              </a:rPr>
+              <a:t>SB 3.26.36 — vidya-karana RAG cache </a:t>
+            </a:r>
+            <a:pPr algn="l" indent="0" marL="0">
+              <a:lnSpc>
+                <a:spcPts val="1620"/>
+              </a:lnSpc>
+              <a:spcAft>
+                <a:spcPts val="300"/>
+              </a:spcAft>
+              <a:buNone/>
+            </a:pPr>
+            <a:r>
+              <a:rPr lang="en-US" sz="1200" dirty="0">
+                <a:solidFill>
+                  <a:srgbClr val="1A1A1A"/>
+                </a:solidFill>
+                <a:latin typeface="Georgia" pitchFamily="34" charset="0"/>
+                <a:ea typeface="Georgia" pitchFamily="34" charset="-122"/>
+                <a:cs typeface="Georgia" pitchFamily="34" charset="-120"/>
+              </a:rPr>
               <a:t>day-03-qualities.json#chunks[3]</a:t>
             </a:r>
-            <a:pPr algn="l" indent="0" marL="0">
-              <a:lnSpc>
-                <a:spcPts val="1680"/>
-              </a:lnSpc>
-              <a:spcBef>
-                <a:spcPts val="300"/>
-              </a:spcBef>
-              <a:spcAft>
-                <a:spcPts val="300"/>
-              </a:spcAft>
-              <a:buNone/>
+            <a:endParaRPr lang="en-US" sz="1200" dirty="0"/>
+          </a:p>
+          <a:p>
+            <a:pPr algn="l" marL="342900" indent="-342900">
+              <a:lnSpc>
+                <a:spcPts val="1620"/>
+              </a:lnSpc>
+              <a:spcAft>
+                <a:spcPts val="300"/>
+              </a:spcAft>
+              <a:buSzPct val="100000"/>
+              <a:buChar char="•"/>
             </a:pPr>
             <a:r>
               <a:rPr lang="en-US" sz="1200" dirty="0">
@@ -2256,15 +4393,12 @@
                 <a:ea typeface="Georgia" pitchFamily="34" charset="-122"/>
                 <a:cs typeface="Georgia" pitchFamily="34" charset="-120"/>
               </a:rPr>
-              <a:t> – SB 3.26.44 — vidya-karana RAG cache </a:t>
-            </a:r>
-            <a:pPr algn="l" indent="0" marL="0">
-              <a:lnSpc>
-                <a:spcPts val="1680"/>
-              </a:lnSpc>
-              <a:spcBef>
-                <a:spcPts val="300"/>
-              </a:spcBef>
+              <a:t>SB 3.26.44 — vidya-karana RAG cache </a:t>
+            </a:r>
+            <a:pPr algn="l" indent="0" marL="0">
+              <a:lnSpc>
+                <a:spcPts val="1620"/>
+              </a:lnSpc>
               <a:spcAft>
                 <a:spcPts val="300"/>
               </a:spcAft>
@@ -2437,7 +4571,7 @@
                 <a:ea typeface="Times New Roman" pitchFamily="34" charset="-122"/>
                 <a:cs typeface="Times New Roman" pitchFamily="34" charset="-120"/>
               </a:rPr>
-              <a:t>Materials</a:t>
+              <a:t>Learning objective</a:t>
             </a:r>
             <a:endParaRPr lang="en-US" sz="1800" dirty="0"/>
           </a:p>
@@ -2452,7 +4586,7 @@
         <p:spPr>
           <a:xfrm>
             <a:off x="406301" y="870942"/>
-            <a:ext cx="8498026" cy="213271"/>
+            <a:ext cx="8498026" cy="426541"/>
           </a:xfrm>
           <a:prstGeom prst="rect">
             <a:avLst/>
@@ -2485,7 +4619,53 @@
                 <a:ea typeface="Georgia" pitchFamily="34" charset="-122"/>
                 <a:cs typeface="Georgia" pitchFamily="34" charset="-120"/>
               </a:rPr>
-              <a:t>– Whiteboard – Printed SB 3.26.36 + 3.26.44 (IAST + translation, from cache)</a:t>
+              <a:t>Students explain the </a:t>
+            </a:r>
+            <a:pPr algn="l" indent="0" marL="0">
+              <a:lnSpc>
+                <a:spcPts val="1680"/>
+              </a:lnSpc>
+              <a:spcBef>
+                <a:spcPts val="300"/>
+              </a:spcBef>
+              <a:spcAft>
+                <a:spcPts val="300"/>
+              </a:spcAft>
+              <a:buNone/>
+            </a:pPr>
+            <a:r>
+              <a:rPr lang="en-US" sz="1200" i="1" dirty="0">
+                <a:solidFill>
+                  <a:srgbClr val="1A1A1A"/>
+                </a:solidFill>
+                <a:latin typeface="Georgia" pitchFamily="34" charset="0"/>
+                <a:ea typeface="Georgia" pitchFamily="34" charset="-122"/>
+                <a:cs typeface="Georgia" pitchFamily="34" charset="-120"/>
+              </a:rPr>
+              <a:t>bhūta–tanmātra</a:t>
+            </a:r>
+            <a:pPr algn="l" indent="0" marL="0">
+              <a:lnSpc>
+                <a:spcPts val="1680"/>
+              </a:lnSpc>
+              <a:spcBef>
+                <a:spcPts val="300"/>
+              </a:spcBef>
+              <a:spcAft>
+                <a:spcPts val="300"/>
+              </a:spcAft>
+              <a:buNone/>
+            </a:pPr>
+            <a:r>
+              <a:rPr lang="en-US" sz="1200" dirty="0">
+                <a:solidFill>
+                  <a:srgbClr val="1A1A1A"/>
+                </a:solidFill>
+                <a:latin typeface="Georgia" pitchFamily="34" charset="0"/>
+                <a:ea typeface="Georgia" pitchFamily="34" charset="-122"/>
+                <a:cs typeface="Georgia" pitchFamily="34" charset="-120"/>
+              </a:rPr>
+              <a:t> pairing and prove the quality-count rule (1, 2, 3, 4, 5 for sky, air, fire, water, earth) is internally consistent given the emergence sequence.</a:t>
             </a:r>
             <a:endParaRPr lang="en-US" sz="1200" dirty="0"/>
           </a:p>
@@ -2643,7 +4823,7 @@
                 <a:ea typeface="Times New Roman" pitchFamily="34" charset="-122"/>
                 <a:cs typeface="Times New Roman" pitchFamily="34" charset="-120"/>
               </a:rPr>
-              <a:t>Flow</a:t>
+              <a:t>Materials</a:t>
             </a:r>
             <a:endParaRPr lang="en-US" sz="1800" dirty="0"/>
           </a:p>
@@ -2652,6 +4832,76 @@
       <p:sp>
         <p:nvSpPr>
           <p:cNvPr id="4" name="Text 2"/>
+          <p:cNvSpPr/>
+          <p:nvPr/>
+        </p:nvSpPr>
+        <p:spPr>
+          <a:xfrm>
+            <a:off x="634901" y="883593"/>
+            <a:ext cx="8102798" cy="525661"/>
+          </a:xfrm>
+          <a:prstGeom prst="rect">
+            <a:avLst/>
+          </a:prstGeom>
+          <a:noFill/>
+          <a:ln/>
+        </p:spPr>
+        <p:txBody>
+          <a:bodyPr wrap="square" lIns="0" tIns="0" rIns="0" bIns="0" rtlCol="0" anchor="t"/>
+          <a:lstStyle/>
+          <a:p>
+            <a:pPr algn="l" marL="342900" indent="-342900">
+              <a:lnSpc>
+                <a:spcPts val="1620"/>
+              </a:lnSpc>
+              <a:spcAft>
+                <a:spcPts val="300"/>
+              </a:spcAft>
+              <a:buSzPct val="100000"/>
+              <a:buChar char="•"/>
+            </a:pPr>
+            <a:r>
+              <a:rPr lang="en-US" sz="1200" dirty="0">
+                <a:solidFill>
+                  <a:srgbClr val="1A1A1A"/>
+                </a:solidFill>
+                <a:latin typeface="Georgia" pitchFamily="34" charset="0"/>
+                <a:ea typeface="Georgia" pitchFamily="34" charset="-122"/>
+                <a:cs typeface="Georgia" pitchFamily="34" charset="-120"/>
+              </a:rPr>
+              <a:t>Whiteboard</a:t>
+            </a:r>
+            <a:endParaRPr lang="en-US" sz="1200" dirty="0"/>
+          </a:p>
+          <a:p>
+            <a:pPr algn="l" marL="342900" indent="-342900">
+              <a:lnSpc>
+                <a:spcPts val="1620"/>
+              </a:lnSpc>
+              <a:spcAft>
+                <a:spcPts val="300"/>
+              </a:spcAft>
+              <a:buSzPct val="100000"/>
+              <a:buChar char="•"/>
+            </a:pPr>
+            <a:r>
+              <a:rPr lang="en-US" sz="1200" dirty="0">
+                <a:solidFill>
+                  <a:srgbClr val="1A1A1A"/>
+                </a:solidFill>
+                <a:latin typeface="Georgia" pitchFamily="34" charset="0"/>
+                <a:ea typeface="Georgia" pitchFamily="34" charset="-122"/>
+                <a:cs typeface="Georgia" pitchFamily="34" charset="-120"/>
+              </a:rPr>
+              <a:t>Printed SB 3.26.36 + 3.26.44 (IAST + translation, from cache)</a:t>
+            </a:r>
+            <a:endParaRPr lang="en-US" sz="1200" dirty="0"/>
+          </a:p>
+        </p:txBody>
+      </p:sp>
+      <p:sp>
+        <p:nvSpPr>
+          <p:cNvPr id="5" name="Text 3"/>
           <p:cNvSpPr/>
           <p:nvPr/>
         </p:nvSpPr>
@@ -2801,7 +5051,7 @@
                 <a:ea typeface="Times New Roman" pitchFamily="34" charset="-122"/>
                 <a:cs typeface="Times New Roman" pitchFamily="34" charset="-120"/>
               </a:rPr>
-              <a:t>Warm-up (5 min)</a:t>
+              <a:t>Flow</a:t>
             </a:r>
             <a:endParaRPr lang="en-US" sz="1800" dirty="0"/>
           </a:p>
@@ -2810,54 +5060,6 @@
       <p:sp>
         <p:nvSpPr>
           <p:cNvPr id="4" name="Text 2"/>
-          <p:cNvSpPr/>
-          <p:nvPr/>
-        </p:nvSpPr>
-        <p:spPr>
-          <a:xfrm>
-            <a:off x="406301" y="870942"/>
-            <a:ext cx="8498026" cy="213271"/>
-          </a:xfrm>
-          <a:prstGeom prst="rect">
-            <a:avLst/>
-          </a:prstGeom>
-          <a:noFill/>
-          <a:ln/>
-        </p:spPr>
-        <p:txBody>
-          <a:bodyPr wrap="square" lIns="0" tIns="0" rIns="0" bIns="0" rtlCol="0" anchor="t"/>
-          <a:lstStyle/>
-          <a:p>
-            <a:pPr algn="l" indent="0" marL="0">
-              <a:lnSpc>
-                <a:spcPts val="1680"/>
-              </a:lnSpc>
-              <a:spcBef>
-                <a:spcPts val="300"/>
-              </a:spcBef>
-              <a:spcAft>
-                <a:spcPts val="300"/>
-              </a:spcAft>
-              <a:buNone/>
-            </a:pPr>
-            <a:r>
-              <a:rPr lang="en-US" sz="1200" dirty="0">
-                <a:solidFill>
-                  <a:srgbClr val="1A1A1A"/>
-                </a:solidFill>
-                <a:latin typeface="Georgia" pitchFamily="34" charset="0"/>
-                <a:ea typeface="Georgia" pitchFamily="34" charset="-122"/>
-                <a:cs typeface="Georgia" pitchFamily="34" charset="-120"/>
-              </a:rPr>
-              <a:t>– Quick recall: enumeration of the five bhūtas with their tanmātras.</a:t>
-            </a:r>
-            <a:endParaRPr lang="en-US" sz="1200" dirty="0"/>
-          </a:p>
-        </p:txBody>
-      </p:sp>
-      <p:sp>
-        <p:nvSpPr>
-          <p:cNvPr id="5" name="Text 3"/>
           <p:cNvSpPr/>
           <p:nvPr/>
         </p:nvSpPr>
@@ -3007,7 +5209,7 @@
                 <a:ea typeface="Times New Roman" pitchFamily="34" charset="-122"/>
                 <a:cs typeface="Times New Roman" pitchFamily="34" charset="-120"/>
               </a:rPr>
-              <a:t>Core (25 min)</a:t>
+              <a:t>Warm-up (5 min)</a:t>
             </a:r>
             <a:endParaRPr lang="en-US" sz="1800" dirty="0"/>
           </a:p>
@@ -3045,26 +5247,6 @@
               <a:buChar char="•"/>
             </a:pPr>
             <a:r>
-              <a:rPr lang="en-US" sz="1200" b="1" dirty="0">
-                <a:solidFill>
-                  <a:srgbClr val="1A1A1A"/>
-                </a:solidFill>
-                <a:latin typeface="Georgia" pitchFamily="34" charset="0"/>
-                <a:ea typeface="Georgia" pitchFamily="34" charset="-122"/>
-                <a:cs typeface="Georgia" pitchFamily="34" charset="-120"/>
-              </a:rPr>
-              <a:t>The quality-count rule</a:t>
-            </a:r>
-            <a:pPr algn="l" indent="0" marL="0">
-              <a:lnSpc>
-                <a:spcPts val="1620"/>
-              </a:lnSpc>
-              <a:spcAft>
-                <a:spcPts val="300"/>
-              </a:spcAft>
-              <a:buNone/>
-            </a:pPr>
-            <a:r>
               <a:rPr lang="en-US" sz="1200" dirty="0">
                 <a:solidFill>
                   <a:srgbClr val="1A1A1A"/>
@@ -3073,7 +5255,7 @@
                 <a:ea typeface="Georgia" pitchFamily="34" charset="-122"/>
                 <a:cs typeface="Georgia" pitchFamily="34" charset="-120"/>
               </a:rPr>
-              <a:t> (write boxed):</a:t>
+              <a:t>Quick recall: enumeration of the five bhūtas with their tanmātras.</a:t>
             </a:r>
             <a:endParaRPr lang="en-US" sz="1200" dirty="0"/>
           </a:p>
@@ -3087,1353 +5269,7 @@
         </p:nvSpPr>
         <p:spPr>
           <a:xfrm>
-            <a:off x="406301" y="1254323"/>
-            <a:ext cx="8498026" cy="426541"/>
-          </a:xfrm>
-          <a:prstGeom prst="rect">
-            <a:avLst/>
-          </a:prstGeom>
-          <a:noFill/>
-          <a:ln/>
-        </p:spPr>
-        <p:txBody>
-          <a:bodyPr wrap="square" lIns="0" tIns="0" rIns="0" bIns="0" rtlCol="0" anchor="t"/>
-          <a:lstStyle/>
-          <a:p>
-            <a:pPr algn="l" indent="0" marL="0">
-              <a:lnSpc>
-                <a:spcPts val="1680"/>
-              </a:lnSpc>
-              <a:spcBef>
-                <a:spcPts val="300"/>
-              </a:spcBef>
-              <a:spcAft>
-                <a:spcPts val="300"/>
-              </a:spcAft>
-              <a:buNone/>
-            </a:pPr>
-            <a:r>
-              <a:rPr lang="en-US" sz="1200" dirty="0">
-                <a:solidFill>
-                  <a:srgbClr val="1A1A1A"/>
-                </a:solidFill>
-                <a:latin typeface="Georgia" pitchFamily="34" charset="0"/>
-                <a:ea typeface="Georgia" pitchFamily="34" charset="-122"/>
-                <a:cs typeface="Georgia" pitchFamily="34" charset="-120"/>
-              </a:rPr>
-              <a:t>&gt; Each element inherits all the qualities of the elements that emerged before it, AND adds one new quality of its own — the </a:t>
-            </a:r>
-            <a:pPr algn="l" indent="0" marL="0">
-              <a:lnSpc>
-                <a:spcPts val="1680"/>
-              </a:lnSpc>
-              <a:spcBef>
-                <a:spcPts val="300"/>
-              </a:spcBef>
-              <a:spcAft>
-                <a:spcPts val="300"/>
-              </a:spcAft>
-              <a:buNone/>
-            </a:pPr>
-            <a:r>
-              <a:rPr lang="en-US" sz="1200" i="1" dirty="0">
-                <a:solidFill>
-                  <a:srgbClr val="1A1A1A"/>
-                </a:solidFill>
-                <a:latin typeface="Georgia" pitchFamily="34" charset="0"/>
-                <a:ea typeface="Georgia" pitchFamily="34" charset="-122"/>
-                <a:cs typeface="Georgia" pitchFamily="34" charset="-120"/>
-              </a:rPr>
-              <a:t>tanmātra</a:t>
-            </a:r>
-            <a:pPr algn="l" indent="0" marL="0">
-              <a:lnSpc>
-                <a:spcPts val="1680"/>
-              </a:lnSpc>
-              <a:spcBef>
-                <a:spcPts val="300"/>
-              </a:spcBef>
-              <a:spcAft>
-                <a:spcPts val="300"/>
-              </a:spcAft>
-              <a:buNone/>
-            </a:pPr>
-            <a:r>
-              <a:rPr lang="en-US" sz="1200" dirty="0">
-                <a:solidFill>
-                  <a:srgbClr val="1A1A1A"/>
-                </a:solidFill>
-                <a:latin typeface="Georgia" pitchFamily="34" charset="0"/>
-                <a:ea typeface="Georgia" pitchFamily="34" charset="-122"/>
-                <a:cs typeface="Georgia" pitchFamily="34" charset="-120"/>
-              </a:rPr>
-              <a:t> associated with that element.</a:t>
-            </a:r>
-            <a:endParaRPr lang="en-US" sz="1200" dirty="0"/>
-          </a:p>
-        </p:txBody>
-      </p:sp>
-      <p:sp>
-        <p:nvSpPr>
-          <p:cNvPr id="6" name="Text 4"/>
-          <p:cNvSpPr/>
-          <p:nvPr/>
-        </p:nvSpPr>
-        <p:spPr>
-          <a:xfrm>
-            <a:off x="406301" y="1757065"/>
-            <a:ext cx="8498026" cy="213271"/>
-          </a:xfrm>
-          <a:prstGeom prst="rect">
-            <a:avLst/>
-          </a:prstGeom>
-          <a:noFill/>
-          <a:ln/>
-        </p:spPr>
-        <p:txBody>
-          <a:bodyPr wrap="square" lIns="0" tIns="0" rIns="0" bIns="0" rtlCol="0" anchor="t"/>
-          <a:lstStyle/>
-          <a:p>
-            <a:pPr algn="l" indent="0" marL="0">
-              <a:lnSpc>
-                <a:spcPts val="1680"/>
-              </a:lnSpc>
-              <a:spcBef>
-                <a:spcPts val="300"/>
-              </a:spcBef>
-              <a:spcAft>
-                <a:spcPts val="300"/>
-              </a:spcAft>
-              <a:buNone/>
-            </a:pPr>
-            <a:r>
-              <a:rPr lang="en-US" sz="1200" i="1" dirty="0">
-                <a:solidFill>
-                  <a:srgbClr val="1A1A1A"/>
-                </a:solidFill>
-                <a:latin typeface="Georgia" pitchFamily="34" charset="0"/>
-                <a:ea typeface="Georgia" pitchFamily="34" charset="-122"/>
-                <a:cs typeface="Georgia" pitchFamily="34" charset="-120"/>
-              </a:rPr>
-              <a:t>Each row: Element · Qualities · Source-verse anchor.</a:t>
-            </a:r>
-            <a:endParaRPr lang="en-US" sz="1200" dirty="0"/>
-          </a:p>
-        </p:txBody>
-      </p:sp>
-      <p:sp>
-        <p:nvSpPr>
-          <p:cNvPr id="7" name="Text 5"/>
-          <p:cNvSpPr/>
-          <p:nvPr/>
-        </p:nvSpPr>
-        <p:spPr>
-          <a:xfrm>
-            <a:off x="634901" y="2059186"/>
-            <a:ext cx="8102798" cy="1462683"/>
-          </a:xfrm>
-          <a:prstGeom prst="rect">
-            <a:avLst/>
-          </a:prstGeom>
-          <a:noFill/>
-          <a:ln/>
-        </p:spPr>
-        <p:txBody>
-          <a:bodyPr wrap="square" lIns="0" tIns="0" rIns="0" bIns="0" rtlCol="0" anchor="t"/>
-          <a:lstStyle/>
-          <a:p>
-            <a:pPr algn="l" marL="342900" indent="-342900">
-              <a:lnSpc>
-                <a:spcPts val="1620"/>
-              </a:lnSpc>
-              <a:spcAft>
-                <a:spcPts val="300"/>
-              </a:spcAft>
-              <a:buSzPct val="100000"/>
-              <a:buChar char="•"/>
-            </a:pPr>
-            <a:r>
-              <a:rPr lang="en-US" sz="1200" b="1" dirty="0">
-                <a:solidFill>
-                  <a:srgbClr val="1A1A1A"/>
-                </a:solidFill>
-                <a:latin typeface="Georgia" pitchFamily="34" charset="0"/>
-                <a:ea typeface="Georgia" pitchFamily="34" charset="-122"/>
-                <a:cs typeface="Georgia" pitchFamily="34" charset="-120"/>
-              </a:rPr>
-              <a:t>ākāśa</a:t>
-            </a:r>
-            <a:pPr algn="l" indent="0" marL="0">
-              <a:lnSpc>
-                <a:spcPts val="1620"/>
-              </a:lnSpc>
-              <a:spcAft>
-                <a:spcPts val="300"/>
-              </a:spcAft>
-              <a:buNone/>
-            </a:pPr>
-            <a:r>
-              <a:rPr lang="en-US" sz="1200" dirty="0">
-                <a:solidFill>
-                  <a:srgbClr val="1A1A1A"/>
-                </a:solidFill>
-                <a:latin typeface="Georgia" pitchFamily="34" charset="0"/>
-                <a:ea typeface="Georgia" pitchFamily="34" charset="-122"/>
-                <a:cs typeface="Georgia" pitchFamily="34" charset="-120"/>
-              </a:rPr>
-              <a:t> — śabda · SB 3.26 (qualities-of-space)</a:t>
-            </a:r>
-            <a:endParaRPr lang="en-US" sz="1200" dirty="0"/>
-          </a:p>
-          <a:p>
-            <a:pPr algn="l" marL="342900" indent="-342900">
-              <a:lnSpc>
-                <a:spcPts val="1620"/>
-              </a:lnSpc>
-              <a:spcAft>
-                <a:spcPts val="300"/>
-              </a:spcAft>
-              <a:buSzPct val="100000"/>
-              <a:buChar char="•"/>
-            </a:pPr>
-            <a:r>
-              <a:rPr lang="en-US" sz="1200" b="1" dirty="0">
-                <a:solidFill>
-                  <a:srgbClr val="1A1A1A"/>
-                </a:solidFill>
-                <a:latin typeface="Georgia" pitchFamily="34" charset="0"/>
-                <a:ea typeface="Georgia" pitchFamily="34" charset="-122"/>
-                <a:cs typeface="Georgia" pitchFamily="34" charset="-120"/>
-              </a:rPr>
-              <a:t>vāyu</a:t>
-            </a:r>
-            <a:pPr algn="l" indent="0" marL="0">
-              <a:lnSpc>
-                <a:spcPts val="1620"/>
-              </a:lnSpc>
-              <a:spcAft>
-                <a:spcPts val="300"/>
-              </a:spcAft>
-              <a:buNone/>
-            </a:pPr>
-            <a:r>
-              <a:rPr lang="en-US" sz="1200" dirty="0">
-                <a:solidFill>
-                  <a:srgbClr val="1A1A1A"/>
-                </a:solidFill>
-                <a:latin typeface="Georgia" pitchFamily="34" charset="0"/>
-                <a:ea typeface="Georgia" pitchFamily="34" charset="-122"/>
-                <a:cs typeface="Georgia" pitchFamily="34" charset="-120"/>
-              </a:rPr>
-              <a:t> — śabda + sparśa · SB 3.26.36 (directly quoted: "softness, hardness, cold, heat — qualities of touch, tanmātra of air")</a:t>
-            </a:r>
-            <a:endParaRPr lang="en-US" sz="1200" dirty="0"/>
-          </a:p>
-          <a:p>
-            <a:pPr algn="l" marL="342900" indent="-342900">
-              <a:lnSpc>
-                <a:spcPts val="1620"/>
-              </a:lnSpc>
-              <a:spcAft>
-                <a:spcPts val="300"/>
-              </a:spcAft>
-              <a:buSzPct val="100000"/>
-              <a:buChar char="•"/>
-            </a:pPr>
-            <a:r>
-              <a:rPr lang="en-US" sz="1200" b="1" dirty="0">
-                <a:solidFill>
-                  <a:srgbClr val="1A1A1A"/>
-                </a:solidFill>
-                <a:latin typeface="Georgia" pitchFamily="34" charset="0"/>
-                <a:ea typeface="Georgia" pitchFamily="34" charset="-122"/>
-                <a:cs typeface="Georgia" pitchFamily="34" charset="-120"/>
-              </a:rPr>
-              <a:t>tejas</a:t>
-            </a:r>
-            <a:pPr algn="l" indent="0" marL="0">
-              <a:lnSpc>
-                <a:spcPts val="1620"/>
-              </a:lnSpc>
-              <a:spcAft>
-                <a:spcPts val="300"/>
-              </a:spcAft>
-              <a:buNone/>
-            </a:pPr>
-            <a:r>
-              <a:rPr lang="en-US" sz="1200" dirty="0">
-                <a:solidFill>
-                  <a:srgbClr val="1A1A1A"/>
-                </a:solidFill>
-                <a:latin typeface="Georgia" pitchFamily="34" charset="0"/>
-                <a:ea typeface="Georgia" pitchFamily="34" charset="-122"/>
-                <a:cs typeface="Georgia" pitchFamily="34" charset="-120"/>
-              </a:rPr>
-              <a:t> — śabda + sparśa + rūpa · —</a:t>
-            </a:r>
-            <a:endParaRPr lang="en-US" sz="1200" dirty="0"/>
-          </a:p>
-          <a:p>
-            <a:pPr algn="l" marL="342900" indent="-342900">
-              <a:lnSpc>
-                <a:spcPts val="1620"/>
-              </a:lnSpc>
-              <a:spcAft>
-                <a:spcPts val="300"/>
-              </a:spcAft>
-              <a:buSzPct val="100000"/>
-              <a:buChar char="•"/>
-            </a:pPr>
-            <a:r>
-              <a:rPr lang="en-US" sz="1200" b="1" dirty="0">
-                <a:solidFill>
-                  <a:srgbClr val="1A1A1A"/>
-                </a:solidFill>
-                <a:latin typeface="Georgia" pitchFamily="34" charset="0"/>
-                <a:ea typeface="Georgia" pitchFamily="34" charset="-122"/>
-                <a:cs typeface="Georgia" pitchFamily="34" charset="-120"/>
-              </a:rPr>
-              <a:t>ap</a:t>
-            </a:r>
-            <a:pPr algn="l" indent="0" marL="0">
-              <a:lnSpc>
-                <a:spcPts val="1620"/>
-              </a:lnSpc>
-              <a:spcAft>
-                <a:spcPts val="300"/>
-              </a:spcAft>
-              <a:buNone/>
-            </a:pPr>
-            <a:r>
-              <a:rPr lang="en-US" sz="1200" dirty="0">
-                <a:solidFill>
-                  <a:srgbClr val="1A1A1A"/>
-                </a:solidFill>
-                <a:latin typeface="Georgia" pitchFamily="34" charset="0"/>
-                <a:ea typeface="Georgia" pitchFamily="34" charset="-122"/>
-                <a:cs typeface="Georgia" pitchFamily="34" charset="-120"/>
-              </a:rPr>
-              <a:t> — śabda + sparśa + rūpa + rasa · —</a:t>
-            </a:r>
-            <a:endParaRPr lang="en-US" sz="1200" dirty="0"/>
-          </a:p>
-          <a:p>
-            <a:pPr algn="l" marL="342900" indent="-342900">
-              <a:lnSpc>
-                <a:spcPts val="1620"/>
-              </a:lnSpc>
-              <a:spcAft>
-                <a:spcPts val="300"/>
-              </a:spcAft>
-              <a:buSzPct val="100000"/>
-              <a:buChar char="•"/>
-            </a:pPr>
-            <a:r>
-              <a:rPr lang="en-US" sz="1200" b="1" dirty="0">
-                <a:solidFill>
-                  <a:srgbClr val="1A1A1A"/>
-                </a:solidFill>
-                <a:latin typeface="Georgia" pitchFamily="34" charset="0"/>
-                <a:ea typeface="Georgia" pitchFamily="34" charset="-122"/>
-                <a:cs typeface="Georgia" pitchFamily="34" charset="-120"/>
-              </a:rPr>
-              <a:t>pṛthvī</a:t>
-            </a:r>
-            <a:pPr algn="l" indent="0" marL="0">
-              <a:lnSpc>
-                <a:spcPts val="1620"/>
-              </a:lnSpc>
-              <a:spcAft>
-                <a:spcPts val="300"/>
-              </a:spcAft>
-              <a:buNone/>
-            </a:pPr>
-            <a:r>
-              <a:rPr lang="en-US" sz="1200" dirty="0">
-                <a:solidFill>
-                  <a:srgbClr val="1A1A1A"/>
-                </a:solidFill>
-                <a:latin typeface="Georgia" pitchFamily="34" charset="0"/>
-                <a:ea typeface="Georgia" pitchFamily="34" charset="-122"/>
-                <a:cs typeface="Georgia" pitchFamily="34" charset="-120"/>
-              </a:rPr>
-              <a:t> — śabda + sparśa + rūpa + rasa + gandha · SB 3.26.44 (taste → smell as the last new quality)</a:t>
-            </a:r>
-            <a:endParaRPr lang="en-US" sz="1200" dirty="0"/>
-          </a:p>
-        </p:txBody>
-      </p:sp>
-      <p:sp>
-        <p:nvSpPr>
-          <p:cNvPr id="8" name="Text 6"/>
-          <p:cNvSpPr/>
-          <p:nvPr/>
-        </p:nvSpPr>
-        <p:spPr>
-          <a:xfrm>
-            <a:off x="634901" y="3623370"/>
-            <a:ext cx="8102798" cy="281880"/>
-          </a:xfrm>
-          <a:prstGeom prst="rect">
-            <a:avLst/>
-          </a:prstGeom>
-          <a:noFill/>
-          <a:ln/>
-        </p:spPr>
-        <p:txBody>
-          <a:bodyPr wrap="square" lIns="0" tIns="0" rIns="0" bIns="0" rtlCol="0" anchor="t"/>
-          <a:lstStyle/>
-          <a:p>
-            <a:pPr algn="l" marL="342900" indent="-342900">
-              <a:lnSpc>
-                <a:spcPts val="1620"/>
-              </a:lnSpc>
-              <a:spcAft>
-                <a:spcPts val="300"/>
-              </a:spcAft>
-              <a:buSzPct val="100000"/>
-              <a:buChar char="•"/>
-            </a:pPr>
-            <a:r>
-              <a:rPr lang="en-US" sz="1200" b="1" dirty="0">
-                <a:solidFill>
-                  <a:srgbClr val="1A1A1A"/>
-                </a:solidFill>
-                <a:latin typeface="Georgia" pitchFamily="34" charset="0"/>
-                <a:ea typeface="Georgia" pitchFamily="34" charset="-122"/>
-                <a:cs typeface="Georgia" pitchFamily="34" charset="-120"/>
-              </a:rPr>
-              <a:t>Internal consistency:</a:t>
-            </a:r>
-            <a:pPr algn="l" indent="0" marL="0">
-              <a:lnSpc>
-                <a:spcPts val="1620"/>
-              </a:lnSpc>
-              <a:spcAft>
-                <a:spcPts val="300"/>
-              </a:spcAft>
-              <a:buNone/>
-            </a:pPr>
-            <a:r>
-              <a:rPr lang="en-US" sz="1200" dirty="0">
-                <a:solidFill>
-                  <a:srgbClr val="1A1A1A"/>
-                </a:solidFill>
-                <a:latin typeface="Georgia" pitchFamily="34" charset="0"/>
-                <a:ea typeface="Georgia" pitchFamily="34" charset="-122"/>
-                <a:cs typeface="Georgia" pitchFamily="34" charset="-120"/>
-              </a:rPr>
-              <a:t> the scheme is </a:t>
-            </a:r>
-            <a:pPr algn="l" indent="0" marL="0">
-              <a:lnSpc>
-                <a:spcPts val="1620"/>
-              </a:lnSpc>
-              <a:spcAft>
-                <a:spcPts val="300"/>
-              </a:spcAft>
-              <a:buNone/>
-            </a:pPr>
-            <a:r>
-              <a:rPr lang="en-US" sz="1200" i="1" dirty="0">
-                <a:solidFill>
-                  <a:srgbClr val="1A1A1A"/>
-                </a:solidFill>
-                <a:latin typeface="Georgia" pitchFamily="34" charset="0"/>
-                <a:ea typeface="Georgia" pitchFamily="34" charset="-122"/>
-                <a:cs typeface="Georgia" pitchFamily="34" charset="-120"/>
-              </a:rPr>
-              <a:t>symmetric and complete</a:t>
-            </a:r>
-            <a:pPr algn="l" indent="0" marL="0">
-              <a:lnSpc>
-                <a:spcPts val="1620"/>
-              </a:lnSpc>
-              <a:spcAft>
-                <a:spcPts val="300"/>
-              </a:spcAft>
-              <a:buNone/>
-            </a:pPr>
-            <a:r>
-              <a:rPr lang="en-US" sz="1200" dirty="0">
-                <a:solidFill>
-                  <a:srgbClr val="1A1A1A"/>
-                </a:solidFill>
-                <a:latin typeface="Georgia" pitchFamily="34" charset="0"/>
-                <a:ea typeface="Georgia" pitchFamily="34" charset="-122"/>
-                <a:cs typeface="Georgia" pitchFamily="34" charset="-120"/>
-              </a:rPr>
-              <a:t>:</a:t>
-            </a:r>
-            <a:endParaRPr lang="en-US" sz="1200" dirty="0"/>
-          </a:p>
-        </p:txBody>
-      </p:sp>
-      <p:sp>
-        <p:nvSpPr>
-          <p:cNvPr id="9" name="Text 7"/>
-          <p:cNvSpPr/>
-          <p:nvPr/>
-        </p:nvSpPr>
-        <p:spPr>
-          <a:xfrm>
-            <a:off x="406301" y="3994100"/>
-            <a:ext cx="8498026" cy="639812"/>
-          </a:xfrm>
-          <a:prstGeom prst="rect">
-            <a:avLst/>
-          </a:prstGeom>
-          <a:noFill/>
-          <a:ln/>
-        </p:spPr>
-        <p:txBody>
-          <a:bodyPr wrap="square" lIns="0" tIns="0" rIns="0" bIns="0" rtlCol="0" anchor="t"/>
-          <a:lstStyle/>
-          <a:p>
-            <a:pPr algn="l" indent="0" marL="0">
-              <a:lnSpc>
-                <a:spcPts val="1680"/>
-              </a:lnSpc>
-              <a:spcBef>
-                <a:spcPts val="300"/>
-              </a:spcBef>
-              <a:spcAft>
-                <a:spcPts val="300"/>
-              </a:spcAft>
-              <a:buNone/>
-            </a:pPr>
-            <a:r>
-              <a:rPr lang="en-US" sz="1200" dirty="0">
-                <a:solidFill>
-                  <a:srgbClr val="1A1A1A"/>
-                </a:solidFill>
-                <a:latin typeface="Georgia" pitchFamily="34" charset="0"/>
-                <a:ea typeface="Georgia" pitchFamily="34" charset="-122"/>
-                <a:cs typeface="Georgia" pitchFamily="34" charset="-120"/>
-              </a:rPr>
-              <a:t>– 5 bhūtas, 5 tanmātras, 5 indriyas of perception. – Each bhūta pairs with exactly one tanmātra. – Each tanmātra is perceived by exactly one indriya. – The quality count (1, 2, 3, 4, 5) is a </a:t>
-            </a:r>
-            <a:pPr algn="l" indent="0" marL="0">
-              <a:lnSpc>
-                <a:spcPts val="1680"/>
-              </a:lnSpc>
-              <a:spcBef>
-                <a:spcPts val="300"/>
-              </a:spcBef>
-              <a:spcAft>
-                <a:spcPts val="300"/>
-              </a:spcAft>
-              <a:buNone/>
-            </a:pPr>
-            <a:r>
-              <a:rPr lang="en-US" sz="1200" i="1" dirty="0">
-                <a:solidFill>
-                  <a:srgbClr val="1A1A1A"/>
-                </a:solidFill>
-                <a:latin typeface="Georgia" pitchFamily="34" charset="0"/>
-                <a:ea typeface="Georgia" pitchFamily="34" charset="-122"/>
-                <a:cs typeface="Georgia" pitchFamily="34" charset="-120"/>
-              </a:rPr>
-              <a:t>predicted consequence</a:t>
-            </a:r>
-            <a:pPr algn="l" indent="0" marL="0">
-              <a:lnSpc>
-                <a:spcPts val="1680"/>
-              </a:lnSpc>
-              <a:spcBef>
-                <a:spcPts val="300"/>
-              </a:spcBef>
-              <a:spcAft>
-                <a:spcPts val="300"/>
-              </a:spcAft>
-              <a:buNone/>
-            </a:pPr>
-            <a:r>
-              <a:rPr lang="en-US" sz="1200" dirty="0">
-                <a:solidFill>
-                  <a:srgbClr val="1A1A1A"/>
-                </a:solidFill>
-                <a:latin typeface="Georgia" pitchFamily="34" charset="0"/>
-                <a:ea typeface="Georgia" pitchFamily="34" charset="-122"/>
-                <a:cs typeface="Georgia" pitchFamily="34" charset="-120"/>
-              </a:rPr>
-              <a:t> of the emergence order — not an arbitrary stipulation.</a:t>
-            </a:r>
-            <a:endParaRPr lang="en-US" sz="1200" dirty="0"/>
-          </a:p>
-        </p:txBody>
-      </p:sp>
-      <p:sp>
-        <p:nvSpPr>
-          <p:cNvPr id="10" name="Text 8"/>
-          <p:cNvSpPr/>
-          <p:nvPr/>
-        </p:nvSpPr>
-        <p:spPr>
-          <a:xfrm>
-            <a:off x="634901" y="4722763"/>
-            <a:ext cx="8102798" cy="281880"/>
-          </a:xfrm>
-          <a:prstGeom prst="rect">
-            <a:avLst/>
-          </a:prstGeom>
-          <a:noFill/>
-          <a:ln/>
-        </p:spPr>
-        <p:txBody>
-          <a:bodyPr wrap="square" lIns="0" tIns="0" rIns="0" bIns="0" rtlCol="0" anchor="t"/>
-          <a:lstStyle/>
-          <a:p>
-            <a:pPr algn="l" marL="342900" indent="-342900">
-              <a:lnSpc>
-                <a:spcPts val="1620"/>
-              </a:lnSpc>
-              <a:spcAft>
-                <a:spcPts val="300"/>
-              </a:spcAft>
-              <a:buSzPct val="100000"/>
-              <a:buChar char="•"/>
-            </a:pPr>
-            <a:r>
-              <a:rPr lang="en-US" sz="1200" b="1" dirty="0">
-                <a:solidFill>
-                  <a:srgbClr val="1A1A1A"/>
-                </a:solidFill>
-                <a:latin typeface="Georgia" pitchFamily="34" charset="0"/>
-                <a:ea typeface="Georgia" pitchFamily="34" charset="-122"/>
-                <a:cs typeface="Georgia" pitchFamily="34" charset="-120"/>
-              </a:rPr>
-              <a:t>Read SB 3.26.36 together</a:t>
-            </a:r>
-            <a:pPr algn="l" indent="0" marL="0">
-              <a:lnSpc>
-                <a:spcPts val="1620"/>
-              </a:lnSpc>
-              <a:spcAft>
-                <a:spcPts val="300"/>
-              </a:spcAft>
-              <a:buNone/>
-            </a:pPr>
-            <a:r>
-              <a:rPr lang="en-US" sz="1200" dirty="0">
-                <a:solidFill>
-                  <a:srgbClr val="1A1A1A"/>
-                </a:solidFill>
-                <a:latin typeface="Georgia" pitchFamily="34" charset="0"/>
-                <a:ea typeface="Georgia" pitchFamily="34" charset="-122"/>
-                <a:cs typeface="Georgia" pitchFamily="34" charset="-120"/>
-              </a:rPr>
-              <a:t> (in IAST):</a:t>
-            </a:r>
-            <a:endParaRPr lang="en-US" sz="1200" dirty="0"/>
-          </a:p>
-        </p:txBody>
-      </p:sp>
-      <p:sp>
-        <p:nvSpPr>
-          <p:cNvPr id="11" name="Text 9"/>
-          <p:cNvSpPr/>
-          <p:nvPr/>
-        </p:nvSpPr>
-        <p:spPr>
-          <a:xfrm>
-            <a:off x="406301" y="5093494"/>
-            <a:ext cx="8498026" cy="639812"/>
-          </a:xfrm>
-          <a:prstGeom prst="rect">
-            <a:avLst/>
-          </a:prstGeom>
-          <a:noFill/>
-          <a:ln/>
-        </p:spPr>
-        <p:txBody>
-          <a:bodyPr wrap="square" lIns="0" tIns="0" rIns="0" bIns="0" rtlCol="0" anchor="t"/>
-          <a:lstStyle/>
-          <a:p>
-            <a:pPr algn="l" indent="0" marL="0">
-              <a:lnSpc>
-                <a:spcPts val="1680"/>
-              </a:lnSpc>
-              <a:spcBef>
-                <a:spcPts val="300"/>
-              </a:spcBef>
-              <a:spcAft>
-                <a:spcPts val="300"/>
-              </a:spcAft>
-              <a:buNone/>
-            </a:pPr>
-            <a:r>
-              <a:rPr lang="en-US" sz="1200" dirty="0">
-                <a:solidFill>
-                  <a:srgbClr val="1A1A1A"/>
-                </a:solidFill>
-                <a:latin typeface="Georgia" pitchFamily="34" charset="0"/>
-                <a:ea typeface="Georgia" pitchFamily="34" charset="-122"/>
-                <a:cs typeface="Georgia" pitchFamily="34" charset="-120"/>
-              </a:rPr>
-              <a:t>&gt; </a:t>
-            </a:r>
-            <a:pPr algn="l" indent="0" marL="0">
-              <a:lnSpc>
-                <a:spcPts val="1680"/>
-              </a:lnSpc>
-              <a:spcBef>
-                <a:spcPts val="300"/>
-              </a:spcBef>
-              <a:spcAft>
-                <a:spcPts val="300"/>
-              </a:spcAft>
-              <a:buNone/>
-            </a:pPr>
-            <a:r>
-              <a:rPr lang="en-US" sz="1200" i="1" dirty="0">
-                <a:solidFill>
-                  <a:srgbClr val="1A1A1A"/>
-                </a:solidFill>
-                <a:latin typeface="Georgia" pitchFamily="34" charset="0"/>
-                <a:ea typeface="Georgia" pitchFamily="34" charset="-122"/>
-                <a:cs typeface="Georgia" pitchFamily="34" charset="-120"/>
-              </a:rPr>
-              <a:t>"mṛdutvaṁ kaṭhinatvaṁ ca śaityam uṣṇatvam eva ca / etat sparśasya sparśatvaṁ tanmātratvaṁ nabhasvataḥ"</a:t>
-            </a:r>
-            <a:pPr algn="l" indent="0" marL="0">
-              <a:lnSpc>
-                <a:spcPts val="1680"/>
-              </a:lnSpc>
-              <a:spcBef>
-                <a:spcPts val="300"/>
-              </a:spcBef>
-              <a:spcAft>
-                <a:spcPts val="300"/>
-              </a:spcAft>
-              <a:buNone/>
-            </a:pPr>
-            <a:r>
-              <a:rPr lang="en-US" sz="1200" dirty="0">
-                <a:solidFill>
-                  <a:srgbClr val="1A1A1A"/>
-                </a:solidFill>
-                <a:latin typeface="Georgia" pitchFamily="34" charset="0"/>
-                <a:ea typeface="Georgia" pitchFamily="34" charset="-122"/>
-                <a:cs typeface="Georgia" pitchFamily="34" charset="-120"/>
-              </a:rPr>
-              <a:t> &gt; "Softness, hardness, cold, and heat — these are the qualities of touch (</a:t>
-            </a:r>
-            <a:pPr algn="l" indent="0" marL="0">
-              <a:lnSpc>
-                <a:spcPts val="1680"/>
-              </a:lnSpc>
-              <a:spcBef>
-                <a:spcPts val="300"/>
-              </a:spcBef>
-              <a:spcAft>
-                <a:spcPts val="300"/>
-              </a:spcAft>
-              <a:buNone/>
-            </a:pPr>
-            <a:r>
-              <a:rPr lang="en-US" sz="1200" i="1" dirty="0">
-                <a:solidFill>
-                  <a:srgbClr val="1A1A1A"/>
-                </a:solidFill>
-                <a:latin typeface="Georgia" pitchFamily="34" charset="0"/>
-                <a:ea typeface="Georgia" pitchFamily="34" charset="-122"/>
-                <a:cs typeface="Georgia" pitchFamily="34" charset="-120"/>
-              </a:rPr>
-              <a:t>sparśa</a:t>
-            </a:r>
-            <a:pPr algn="l" indent="0" marL="0">
-              <a:lnSpc>
-                <a:spcPts val="1680"/>
-              </a:lnSpc>
-              <a:spcBef>
-                <a:spcPts val="300"/>
-              </a:spcBef>
-              <a:spcAft>
-                <a:spcPts val="300"/>
-              </a:spcAft>
-              <a:buNone/>
-            </a:pPr>
-            <a:r>
-              <a:rPr lang="en-US" sz="1200" dirty="0">
-                <a:solidFill>
-                  <a:srgbClr val="1A1A1A"/>
-                </a:solidFill>
-                <a:latin typeface="Georgia" pitchFamily="34" charset="0"/>
-                <a:ea typeface="Georgia" pitchFamily="34" charset="-122"/>
-                <a:cs typeface="Georgia" pitchFamily="34" charset="-120"/>
-              </a:rPr>
-              <a:t>), the subtle attribute (</a:t>
-            </a:r>
-            <a:pPr algn="l" indent="0" marL="0">
-              <a:lnSpc>
-                <a:spcPts val="1680"/>
-              </a:lnSpc>
-              <a:spcBef>
-                <a:spcPts val="300"/>
-              </a:spcBef>
-              <a:spcAft>
-                <a:spcPts val="300"/>
-              </a:spcAft>
-              <a:buNone/>
-            </a:pPr>
-            <a:r>
-              <a:rPr lang="en-US" sz="1200" i="1" dirty="0">
-                <a:solidFill>
-                  <a:srgbClr val="1A1A1A"/>
-                </a:solidFill>
-                <a:latin typeface="Georgia" pitchFamily="34" charset="0"/>
-                <a:ea typeface="Georgia" pitchFamily="34" charset="-122"/>
-                <a:cs typeface="Georgia" pitchFamily="34" charset="-120"/>
-              </a:rPr>
-              <a:t>tanmātra</a:t>
-            </a:r>
-            <a:pPr algn="l" indent="0" marL="0">
-              <a:lnSpc>
-                <a:spcPts val="1680"/>
-              </a:lnSpc>
-              <a:spcBef>
-                <a:spcPts val="300"/>
-              </a:spcBef>
-              <a:spcAft>
-                <a:spcPts val="300"/>
-              </a:spcAft>
-              <a:buNone/>
-            </a:pPr>
-            <a:r>
-              <a:rPr lang="en-US" sz="1200" dirty="0">
-                <a:solidFill>
-                  <a:srgbClr val="1A1A1A"/>
-                </a:solidFill>
-                <a:latin typeface="Georgia" pitchFamily="34" charset="0"/>
-                <a:ea typeface="Georgia" pitchFamily="34" charset="-122"/>
-                <a:cs typeface="Georgia" pitchFamily="34" charset="-120"/>
-              </a:rPr>
-              <a:t>) of air (</a:t>
-            </a:r>
-            <a:pPr algn="l" indent="0" marL="0">
-              <a:lnSpc>
-                <a:spcPts val="1680"/>
-              </a:lnSpc>
-              <a:spcBef>
-                <a:spcPts val="300"/>
-              </a:spcBef>
-              <a:spcAft>
-                <a:spcPts val="300"/>
-              </a:spcAft>
-              <a:buNone/>
-            </a:pPr>
-            <a:r>
-              <a:rPr lang="en-US" sz="1200" i="1" dirty="0">
-                <a:solidFill>
-                  <a:srgbClr val="1A1A1A"/>
-                </a:solidFill>
-                <a:latin typeface="Georgia" pitchFamily="34" charset="0"/>
-                <a:ea typeface="Georgia" pitchFamily="34" charset="-122"/>
-                <a:cs typeface="Georgia" pitchFamily="34" charset="-120"/>
-              </a:rPr>
-              <a:t>nabhasvat</a:t>
-            </a:r>
-            <a:pPr algn="l" indent="0" marL="0">
-              <a:lnSpc>
-                <a:spcPts val="1680"/>
-              </a:lnSpc>
-              <a:spcBef>
-                <a:spcPts val="300"/>
-              </a:spcBef>
-              <a:spcAft>
-                <a:spcPts val="300"/>
-              </a:spcAft>
-              <a:buNone/>
-            </a:pPr>
-            <a:r>
-              <a:rPr lang="en-US" sz="1200" dirty="0">
-                <a:solidFill>
-                  <a:srgbClr val="1A1A1A"/>
-                </a:solidFill>
-                <a:latin typeface="Georgia" pitchFamily="34" charset="0"/>
-                <a:ea typeface="Georgia" pitchFamily="34" charset="-122"/>
-                <a:cs typeface="Georgia" pitchFamily="34" charset="-120"/>
-              </a:rPr>
-              <a:t>)."</a:t>
-            </a:r>
-            <a:endParaRPr lang="en-US" sz="1200" dirty="0"/>
-          </a:p>
-        </p:txBody>
-      </p:sp>
-      <p:sp>
-        <p:nvSpPr>
-          <p:cNvPr id="12" name="Text 10"/>
-          <p:cNvSpPr/>
-          <p:nvPr/>
-        </p:nvSpPr>
-        <p:spPr>
-          <a:xfrm>
-            <a:off x="406301" y="5809506"/>
-            <a:ext cx="8498026" cy="426541"/>
-          </a:xfrm>
-          <a:prstGeom prst="rect">
-            <a:avLst/>
-          </a:prstGeom>
-          <a:noFill/>
-          <a:ln/>
-        </p:spPr>
-        <p:txBody>
-          <a:bodyPr wrap="square" lIns="0" tIns="0" rIns="0" bIns="0" rtlCol="0" anchor="t"/>
-          <a:lstStyle/>
-          <a:p>
-            <a:pPr algn="l" indent="0" marL="0">
-              <a:lnSpc>
-                <a:spcPts val="1680"/>
-              </a:lnSpc>
-              <a:spcBef>
-                <a:spcPts val="300"/>
-              </a:spcBef>
-              <a:spcAft>
-                <a:spcPts val="300"/>
-              </a:spcAft>
-              <a:buNone/>
-            </a:pPr>
-            <a:r>
-              <a:rPr lang="en-US" sz="1200" dirty="0">
-                <a:solidFill>
-                  <a:srgbClr val="1A1A1A"/>
-                </a:solidFill>
-                <a:latin typeface="Georgia" pitchFamily="34" charset="0"/>
-                <a:ea typeface="Georgia" pitchFamily="34" charset="-122"/>
-                <a:cs typeface="Georgia" pitchFamily="34" charset="-120"/>
-              </a:rPr>
-              <a:t>– Word-by-word with class: </a:t>
-            </a:r>
-            <a:pPr algn="l" indent="0" marL="0">
-              <a:lnSpc>
-                <a:spcPts val="1680"/>
-              </a:lnSpc>
-              <a:spcBef>
-                <a:spcPts val="300"/>
-              </a:spcBef>
-              <a:spcAft>
-                <a:spcPts val="300"/>
-              </a:spcAft>
-              <a:buNone/>
-            </a:pPr>
-            <a:r>
-              <a:rPr lang="en-US" sz="1200" i="1" dirty="0">
-                <a:solidFill>
-                  <a:srgbClr val="1A1A1A"/>
-                </a:solidFill>
-                <a:latin typeface="Georgia" pitchFamily="34" charset="0"/>
-                <a:ea typeface="Georgia" pitchFamily="34" charset="-122"/>
-                <a:cs typeface="Georgia" pitchFamily="34" charset="-120"/>
-              </a:rPr>
-              <a:t>mṛdutvam</a:t>
-            </a:r>
-            <a:pPr algn="l" indent="0" marL="0">
-              <a:lnSpc>
-                <a:spcPts val="1680"/>
-              </a:lnSpc>
-              <a:spcBef>
-                <a:spcPts val="300"/>
-              </a:spcBef>
-              <a:spcAft>
-                <a:spcPts val="300"/>
-              </a:spcAft>
-              <a:buNone/>
-            </a:pPr>
-            <a:r>
-              <a:rPr lang="en-US" sz="1200" dirty="0">
-                <a:solidFill>
-                  <a:srgbClr val="1A1A1A"/>
-                </a:solidFill>
-                <a:latin typeface="Georgia" pitchFamily="34" charset="0"/>
-                <a:ea typeface="Georgia" pitchFamily="34" charset="-122"/>
-                <a:cs typeface="Georgia" pitchFamily="34" charset="-120"/>
-              </a:rPr>
-              <a:t> = softness, </a:t>
-            </a:r>
-            <a:pPr algn="l" indent="0" marL="0">
-              <a:lnSpc>
-                <a:spcPts val="1680"/>
-              </a:lnSpc>
-              <a:spcBef>
-                <a:spcPts val="300"/>
-              </a:spcBef>
-              <a:spcAft>
-                <a:spcPts val="300"/>
-              </a:spcAft>
-              <a:buNone/>
-            </a:pPr>
-            <a:r>
-              <a:rPr lang="en-US" sz="1200" i="1" dirty="0">
-                <a:solidFill>
-                  <a:srgbClr val="1A1A1A"/>
-                </a:solidFill>
-                <a:latin typeface="Georgia" pitchFamily="34" charset="0"/>
-                <a:ea typeface="Georgia" pitchFamily="34" charset="-122"/>
-                <a:cs typeface="Georgia" pitchFamily="34" charset="-120"/>
-              </a:rPr>
-              <a:t>kaṭhinatvam</a:t>
-            </a:r>
-            <a:pPr algn="l" indent="0" marL="0">
-              <a:lnSpc>
-                <a:spcPts val="1680"/>
-              </a:lnSpc>
-              <a:spcBef>
-                <a:spcPts val="300"/>
-              </a:spcBef>
-              <a:spcAft>
-                <a:spcPts val="300"/>
-              </a:spcAft>
-              <a:buNone/>
-            </a:pPr>
-            <a:r>
-              <a:rPr lang="en-US" sz="1200" dirty="0">
-                <a:solidFill>
-                  <a:srgbClr val="1A1A1A"/>
-                </a:solidFill>
-                <a:latin typeface="Georgia" pitchFamily="34" charset="0"/>
-                <a:ea typeface="Georgia" pitchFamily="34" charset="-122"/>
-                <a:cs typeface="Georgia" pitchFamily="34" charset="-120"/>
-              </a:rPr>
-              <a:t> = hardness, </a:t>
-            </a:r>
-            <a:pPr algn="l" indent="0" marL="0">
-              <a:lnSpc>
-                <a:spcPts val="1680"/>
-              </a:lnSpc>
-              <a:spcBef>
-                <a:spcPts val="300"/>
-              </a:spcBef>
-              <a:spcAft>
-                <a:spcPts val="300"/>
-              </a:spcAft>
-              <a:buNone/>
-            </a:pPr>
-            <a:r>
-              <a:rPr lang="en-US" sz="1200" i="1" dirty="0">
-                <a:solidFill>
-                  <a:srgbClr val="1A1A1A"/>
-                </a:solidFill>
-                <a:latin typeface="Georgia" pitchFamily="34" charset="0"/>
-                <a:ea typeface="Georgia" pitchFamily="34" charset="-122"/>
-                <a:cs typeface="Georgia" pitchFamily="34" charset="-120"/>
-              </a:rPr>
-              <a:t>śaityam</a:t>
-            </a:r>
-            <a:pPr algn="l" indent="0" marL="0">
-              <a:lnSpc>
-                <a:spcPts val="1680"/>
-              </a:lnSpc>
-              <a:spcBef>
-                <a:spcPts val="300"/>
-              </a:spcBef>
-              <a:spcAft>
-                <a:spcPts val="300"/>
-              </a:spcAft>
-              <a:buNone/>
-            </a:pPr>
-            <a:r>
-              <a:rPr lang="en-US" sz="1200" dirty="0">
-                <a:solidFill>
-                  <a:srgbClr val="1A1A1A"/>
-                </a:solidFill>
-                <a:latin typeface="Georgia" pitchFamily="34" charset="0"/>
-                <a:ea typeface="Georgia" pitchFamily="34" charset="-122"/>
-                <a:cs typeface="Georgia" pitchFamily="34" charset="-120"/>
-              </a:rPr>
-              <a:t> = cold, </a:t>
-            </a:r>
-            <a:pPr algn="l" indent="0" marL="0">
-              <a:lnSpc>
-                <a:spcPts val="1680"/>
-              </a:lnSpc>
-              <a:spcBef>
-                <a:spcPts val="300"/>
-              </a:spcBef>
-              <a:spcAft>
-                <a:spcPts val="300"/>
-              </a:spcAft>
-              <a:buNone/>
-            </a:pPr>
-            <a:r>
-              <a:rPr lang="en-US" sz="1200" i="1" dirty="0">
-                <a:solidFill>
-                  <a:srgbClr val="1A1A1A"/>
-                </a:solidFill>
-                <a:latin typeface="Georgia" pitchFamily="34" charset="0"/>
-                <a:ea typeface="Georgia" pitchFamily="34" charset="-122"/>
-                <a:cs typeface="Georgia" pitchFamily="34" charset="-120"/>
-              </a:rPr>
-              <a:t>uṣṇatvam</a:t>
-            </a:r>
-            <a:pPr algn="l" indent="0" marL="0">
-              <a:lnSpc>
-                <a:spcPts val="1680"/>
-              </a:lnSpc>
-              <a:spcBef>
-                <a:spcPts val="300"/>
-              </a:spcBef>
-              <a:spcAft>
-                <a:spcPts val="300"/>
-              </a:spcAft>
-              <a:buNone/>
-            </a:pPr>
-            <a:r>
-              <a:rPr lang="en-US" sz="1200" dirty="0">
-                <a:solidFill>
-                  <a:srgbClr val="1A1A1A"/>
-                </a:solidFill>
-                <a:latin typeface="Georgia" pitchFamily="34" charset="0"/>
-                <a:ea typeface="Georgia" pitchFamily="34" charset="-122"/>
-                <a:cs typeface="Georgia" pitchFamily="34" charset="-120"/>
-              </a:rPr>
-              <a:t> = heat. </a:t>
-            </a:r>
-            <a:pPr algn="l" indent="0" marL="0">
-              <a:lnSpc>
-                <a:spcPts val="1680"/>
-              </a:lnSpc>
-              <a:spcBef>
-                <a:spcPts val="300"/>
-              </a:spcBef>
-              <a:spcAft>
-                <a:spcPts val="300"/>
-              </a:spcAft>
-              <a:buNone/>
-            </a:pPr>
-            <a:r>
-              <a:rPr lang="en-US" sz="1200" i="1" dirty="0">
-                <a:solidFill>
-                  <a:srgbClr val="1A1A1A"/>
-                </a:solidFill>
-                <a:latin typeface="Georgia" pitchFamily="34" charset="0"/>
-                <a:ea typeface="Georgia" pitchFamily="34" charset="-122"/>
-                <a:cs typeface="Georgia" pitchFamily="34" charset="-120"/>
-              </a:rPr>
-              <a:t>etat</a:t>
-            </a:r>
-            <a:pPr algn="l" indent="0" marL="0">
-              <a:lnSpc>
-                <a:spcPts val="1680"/>
-              </a:lnSpc>
-              <a:spcBef>
-                <a:spcPts val="300"/>
-              </a:spcBef>
-              <a:spcAft>
-                <a:spcPts val="300"/>
-              </a:spcAft>
-              <a:buNone/>
-            </a:pPr>
-            <a:r>
-              <a:rPr lang="en-US" sz="1200" dirty="0">
-                <a:solidFill>
-                  <a:srgbClr val="1A1A1A"/>
-                </a:solidFill>
-                <a:latin typeface="Georgia" pitchFamily="34" charset="0"/>
-                <a:ea typeface="Georgia" pitchFamily="34" charset="-122"/>
-                <a:cs typeface="Georgia" pitchFamily="34" charset="-120"/>
-              </a:rPr>
-              <a:t> = these. </a:t>
-            </a:r>
-            <a:pPr algn="l" indent="0" marL="0">
-              <a:lnSpc>
-                <a:spcPts val="1680"/>
-              </a:lnSpc>
-              <a:spcBef>
-                <a:spcPts val="300"/>
-              </a:spcBef>
-              <a:spcAft>
-                <a:spcPts val="300"/>
-              </a:spcAft>
-              <a:buNone/>
-            </a:pPr>
-            <a:r>
-              <a:rPr lang="en-US" sz="1200" i="1" dirty="0">
-                <a:solidFill>
-                  <a:srgbClr val="1A1A1A"/>
-                </a:solidFill>
-                <a:latin typeface="Georgia" pitchFamily="34" charset="0"/>
-                <a:ea typeface="Georgia" pitchFamily="34" charset="-122"/>
-                <a:cs typeface="Georgia" pitchFamily="34" charset="-120"/>
-              </a:rPr>
-              <a:t>sparśasya sparśatvam</a:t>
-            </a:r>
-            <a:pPr algn="l" indent="0" marL="0">
-              <a:lnSpc>
-                <a:spcPts val="1680"/>
-              </a:lnSpc>
-              <a:spcBef>
-                <a:spcPts val="300"/>
-              </a:spcBef>
-              <a:spcAft>
-                <a:spcPts val="300"/>
-              </a:spcAft>
-              <a:buNone/>
-            </a:pPr>
-            <a:r>
-              <a:rPr lang="en-US" sz="1200" dirty="0">
-                <a:solidFill>
-                  <a:srgbClr val="1A1A1A"/>
-                </a:solidFill>
-                <a:latin typeface="Georgia" pitchFamily="34" charset="0"/>
-                <a:ea typeface="Georgia" pitchFamily="34" charset="-122"/>
-                <a:cs typeface="Georgia" pitchFamily="34" charset="-120"/>
-              </a:rPr>
-              <a:t> = the touch-ness of touch. </a:t>
-            </a:r>
-            <a:pPr algn="l" indent="0" marL="0">
-              <a:lnSpc>
-                <a:spcPts val="1680"/>
-              </a:lnSpc>
-              <a:spcBef>
-                <a:spcPts val="300"/>
-              </a:spcBef>
-              <a:spcAft>
-                <a:spcPts val="300"/>
-              </a:spcAft>
-              <a:buNone/>
-            </a:pPr>
-            <a:r>
-              <a:rPr lang="en-US" sz="1200" i="1" dirty="0">
-                <a:solidFill>
-                  <a:srgbClr val="1A1A1A"/>
-                </a:solidFill>
-                <a:latin typeface="Georgia" pitchFamily="34" charset="0"/>
-                <a:ea typeface="Georgia" pitchFamily="34" charset="-122"/>
-                <a:cs typeface="Georgia" pitchFamily="34" charset="-120"/>
-              </a:rPr>
-              <a:t>tanmātratvam nabhasvataḥ</a:t>
-            </a:r>
-            <a:pPr algn="l" indent="0" marL="0">
-              <a:lnSpc>
-                <a:spcPts val="1680"/>
-              </a:lnSpc>
-              <a:spcBef>
-                <a:spcPts val="300"/>
-              </a:spcBef>
-              <a:spcAft>
-                <a:spcPts val="300"/>
-              </a:spcAft>
-              <a:buNone/>
-            </a:pPr>
-            <a:r>
-              <a:rPr lang="en-US" sz="1200" dirty="0">
-                <a:solidFill>
-                  <a:srgbClr val="1A1A1A"/>
-                </a:solidFill>
-                <a:latin typeface="Georgia" pitchFamily="34" charset="0"/>
-                <a:ea typeface="Georgia" pitchFamily="34" charset="-122"/>
-                <a:cs typeface="Georgia" pitchFamily="34" charset="-120"/>
-              </a:rPr>
-              <a:t> = the subtle-essence-ness of air.</a:t>
-            </a:r>
-            <a:endParaRPr lang="en-US" sz="1200" dirty="0"/>
-          </a:p>
-        </p:txBody>
-      </p:sp>
-      <p:sp>
-        <p:nvSpPr>
-          <p:cNvPr id="13" name="Text 11"/>
-          <p:cNvSpPr/>
-          <p:nvPr/>
-        </p:nvSpPr>
-        <p:spPr>
-          <a:xfrm>
-            <a:off x="406301" y="6312247"/>
-            <a:ext cx="8498026" cy="426541"/>
-          </a:xfrm>
-          <a:prstGeom prst="rect">
-            <a:avLst/>
-          </a:prstGeom>
-          <a:noFill/>
-          <a:ln/>
-        </p:spPr>
-        <p:txBody>
-          <a:bodyPr wrap="square" lIns="0" tIns="0" rIns="0" bIns="0" rtlCol="0" anchor="t"/>
-          <a:lstStyle/>
-          <a:p>
-            <a:pPr algn="l" indent="0" marL="0">
-              <a:lnSpc>
-                <a:spcPts val="1680"/>
-              </a:lnSpc>
-              <a:spcBef>
-                <a:spcPts val="300"/>
-              </a:spcBef>
-              <a:spcAft>
-                <a:spcPts val="300"/>
-              </a:spcAft>
-              <a:buNone/>
-            </a:pPr>
-            <a:r>
-              <a:rPr lang="en-US" sz="1200" dirty="0">
-                <a:solidFill>
-                  <a:srgbClr val="1A1A1A"/>
-                </a:solidFill>
-                <a:latin typeface="Georgia" pitchFamily="34" charset="0"/>
-                <a:ea typeface="Georgia" pitchFamily="34" charset="-122"/>
-                <a:cs typeface="Georgia" pitchFamily="34" charset="-120"/>
-              </a:rPr>
-              <a:t>– Discussion: notice that </a:t>
-            </a:r>
-            <a:pPr algn="l" indent="0" marL="0">
-              <a:lnSpc>
-                <a:spcPts val="1680"/>
-              </a:lnSpc>
-              <a:spcBef>
-                <a:spcPts val="300"/>
-              </a:spcBef>
-              <a:spcAft>
-                <a:spcPts val="300"/>
-              </a:spcAft>
-              <a:buNone/>
-            </a:pPr>
-            <a:r>
-              <a:rPr lang="en-US" sz="1200" i="1" dirty="0">
-                <a:solidFill>
-                  <a:srgbClr val="1A1A1A"/>
-                </a:solidFill>
-                <a:latin typeface="Georgia" pitchFamily="34" charset="0"/>
-                <a:ea typeface="Georgia" pitchFamily="34" charset="-122"/>
-                <a:cs typeface="Georgia" pitchFamily="34" charset="-120"/>
-              </a:rPr>
-              <a:t>sparśa</a:t>
-            </a:r>
-            <a:pPr algn="l" indent="0" marL="0">
-              <a:lnSpc>
-                <a:spcPts val="1680"/>
-              </a:lnSpc>
-              <a:spcBef>
-                <a:spcPts val="300"/>
-              </a:spcBef>
-              <a:spcAft>
-                <a:spcPts val="300"/>
-              </a:spcAft>
-              <a:buNone/>
-            </a:pPr>
-            <a:r>
-              <a:rPr lang="en-US" sz="1200" dirty="0">
-                <a:solidFill>
-                  <a:srgbClr val="1A1A1A"/>
-                </a:solidFill>
-                <a:latin typeface="Georgia" pitchFamily="34" charset="0"/>
-                <a:ea typeface="Georgia" pitchFamily="34" charset="-122"/>
-                <a:cs typeface="Georgia" pitchFamily="34" charset="-120"/>
-              </a:rPr>
-              <a:t> (touch) here includes thermal sensations (cold, heat). This is broader than modern English "touch" (which usually means pressure/texture). The framework is more inclusive than we'd assume from a casual reading.</a:t>
-            </a:r>
-            <a:endParaRPr lang="en-US" sz="1200" dirty="0"/>
-          </a:p>
-        </p:txBody>
-      </p:sp>
-      <p:sp>
-        <p:nvSpPr>
-          <p:cNvPr id="14" name="Text 12"/>
-          <p:cNvSpPr/>
-          <p:nvPr/>
-        </p:nvSpPr>
-        <p:spPr>
-          <a:xfrm>
-            <a:off x="406301" y="6891189"/>
+            <a:off x="406301" y="4434929"/>
             <a:ext cx="8498026" cy="213271"/>
           </a:xfrm>
           <a:prstGeom prst="rect">
@@ -4577,7 +5413,7 @@
                 <a:ea typeface="Times New Roman" pitchFamily="34" charset="-122"/>
                 <a:cs typeface="Times New Roman" pitchFamily="34" charset="-120"/>
               </a:rPr>
-              <a:t>Concept check (10 min)</a:t>
+              <a:t>Core (25 min)</a:t>
             </a:r>
             <a:endParaRPr lang="en-US" sz="1800" dirty="0"/>
           </a:p>
@@ -4591,8 +5427,8 @@
         </p:nvSpPr>
         <p:spPr>
           <a:xfrm>
-            <a:off x="406301" y="870942"/>
-            <a:ext cx="8498026" cy="639812"/>
+            <a:off x="634901" y="883593"/>
+            <a:ext cx="8102798" cy="281880"/>
           </a:xfrm>
           <a:prstGeom prst="rect">
             <a:avLst/>
@@ -4604,6 +5440,219 @@
           <a:bodyPr wrap="square" lIns="0" tIns="0" rIns="0" bIns="0" rtlCol="0" anchor="t"/>
           <a:lstStyle/>
           <a:p>
+            <a:pPr algn="l" marL="342900" indent="-342900">
+              <a:lnSpc>
+                <a:spcPts val="1620"/>
+              </a:lnSpc>
+              <a:spcAft>
+                <a:spcPts val="300"/>
+              </a:spcAft>
+              <a:buSzPct val="100000"/>
+              <a:buChar char="•"/>
+            </a:pPr>
+            <a:r>
+              <a:rPr lang="en-US" sz="1200" b="1" dirty="0">
+                <a:solidFill>
+                  <a:srgbClr val="1A1A1A"/>
+                </a:solidFill>
+                <a:latin typeface="Georgia" pitchFamily="34" charset="0"/>
+                <a:ea typeface="Georgia" pitchFamily="34" charset="-122"/>
+                <a:cs typeface="Georgia" pitchFamily="34" charset="-120"/>
+              </a:rPr>
+              <a:t>The quality-count rule</a:t>
+            </a:r>
+            <a:pPr algn="l" indent="0" marL="0">
+              <a:lnSpc>
+                <a:spcPts val="1620"/>
+              </a:lnSpc>
+              <a:spcAft>
+                <a:spcPts val="300"/>
+              </a:spcAft>
+              <a:buNone/>
+            </a:pPr>
+            <a:r>
+              <a:rPr lang="en-US" sz="1200" dirty="0">
+                <a:solidFill>
+                  <a:srgbClr val="1A1A1A"/>
+                </a:solidFill>
+                <a:latin typeface="Georgia" pitchFamily="34" charset="0"/>
+                <a:ea typeface="Georgia" pitchFamily="34" charset="-122"/>
+                <a:cs typeface="Georgia" pitchFamily="34" charset="-120"/>
+              </a:rPr>
+              <a:t> (write boxed):</a:t>
+            </a:r>
+            <a:endParaRPr lang="en-US" sz="1200" dirty="0"/>
+          </a:p>
+        </p:txBody>
+      </p:sp>
+      <p:sp>
+        <p:nvSpPr>
+          <p:cNvPr id="5" name="Text 3"/>
+          <p:cNvSpPr/>
+          <p:nvPr/>
+        </p:nvSpPr>
+        <p:spPr>
+          <a:xfrm>
+            <a:off x="406301" y="1266974"/>
+            <a:ext cx="8331398" cy="842963"/>
+          </a:xfrm>
+          <a:prstGeom prst="rect">
+            <a:avLst/>
+          </a:prstGeom>
+          <a:solidFill>
+            <a:srgbClr val="FFFFFF"/>
+          </a:solidFill>
+          <a:ln/>
+        </p:spPr>
+        <p:txBody>
+          <a:bodyPr wrap="square" rtlCol="0" anchor="ctr"/>
+          <a:lstStyle/>
+          <a:p>
+            <a:pPr indent="0" marL="0">
+              <a:buNone/>
+            </a:pPr>
+            <a:endParaRPr lang="en-US" dirty="0"/>
+          </a:p>
+        </p:txBody>
+      </p:sp>
+      <p:sp>
+        <p:nvSpPr>
+          <p:cNvPr id="6" name="Shape 4"/>
+          <p:cNvSpPr/>
+          <p:nvPr/>
+        </p:nvSpPr>
+        <p:spPr>
+          <a:xfrm>
+            <a:off x="434876" y="1266974"/>
+            <a:ext cx="0" cy="842962"/>
+          </a:xfrm>
+          <a:prstGeom prst="line">
+            <a:avLst/>
+          </a:prstGeom>
+          <a:noFill/>
+          <a:ln w="57150">
+            <a:solidFill>
+              <a:srgbClr val="997929"/>
+            </a:solidFill>
+            <a:prstDash val="solid"/>
+          </a:ln>
+        </p:spPr>
+      </p:sp>
+      <p:sp>
+        <p:nvSpPr>
+          <p:cNvPr id="7" name="Text 5"/>
+          <p:cNvSpPr/>
+          <p:nvPr/>
+        </p:nvSpPr>
+        <p:spPr>
+          <a:xfrm>
+            <a:off x="692051" y="1457474"/>
+            <a:ext cx="7973389" cy="461963"/>
+          </a:xfrm>
+          <a:prstGeom prst="rect">
+            <a:avLst/>
+          </a:prstGeom>
+          <a:noFill/>
+          <a:ln/>
+        </p:spPr>
+        <p:txBody>
+          <a:bodyPr wrap="square" lIns="0" tIns="0" rIns="0" bIns="0" rtlCol="0" anchor="t"/>
+          <a:lstStyle/>
+          <a:p>
+            <a:pPr algn="l" indent="0" marL="0">
+              <a:lnSpc>
+                <a:spcPts val="1820"/>
+              </a:lnSpc>
+              <a:spcBef>
+                <a:spcPts val="300"/>
+              </a:spcBef>
+              <a:spcAft>
+                <a:spcPts val="300"/>
+              </a:spcAft>
+              <a:buNone/>
+            </a:pPr>
+            <a:r>
+              <a:rPr lang="en-US" sz="1300" dirty="0">
+                <a:solidFill>
+                  <a:srgbClr val="1A1A1A"/>
+                </a:solidFill>
+                <a:latin typeface="Times New Roman" pitchFamily="34" charset="0"/>
+                <a:ea typeface="Times New Roman" pitchFamily="34" charset="-122"/>
+                <a:cs typeface="Times New Roman" pitchFamily="34" charset="-120"/>
+              </a:rPr>
+              <a:t>Each element inherits all the qualities of the elements that emerged before it, AND adds one new quality of its own — the </a:t>
+            </a:r>
+            <a:pPr algn="l" indent="0" marL="0">
+              <a:lnSpc>
+                <a:spcPts val="1820"/>
+              </a:lnSpc>
+              <a:spcBef>
+                <a:spcPts val="300"/>
+              </a:spcBef>
+              <a:spcAft>
+                <a:spcPts val="300"/>
+              </a:spcAft>
+              <a:buNone/>
+            </a:pPr>
+            <a:r>
+              <a:rPr lang="en-US" sz="1300" i="1" dirty="0">
+                <a:solidFill>
+                  <a:srgbClr val="1A1A1A"/>
+                </a:solidFill>
+                <a:latin typeface="Times New Roman" pitchFamily="34" charset="0"/>
+                <a:ea typeface="Times New Roman" pitchFamily="34" charset="-122"/>
+                <a:cs typeface="Times New Roman" pitchFamily="34" charset="-120"/>
+              </a:rPr>
+              <a:t>tanmātra</a:t>
+            </a:r>
+            <a:pPr algn="l" indent="0" marL="0">
+              <a:lnSpc>
+                <a:spcPts val="1820"/>
+              </a:lnSpc>
+              <a:spcBef>
+                <a:spcPts val="300"/>
+              </a:spcBef>
+              <a:spcAft>
+                <a:spcPts val="300"/>
+              </a:spcAft>
+              <a:buNone/>
+            </a:pPr>
+            <a:r>
+              <a:rPr lang="en-US" sz="1300" dirty="0">
+                <a:solidFill>
+                  <a:srgbClr val="1A1A1A"/>
+                </a:solidFill>
+                <a:latin typeface="Times New Roman" pitchFamily="34" charset="0"/>
+                <a:ea typeface="Times New Roman" pitchFamily="34" charset="-122"/>
+                <a:cs typeface="Times New Roman" pitchFamily="34" charset="-120"/>
+              </a:rPr>
+              <a:t> associated with that element.</a:t>
+            </a:r>
+            <a:endParaRPr lang="en-US" sz="1300" dirty="0"/>
+          </a:p>
+        </p:txBody>
+      </p:sp>
+      <p:sp>
+        <p:nvSpPr>
+          <p:cNvPr id="8" name="Text 6"/>
+          <p:cNvSpPr/>
+          <p:nvPr/>
+        </p:nvSpPr>
+        <p:spPr>
+          <a:xfrm>
+            <a:off x="406301" y="2198787"/>
+            <a:ext cx="8498026" cy="213271"/>
+          </a:xfrm>
+          <a:prstGeom prst="rect">
+            <a:avLst/>
+          </a:prstGeom>
+          <a:noFill/>
+          <a:ln/>
+        </p:spPr>
+        <p:txBody>
+          <a:bodyPr wrap="square" lIns="0" tIns="0" rIns="0" bIns="0" rtlCol="0" anchor="t"/>
+          <a:lstStyle/>
+          <a:p>
             <a:pPr algn="l" indent="0" marL="0">
               <a:lnSpc>
                 <a:spcPts val="1680"/>
@@ -4617,29 +5666,6 @@
               <a:buNone/>
             </a:pPr>
             <a:r>
-              <a:rPr lang="en-US" sz="1200" dirty="0">
-                <a:solidFill>
-                  <a:srgbClr val="1A1A1A"/>
-                </a:solidFill>
-                <a:latin typeface="Georgia" pitchFamily="34" charset="0"/>
-                <a:ea typeface="Georgia" pitchFamily="34" charset="-122"/>
-                <a:cs typeface="Georgia" pitchFamily="34" charset="-120"/>
-              </a:rPr>
-              <a:t>Worksheet question (1 mark each): – Why does </a:t>
-            </a:r>
-            <a:pPr algn="l" indent="0" marL="0">
-              <a:lnSpc>
-                <a:spcPts val="1680"/>
-              </a:lnSpc>
-              <a:spcBef>
-                <a:spcPts val="300"/>
-              </a:spcBef>
-              <a:spcAft>
-                <a:spcPts val="300"/>
-              </a:spcAft>
-              <a:buNone/>
-            </a:pPr>
-            <a:r>
               <a:rPr lang="en-US" sz="1200" i="1" dirty="0">
                 <a:solidFill>
                   <a:srgbClr val="1A1A1A"/>
@@ -4648,122 +5674,7 @@
                 <a:ea typeface="Georgia" pitchFamily="34" charset="-122"/>
                 <a:cs typeface="Georgia" pitchFamily="34" charset="-120"/>
               </a:rPr>
-              <a:t>ākāśa</a:t>
-            </a:r>
-            <a:pPr algn="l" indent="0" marL="0">
-              <a:lnSpc>
-                <a:spcPts val="1680"/>
-              </a:lnSpc>
-              <a:spcBef>
-                <a:spcPts val="300"/>
-              </a:spcBef>
-              <a:spcAft>
-                <a:spcPts val="300"/>
-              </a:spcAft>
-              <a:buNone/>
-            </a:pPr>
-            <a:r>
-              <a:rPr lang="en-US" sz="1200" dirty="0">
-                <a:solidFill>
-                  <a:srgbClr val="1A1A1A"/>
-                </a:solidFill>
-                <a:latin typeface="Georgia" pitchFamily="34" charset="0"/>
-                <a:ea typeface="Georgia" pitchFamily="34" charset="-122"/>
-                <a:cs typeface="Georgia" pitchFamily="34" charset="-120"/>
-              </a:rPr>
-              <a:t> have only one quality? – Why does </a:t>
-            </a:r>
-            <a:pPr algn="l" indent="0" marL="0">
-              <a:lnSpc>
-                <a:spcPts val="1680"/>
-              </a:lnSpc>
-              <a:spcBef>
-                <a:spcPts val="300"/>
-              </a:spcBef>
-              <a:spcAft>
-                <a:spcPts val="300"/>
-              </a:spcAft>
-              <a:buNone/>
-            </a:pPr>
-            <a:r>
-              <a:rPr lang="en-US" sz="1200" i="1" dirty="0">
-                <a:solidFill>
-                  <a:srgbClr val="1A1A1A"/>
-                </a:solidFill>
-                <a:latin typeface="Georgia" pitchFamily="34" charset="0"/>
-                <a:ea typeface="Georgia" pitchFamily="34" charset="-122"/>
-                <a:cs typeface="Georgia" pitchFamily="34" charset="-120"/>
-              </a:rPr>
-              <a:t>pṛthvī</a:t>
-            </a:r>
-            <a:pPr algn="l" indent="0" marL="0">
-              <a:lnSpc>
-                <a:spcPts val="1680"/>
-              </a:lnSpc>
-              <a:spcBef>
-                <a:spcPts val="300"/>
-              </a:spcBef>
-              <a:spcAft>
-                <a:spcPts val="300"/>
-              </a:spcAft>
-              <a:buNone/>
-            </a:pPr>
-            <a:r>
-              <a:rPr lang="en-US" sz="1200" dirty="0">
-                <a:solidFill>
-                  <a:srgbClr val="1A1A1A"/>
-                </a:solidFill>
-                <a:latin typeface="Georgia" pitchFamily="34" charset="0"/>
-                <a:ea typeface="Georgia" pitchFamily="34" charset="-122"/>
-                <a:cs typeface="Georgia" pitchFamily="34" charset="-120"/>
-              </a:rPr>
-              <a:t> have five? – What does </a:t>
-            </a:r>
-            <a:pPr algn="l" indent="0" marL="0">
-              <a:lnSpc>
-                <a:spcPts val="1680"/>
-              </a:lnSpc>
-              <a:spcBef>
-                <a:spcPts val="300"/>
-              </a:spcBef>
-              <a:spcAft>
-                <a:spcPts val="300"/>
-              </a:spcAft>
-              <a:buNone/>
-            </a:pPr>
-            <a:r>
-              <a:rPr lang="en-US" sz="1200" i="1" dirty="0">
-                <a:solidFill>
-                  <a:srgbClr val="1A1A1A"/>
-                </a:solidFill>
-                <a:latin typeface="Georgia" pitchFamily="34" charset="0"/>
-                <a:ea typeface="Georgia" pitchFamily="34" charset="-122"/>
-                <a:cs typeface="Georgia" pitchFamily="34" charset="-120"/>
-              </a:rPr>
-              <a:t>sparśa</a:t>
-            </a:r>
-            <a:pPr algn="l" indent="0" marL="0">
-              <a:lnSpc>
-                <a:spcPts val="1680"/>
-              </a:lnSpc>
-              <a:spcBef>
-                <a:spcPts val="300"/>
-              </a:spcBef>
-              <a:spcAft>
-                <a:spcPts val="300"/>
-              </a:spcAft>
-              <a:buNone/>
-            </a:pPr>
-            <a:r>
-              <a:rPr lang="en-US" sz="1200" dirty="0">
-                <a:solidFill>
-                  <a:srgbClr val="1A1A1A"/>
-                </a:solidFill>
-                <a:latin typeface="Georgia" pitchFamily="34" charset="0"/>
-                <a:ea typeface="Georgia" pitchFamily="34" charset="-122"/>
-                <a:cs typeface="Georgia" pitchFamily="34" charset="-120"/>
-              </a:rPr>
-              <a:t> include that modern English "touch" doesn't? – Why is the bhūta-tanmātra mapping called "one-to-one"? – If a sixth element existed, how many qualities would it have, and what would they be? (Discussion question.)</a:t>
+              <a:t>Each row: Element · Qualities · Source-verse anchor.</a:t>
             </a:r>
             <a:endParaRPr lang="en-US" sz="1200" dirty="0"/>
           </a:p>
@@ -4771,7 +5682,7 @@
       </p:sp>
       <p:sp>
         <p:nvSpPr>
-          <p:cNvPr id="5" name="Text 3"/>
+          <p:cNvPr id="9" name="Text 7"/>
           <p:cNvSpPr/>
           <p:nvPr/>
         </p:nvSpPr>
@@ -4921,7 +5832,7 @@
                 <a:ea typeface="Times New Roman" pitchFamily="34" charset="-122"/>
                 <a:cs typeface="Times New Roman" pitchFamily="34" charset="-120"/>
               </a:rPr>
-              <a:t>Wrap-up (5 min)</a:t>
+              <a:t>Core (25 min) (cont.)</a:t>
             </a:r>
             <a:endParaRPr lang="en-US" sz="1800" dirty="0"/>
           </a:p>
@@ -4935,8 +5846,8 @@
         </p:nvSpPr>
         <p:spPr>
           <a:xfrm>
-            <a:off x="406301" y="870942"/>
-            <a:ext cx="8498026" cy="213271"/>
+            <a:off x="634901" y="883593"/>
+            <a:ext cx="8102798" cy="1462683"/>
           </a:xfrm>
           <a:prstGeom prst="rect">
             <a:avLst/>
@@ -4948,13 +5859,31 @@
           <a:bodyPr wrap="square" lIns="0" tIns="0" rIns="0" bIns="0" rtlCol="0" anchor="t"/>
           <a:lstStyle/>
           <a:p>
-            <a:pPr algn="l" indent="0" marL="0">
-              <a:lnSpc>
-                <a:spcPts val="1680"/>
-              </a:lnSpc>
-              <a:spcBef>
-                <a:spcPts val="300"/>
-              </a:spcBef>
+            <a:pPr algn="l" marL="342900" indent="-342900">
+              <a:lnSpc>
+                <a:spcPts val="1620"/>
+              </a:lnSpc>
+              <a:spcAft>
+                <a:spcPts val="300"/>
+              </a:spcAft>
+              <a:buSzPct val="100000"/>
+              <a:buChar char="•"/>
+            </a:pPr>
+            <a:r>
+              <a:rPr lang="en-US" sz="1200" b="1" dirty="0">
+                <a:solidFill>
+                  <a:srgbClr val="1A1A1A"/>
+                </a:solidFill>
+                <a:latin typeface="Georgia" pitchFamily="34" charset="0"/>
+                <a:ea typeface="Georgia" pitchFamily="34" charset="-122"/>
+                <a:cs typeface="Georgia" pitchFamily="34" charset="-120"/>
+              </a:rPr>
+              <a:t>ākāśa</a:t>
+            </a:r>
+            <a:pPr algn="l" indent="0" marL="0">
+              <a:lnSpc>
+                <a:spcPts val="1620"/>
+              </a:lnSpc>
               <a:spcAft>
                 <a:spcPts val="300"/>
               </a:spcAft>
@@ -4969,30 +5898,183 @@
                 <a:ea typeface="Georgia" pitchFamily="34" charset="-122"/>
                 <a:cs typeface="Georgia" pitchFamily="34" charset="-120"/>
               </a:rPr>
-              <a:t>– Preview Day 4: </a:t>
-            </a:r>
-            <a:pPr algn="l" indent="0" marL="0">
-              <a:lnSpc>
-                <a:spcPts val="1680"/>
-              </a:lnSpc>
-              <a:spcBef>
-                <a:spcPts val="300"/>
-              </a:spcBef>
-              <a:spcAft>
-                <a:spcPts val="300"/>
-              </a:spcAft>
-              <a:buNone/>
-            </a:pPr>
-            <a:r>
-              <a:rPr lang="en-US" sz="1200" i="1" dirty="0">
-                <a:solidFill>
-                  <a:srgbClr val="1A1A1A"/>
-                </a:solidFill>
-                <a:latin typeface="Georgia" pitchFamily="34" charset="0"/>
-                <a:ea typeface="Georgia" pitchFamily="34" charset="-122"/>
-                <a:cs typeface="Georgia" pitchFamily="34" charset="-120"/>
-              </a:rPr>
-              <a:t>"Tomorrow — Empedocles and Aristotle. Greek and Indian elemental schemes side by side."</a:t>
+              <a:t> — śabda · SB 3.26 (qualities-of-space)</a:t>
+            </a:r>
+            <a:endParaRPr lang="en-US" sz="1200" dirty="0"/>
+          </a:p>
+          <a:p>
+            <a:pPr algn="l" marL="342900" indent="-342900">
+              <a:lnSpc>
+                <a:spcPts val="1620"/>
+              </a:lnSpc>
+              <a:spcAft>
+                <a:spcPts val="300"/>
+              </a:spcAft>
+              <a:buSzPct val="100000"/>
+              <a:buChar char="•"/>
+            </a:pPr>
+            <a:r>
+              <a:rPr lang="en-US" sz="1200" b="1" dirty="0">
+                <a:solidFill>
+                  <a:srgbClr val="1A1A1A"/>
+                </a:solidFill>
+                <a:latin typeface="Georgia" pitchFamily="34" charset="0"/>
+                <a:ea typeface="Georgia" pitchFamily="34" charset="-122"/>
+                <a:cs typeface="Georgia" pitchFamily="34" charset="-120"/>
+              </a:rPr>
+              <a:t>vāyu</a:t>
+            </a:r>
+            <a:pPr algn="l" indent="0" marL="0">
+              <a:lnSpc>
+                <a:spcPts val="1620"/>
+              </a:lnSpc>
+              <a:spcAft>
+                <a:spcPts val="300"/>
+              </a:spcAft>
+              <a:buNone/>
+            </a:pPr>
+            <a:r>
+              <a:rPr lang="en-US" sz="1200" dirty="0">
+                <a:solidFill>
+                  <a:srgbClr val="1A1A1A"/>
+                </a:solidFill>
+                <a:latin typeface="Georgia" pitchFamily="34" charset="0"/>
+                <a:ea typeface="Georgia" pitchFamily="34" charset="-122"/>
+                <a:cs typeface="Georgia" pitchFamily="34" charset="-120"/>
+              </a:rPr>
+              <a:t> — śabda + sparśa · SB 3.26.36 (directly quoted: "softness, hardness, cold, heat — qualities of touch, tanmātra of air")</a:t>
+            </a:r>
+            <a:endParaRPr lang="en-US" sz="1200" dirty="0"/>
+          </a:p>
+          <a:p>
+            <a:pPr algn="l" marL="342900" indent="-342900">
+              <a:lnSpc>
+                <a:spcPts val="1620"/>
+              </a:lnSpc>
+              <a:spcAft>
+                <a:spcPts val="300"/>
+              </a:spcAft>
+              <a:buSzPct val="100000"/>
+              <a:buChar char="•"/>
+            </a:pPr>
+            <a:r>
+              <a:rPr lang="en-US" sz="1200" b="1" dirty="0">
+                <a:solidFill>
+                  <a:srgbClr val="1A1A1A"/>
+                </a:solidFill>
+                <a:latin typeface="Georgia" pitchFamily="34" charset="0"/>
+                <a:ea typeface="Georgia" pitchFamily="34" charset="-122"/>
+                <a:cs typeface="Georgia" pitchFamily="34" charset="-120"/>
+              </a:rPr>
+              <a:t>tejas</a:t>
+            </a:r>
+            <a:pPr algn="l" indent="0" marL="0">
+              <a:lnSpc>
+                <a:spcPts val="1620"/>
+              </a:lnSpc>
+              <a:spcAft>
+                <a:spcPts val="300"/>
+              </a:spcAft>
+              <a:buNone/>
+            </a:pPr>
+            <a:r>
+              <a:rPr lang="en-US" sz="1200" dirty="0">
+                <a:solidFill>
+                  <a:srgbClr val="1A1A1A"/>
+                </a:solidFill>
+                <a:latin typeface="Georgia" pitchFamily="34" charset="0"/>
+                <a:ea typeface="Georgia" pitchFamily="34" charset="-122"/>
+                <a:cs typeface="Georgia" pitchFamily="34" charset="-120"/>
+              </a:rPr>
+              <a:t> — śabda + sparśa + rūpa · —</a:t>
+            </a:r>
+            <a:endParaRPr lang="en-US" sz="1200" dirty="0"/>
+          </a:p>
+          <a:p>
+            <a:pPr algn="l" marL="342900" indent="-342900">
+              <a:lnSpc>
+                <a:spcPts val="1620"/>
+              </a:lnSpc>
+              <a:spcAft>
+                <a:spcPts val="300"/>
+              </a:spcAft>
+              <a:buSzPct val="100000"/>
+              <a:buChar char="•"/>
+            </a:pPr>
+            <a:r>
+              <a:rPr lang="en-US" sz="1200" b="1" dirty="0">
+                <a:solidFill>
+                  <a:srgbClr val="1A1A1A"/>
+                </a:solidFill>
+                <a:latin typeface="Georgia" pitchFamily="34" charset="0"/>
+                <a:ea typeface="Georgia" pitchFamily="34" charset="-122"/>
+                <a:cs typeface="Georgia" pitchFamily="34" charset="-120"/>
+              </a:rPr>
+              <a:t>ap</a:t>
+            </a:r>
+            <a:pPr algn="l" indent="0" marL="0">
+              <a:lnSpc>
+                <a:spcPts val="1620"/>
+              </a:lnSpc>
+              <a:spcAft>
+                <a:spcPts val="300"/>
+              </a:spcAft>
+              <a:buNone/>
+            </a:pPr>
+            <a:r>
+              <a:rPr lang="en-US" sz="1200" dirty="0">
+                <a:solidFill>
+                  <a:srgbClr val="1A1A1A"/>
+                </a:solidFill>
+                <a:latin typeface="Georgia" pitchFamily="34" charset="0"/>
+                <a:ea typeface="Georgia" pitchFamily="34" charset="-122"/>
+                <a:cs typeface="Georgia" pitchFamily="34" charset="-120"/>
+              </a:rPr>
+              <a:t> — śabda + sparśa + rūpa + rasa · —</a:t>
+            </a:r>
+            <a:endParaRPr lang="en-US" sz="1200" dirty="0"/>
+          </a:p>
+          <a:p>
+            <a:pPr algn="l" marL="342900" indent="-342900">
+              <a:lnSpc>
+                <a:spcPts val="1620"/>
+              </a:lnSpc>
+              <a:spcAft>
+                <a:spcPts val="300"/>
+              </a:spcAft>
+              <a:buSzPct val="100000"/>
+              <a:buChar char="•"/>
+            </a:pPr>
+            <a:r>
+              <a:rPr lang="en-US" sz="1200" b="1" dirty="0">
+                <a:solidFill>
+                  <a:srgbClr val="1A1A1A"/>
+                </a:solidFill>
+                <a:latin typeface="Georgia" pitchFamily="34" charset="0"/>
+                <a:ea typeface="Georgia" pitchFamily="34" charset="-122"/>
+                <a:cs typeface="Georgia" pitchFamily="34" charset="-120"/>
+              </a:rPr>
+              <a:t>pṛthvī</a:t>
+            </a:r>
+            <a:pPr algn="l" indent="0" marL="0">
+              <a:lnSpc>
+                <a:spcPts val="1620"/>
+              </a:lnSpc>
+              <a:spcAft>
+                <a:spcPts val="300"/>
+              </a:spcAft>
+              <a:buNone/>
+            </a:pPr>
+            <a:r>
+              <a:rPr lang="en-US" sz="1200" dirty="0">
+                <a:solidFill>
+                  <a:srgbClr val="1A1A1A"/>
+                </a:solidFill>
+                <a:latin typeface="Georgia" pitchFamily="34" charset="0"/>
+                <a:ea typeface="Georgia" pitchFamily="34" charset="-122"/>
+                <a:cs typeface="Georgia" pitchFamily="34" charset="-120"/>
+              </a:rPr>
+              <a:t> — śabda + sparśa + rūpa + rasa + gandha · SB 3.26.44 (taste → smell as the last new quality)</a:t>
             </a:r>
             <a:endParaRPr lang="en-US" sz="1200" dirty="0"/>
           </a:p>
@@ -5150,7 +6232,7 @@
                 <a:ea typeface="Times New Roman" pitchFamily="34" charset="-122"/>
                 <a:cs typeface="Times New Roman" pitchFamily="34" charset="-120"/>
               </a:rPr>
-              <a:t>Differentiation</a:t>
+              <a:t>Core (25 min) (cont.)</a:t>
             </a:r>
             <a:endParaRPr lang="en-US" sz="1800" dirty="0"/>
           </a:p>
@@ -5165,7 +6247,7 @@
         <p:spPr>
           <a:xfrm>
             <a:off x="634901" y="883593"/>
-            <a:ext cx="8102798" cy="731341"/>
+            <a:ext cx="8102798" cy="281880"/>
           </a:xfrm>
           <a:prstGeom prst="rect">
             <a:avLst/>
@@ -5196,7 +6278,7 @@
                 <a:ea typeface="Georgia" pitchFamily="34" charset="-122"/>
                 <a:cs typeface="Georgia" pitchFamily="34" charset="-120"/>
               </a:rPr>
-              <a:t>Tier up:</a:t>
+              <a:t>Internal consistency:</a:t>
             </a:r>
             <a:pPr algn="l" indent="0" marL="0">
               <a:lnSpc>
@@ -5216,10 +6298,72 @@
                 <a:ea typeface="Georgia" pitchFamily="34" charset="-122"/>
                 <a:cs typeface="Georgia" pitchFamily="34" charset="-120"/>
               </a:rPr>
-              <a:t> Write a 1-page response to "if a sixth element existed (e.g. 'information'), where would it sit and what would its tanmātra be?"</a:t>
+              <a:t> the scheme is </a:t>
+            </a:r>
+            <a:pPr algn="l" indent="0" marL="0">
+              <a:lnSpc>
+                <a:spcPts val="1620"/>
+              </a:lnSpc>
+              <a:spcAft>
+                <a:spcPts val="300"/>
+              </a:spcAft>
+              <a:buNone/>
+            </a:pPr>
+            <a:r>
+              <a:rPr lang="en-US" sz="1200" i="1" dirty="0">
+                <a:solidFill>
+                  <a:srgbClr val="1A1A1A"/>
+                </a:solidFill>
+                <a:latin typeface="Georgia" pitchFamily="34" charset="0"/>
+                <a:ea typeface="Georgia" pitchFamily="34" charset="-122"/>
+                <a:cs typeface="Georgia" pitchFamily="34" charset="-120"/>
+              </a:rPr>
+              <a:t>symmetric and complete</a:t>
+            </a:r>
+            <a:pPr algn="l" indent="0" marL="0">
+              <a:lnSpc>
+                <a:spcPts val="1620"/>
+              </a:lnSpc>
+              <a:spcAft>
+                <a:spcPts val="300"/>
+              </a:spcAft>
+              <a:buNone/>
+            </a:pPr>
+            <a:r>
+              <a:rPr lang="en-US" sz="1200" dirty="0">
+                <a:solidFill>
+                  <a:srgbClr val="1A1A1A"/>
+                </a:solidFill>
+                <a:latin typeface="Georgia" pitchFamily="34" charset="0"/>
+                <a:ea typeface="Georgia" pitchFamily="34" charset="-122"/>
+                <a:cs typeface="Georgia" pitchFamily="34" charset="-120"/>
+              </a:rPr>
+              <a:t>:</a:t>
             </a:r>
             <a:endParaRPr lang="en-US" sz="1200" dirty="0"/>
           </a:p>
+        </p:txBody>
+      </p:sp>
+      <p:sp>
+        <p:nvSpPr>
+          <p:cNvPr id="5" name="Text 3"/>
+          <p:cNvSpPr/>
+          <p:nvPr/>
+        </p:nvSpPr>
+        <p:spPr>
+          <a:xfrm>
+            <a:off x="634901" y="1266974"/>
+            <a:ext cx="8102798" cy="1013222"/>
+          </a:xfrm>
+          <a:prstGeom prst="rect">
+            <a:avLst/>
+          </a:prstGeom>
+          <a:noFill/>
+          <a:ln/>
+        </p:spPr>
+        <p:txBody>
+          <a:bodyPr wrap="square" lIns="0" tIns="0" rIns="0" bIns="0" rtlCol="0" anchor="t"/>
+          <a:lstStyle/>
           <a:p>
             <a:pPr algn="l" marL="342900" indent="-342900">
               <a:lnSpc>
@@ -5232,24 +6376,28 @@
               <a:buChar char="•"/>
             </a:pPr>
             <a:r>
-              <a:rPr lang="en-US" sz="1200" b="1" dirty="0">
-                <a:solidFill>
-                  <a:srgbClr val="1A1A1A"/>
-                </a:solidFill>
-                <a:latin typeface="Georgia" pitchFamily="34" charset="0"/>
-                <a:ea typeface="Georgia" pitchFamily="34" charset="-122"/>
-                <a:cs typeface="Georgia" pitchFamily="34" charset="-120"/>
-              </a:rPr>
-              <a:t>Tier down:</a:t>
-            </a:r>
-            <a:pPr algn="l" indent="0" marL="0">
+              <a:rPr lang="en-US" sz="1200" dirty="0">
+                <a:solidFill>
+                  <a:srgbClr val="1A1A1A"/>
+                </a:solidFill>
+                <a:latin typeface="Georgia" pitchFamily="34" charset="0"/>
+                <a:ea typeface="Georgia" pitchFamily="34" charset="-122"/>
+                <a:cs typeface="Georgia" pitchFamily="34" charset="-120"/>
+              </a:rPr>
+              <a:t>5 bhūtas, 5 tanmātras, 5 indriyas of perception.</a:t>
+            </a:r>
+            <a:endParaRPr lang="en-US" sz="1200" dirty="0"/>
+          </a:p>
+          <a:p>
+            <a:pPr algn="l" marL="342900" indent="-342900">
               <a:lnSpc>
                 <a:spcPts val="1620"/>
               </a:lnSpc>
               <a:spcAft>
                 <a:spcPts val="300"/>
               </a:spcAft>
-              <a:buNone/>
+              <a:buSzPct val="100000"/>
+              <a:buChar char="•"/>
             </a:pPr>
             <a:r>
               <a:rPr lang="en-US" sz="1200" dirty="0">
@@ -5260,15 +6408,103 @@
                 <a:ea typeface="Georgia" pitchFamily="34" charset="-122"/>
                 <a:cs typeface="Georgia" pitchFamily="34" charset="-120"/>
               </a:rPr>
-              <a:t> Focus on the quality-count rule; the bhūta-tanmātra pairing alone is the core skill.</a:t>
+              <a:t>Each bhūta pairs with exactly one tanmātra.</a:t>
             </a:r>
             <a:endParaRPr lang="en-US" sz="1200" dirty="0"/>
           </a:p>
-        </p:txBody>
-      </p:sp>
-      <p:sp>
-        <p:nvSpPr>
-          <p:cNvPr id="5" name="Text 3"/>
+          <a:p>
+            <a:pPr algn="l" marL="342900" indent="-342900">
+              <a:lnSpc>
+                <a:spcPts val="1620"/>
+              </a:lnSpc>
+              <a:spcAft>
+                <a:spcPts val="300"/>
+              </a:spcAft>
+              <a:buSzPct val="100000"/>
+              <a:buChar char="•"/>
+            </a:pPr>
+            <a:r>
+              <a:rPr lang="en-US" sz="1200" dirty="0">
+                <a:solidFill>
+                  <a:srgbClr val="1A1A1A"/>
+                </a:solidFill>
+                <a:latin typeface="Georgia" pitchFamily="34" charset="0"/>
+                <a:ea typeface="Georgia" pitchFamily="34" charset="-122"/>
+                <a:cs typeface="Georgia" pitchFamily="34" charset="-120"/>
+              </a:rPr>
+              <a:t>Each tanmātra is perceived by exactly one indriya.</a:t>
+            </a:r>
+            <a:endParaRPr lang="en-US" sz="1200" dirty="0"/>
+          </a:p>
+          <a:p>
+            <a:pPr algn="l" marL="342900" indent="-342900">
+              <a:lnSpc>
+                <a:spcPts val="1620"/>
+              </a:lnSpc>
+              <a:spcAft>
+                <a:spcPts val="300"/>
+              </a:spcAft>
+              <a:buSzPct val="100000"/>
+              <a:buChar char="•"/>
+            </a:pPr>
+            <a:r>
+              <a:rPr lang="en-US" sz="1200" dirty="0">
+                <a:solidFill>
+                  <a:srgbClr val="1A1A1A"/>
+                </a:solidFill>
+                <a:latin typeface="Georgia" pitchFamily="34" charset="0"/>
+                <a:ea typeface="Georgia" pitchFamily="34" charset="-122"/>
+                <a:cs typeface="Georgia" pitchFamily="34" charset="-120"/>
+              </a:rPr>
+              <a:t>The quality count (1, 2, 3, 4, 5) is a </a:t>
+            </a:r>
+            <a:pPr algn="l" indent="0" marL="0">
+              <a:lnSpc>
+                <a:spcPts val="1620"/>
+              </a:lnSpc>
+              <a:spcAft>
+                <a:spcPts val="300"/>
+              </a:spcAft>
+              <a:buNone/>
+            </a:pPr>
+            <a:r>
+              <a:rPr lang="en-US" sz="1200" i="1" dirty="0">
+                <a:solidFill>
+                  <a:srgbClr val="1A1A1A"/>
+                </a:solidFill>
+                <a:latin typeface="Georgia" pitchFamily="34" charset="0"/>
+                <a:ea typeface="Georgia" pitchFamily="34" charset="-122"/>
+                <a:cs typeface="Georgia" pitchFamily="34" charset="-120"/>
+              </a:rPr>
+              <a:t>predicted consequence</a:t>
+            </a:r>
+            <a:pPr algn="l" indent="0" marL="0">
+              <a:lnSpc>
+                <a:spcPts val="1620"/>
+              </a:lnSpc>
+              <a:spcAft>
+                <a:spcPts val="300"/>
+              </a:spcAft>
+              <a:buNone/>
+            </a:pPr>
+            <a:r>
+              <a:rPr lang="en-US" sz="1200" dirty="0">
+                <a:solidFill>
+                  <a:srgbClr val="1A1A1A"/>
+                </a:solidFill>
+                <a:latin typeface="Georgia" pitchFamily="34" charset="0"/>
+                <a:ea typeface="Georgia" pitchFamily="34" charset="-122"/>
+                <a:cs typeface="Georgia" pitchFamily="34" charset="-120"/>
+              </a:rPr>
+              <a:t> of the emergence order — not an arbitrary stipulation.</a:t>
+            </a:r>
+            <a:endParaRPr lang="en-US" sz="1200" dirty="0"/>
+          </a:p>
+        </p:txBody>
+      </p:sp>
+      <p:sp>
+        <p:nvSpPr>
+          <p:cNvPr id="6" name="Text 4"/>
           <p:cNvSpPr/>
           <p:nvPr/>
         </p:nvSpPr>
@@ -5418,7 +6654,7 @@
                 <a:ea typeface="Times New Roman" pitchFamily="34" charset="-122"/>
                 <a:cs typeface="Times New Roman" pitchFamily="34" charset="-120"/>
               </a:rPr>
-              <a:t>Teacher notes</a:t>
+              <a:t>Core (25 min) (cont.)</a:t>
             </a:r>
             <a:endParaRPr lang="en-US" sz="1800" dirty="0"/>
           </a:p>
@@ -5432,8 +6668,8 @@
         </p:nvSpPr>
         <p:spPr>
           <a:xfrm>
-            <a:off x="406301" y="870942"/>
-            <a:ext cx="8498026" cy="853083"/>
+            <a:off x="634901" y="883593"/>
+            <a:ext cx="8102798" cy="281880"/>
           </a:xfrm>
           <a:prstGeom prst="rect">
             <a:avLst/>
@@ -5445,9 +6681,128 @@
           <a:bodyPr wrap="square" lIns="0" tIns="0" rIns="0" bIns="0" rtlCol="0" anchor="t"/>
           <a:lstStyle/>
           <a:p>
-            <a:pPr algn="l" indent="0" marL="0">
-              <a:lnSpc>
-                <a:spcPts val="1680"/>
+            <a:pPr algn="l" marL="342900" indent="-342900">
+              <a:lnSpc>
+                <a:spcPts val="1620"/>
+              </a:lnSpc>
+              <a:spcAft>
+                <a:spcPts val="300"/>
+              </a:spcAft>
+              <a:buSzPct val="100000"/>
+              <a:buChar char="•"/>
+            </a:pPr>
+            <a:r>
+              <a:rPr lang="en-US" sz="1200" b="1" dirty="0">
+                <a:solidFill>
+                  <a:srgbClr val="1A1A1A"/>
+                </a:solidFill>
+                <a:latin typeface="Georgia" pitchFamily="34" charset="0"/>
+                <a:ea typeface="Georgia" pitchFamily="34" charset="-122"/>
+                <a:cs typeface="Georgia" pitchFamily="34" charset="-120"/>
+              </a:rPr>
+              <a:t>Read SB 3.26.36 together</a:t>
+            </a:r>
+            <a:pPr algn="l" indent="0" marL="0">
+              <a:lnSpc>
+                <a:spcPts val="1620"/>
+              </a:lnSpc>
+              <a:spcAft>
+                <a:spcPts val="300"/>
+              </a:spcAft>
+              <a:buNone/>
+            </a:pPr>
+            <a:r>
+              <a:rPr lang="en-US" sz="1200" dirty="0">
+                <a:solidFill>
+                  <a:srgbClr val="1A1A1A"/>
+                </a:solidFill>
+                <a:latin typeface="Georgia" pitchFamily="34" charset="0"/>
+                <a:ea typeface="Georgia" pitchFamily="34" charset="-122"/>
+                <a:cs typeface="Georgia" pitchFamily="34" charset="-120"/>
+              </a:rPr>
+              <a:t> (in IAST):</a:t>
+            </a:r>
+            <a:endParaRPr lang="en-US" sz="1200" dirty="0"/>
+          </a:p>
+        </p:txBody>
+      </p:sp>
+      <p:sp>
+        <p:nvSpPr>
+          <p:cNvPr id="5" name="Text 3"/>
+          <p:cNvSpPr/>
+          <p:nvPr/>
+        </p:nvSpPr>
+        <p:spPr>
+          <a:xfrm>
+            <a:off x="406301" y="1266974"/>
+            <a:ext cx="8331398" cy="1073944"/>
+          </a:xfrm>
+          <a:prstGeom prst="rect">
+            <a:avLst/>
+          </a:prstGeom>
+          <a:solidFill>
+            <a:srgbClr val="FFFFFF"/>
+          </a:solidFill>
+          <a:ln/>
+        </p:spPr>
+        <p:txBody>
+          <a:bodyPr wrap="square" rtlCol="0" anchor="ctr"/>
+          <a:lstStyle/>
+          <a:p>
+            <a:pPr indent="0" marL="0">
+              <a:buNone/>
+            </a:pPr>
+            <a:endParaRPr lang="en-US" dirty="0"/>
+          </a:p>
+        </p:txBody>
+      </p:sp>
+      <p:sp>
+        <p:nvSpPr>
+          <p:cNvPr id="6" name="Shape 4"/>
+          <p:cNvSpPr/>
+          <p:nvPr/>
+        </p:nvSpPr>
+        <p:spPr>
+          <a:xfrm>
+            <a:off x="434876" y="1266974"/>
+            <a:ext cx="0" cy="1073944"/>
+          </a:xfrm>
+          <a:prstGeom prst="line">
+            <a:avLst/>
+          </a:prstGeom>
+          <a:noFill/>
+          <a:ln w="57150">
+            <a:solidFill>
+              <a:srgbClr val="997929"/>
+            </a:solidFill>
+            <a:prstDash val="solid"/>
+          </a:ln>
+        </p:spPr>
+      </p:sp>
+      <p:sp>
+        <p:nvSpPr>
+          <p:cNvPr id="7" name="Text 5"/>
+          <p:cNvSpPr/>
+          <p:nvPr/>
+        </p:nvSpPr>
+        <p:spPr>
+          <a:xfrm>
+            <a:off x="692051" y="1457474"/>
+            <a:ext cx="7973389" cy="692944"/>
+          </a:xfrm>
+          <a:prstGeom prst="rect">
+            <a:avLst/>
+          </a:prstGeom>
+          <a:noFill/>
+          <a:ln/>
+        </p:spPr>
+        <p:txBody>
+          <a:bodyPr wrap="square" lIns="0" tIns="0" rIns="0" bIns="0" rtlCol="0" anchor="t"/>
+          <a:lstStyle/>
+          <a:p>
+            <a:pPr algn="l" indent="0" marL="0">
+              <a:lnSpc>
+                <a:spcPts val="1820"/>
               </a:lnSpc>
               <a:spcBef>
                 <a:spcPts val="300"/>
@@ -5458,19 +6813,19 @@
               <a:buNone/>
             </a:pPr>
             <a:r>
-              <a:rPr lang="en-US" sz="1200" dirty="0">
-                <a:solidFill>
-                  <a:srgbClr val="1A1A1A"/>
-                </a:solidFill>
-                <a:latin typeface="Georgia" pitchFamily="34" charset="0"/>
-                <a:ea typeface="Georgia" pitchFamily="34" charset="-122"/>
-                <a:cs typeface="Georgia" pitchFamily="34" charset="-120"/>
-              </a:rPr>
-              <a:t>– The </a:t>
-            </a:r>
-            <a:pPr algn="l" indent="0" marL="0">
-              <a:lnSpc>
-                <a:spcPts val="1680"/>
+              <a:rPr lang="en-US" sz="1300" i="1" dirty="0">
+                <a:solidFill>
+                  <a:srgbClr val="1A1A1A"/>
+                </a:solidFill>
+                <a:latin typeface="Times New Roman" pitchFamily="34" charset="0"/>
+                <a:ea typeface="Times New Roman" pitchFamily="34" charset="-122"/>
+                <a:cs typeface="Times New Roman" pitchFamily="34" charset="-120"/>
+              </a:rPr>
+              <a:t>"mṛdutvaṁ kaṭhinatvaṁ ca śaityam uṣṇatvam eva ca / etat sparśasya sparśatvaṁ tanmātratvaṁ nabhasvataḥ"</a:t>
+            </a:r>
+            <a:pPr algn="l" indent="0" marL="0">
+              <a:lnSpc>
+                <a:spcPts val="1820"/>
               </a:lnSpc>
               <a:spcBef>
                 <a:spcPts val="300"/>
@@ -5481,19 +6836,19 @@
               <a:buNone/>
             </a:pPr>
             <a:r>
-              <a:rPr lang="en-US" sz="1200" i="1" dirty="0">
-                <a:solidFill>
-                  <a:srgbClr val="1A1A1A"/>
-                </a:solidFill>
-                <a:latin typeface="Georgia" pitchFamily="34" charset="0"/>
-                <a:ea typeface="Georgia" pitchFamily="34" charset="-122"/>
-                <a:cs typeface="Georgia" pitchFamily="34" charset="-120"/>
-              </a:rPr>
-              <a:t>internal consistency</a:t>
-            </a:r>
-            <a:pPr algn="l" indent="0" marL="0">
-              <a:lnSpc>
-                <a:spcPts val="1680"/>
+              <a:rPr lang="en-US" sz="1300" dirty="0">
+                <a:solidFill>
+                  <a:srgbClr val="1A1A1A"/>
+                </a:solidFill>
+                <a:latin typeface="Times New Roman" pitchFamily="34" charset="0"/>
+                <a:ea typeface="Times New Roman" pitchFamily="34" charset="-122"/>
+                <a:cs typeface="Times New Roman" pitchFamily="34" charset="-120"/>
+              </a:rPr>
+              <a:t> "Softness, hardness, cold, and heat — these are the qualities of touch (</a:t>
+            </a:r>
+            <a:pPr algn="l" indent="0" marL="0">
+              <a:lnSpc>
+                <a:spcPts val="1820"/>
               </a:lnSpc>
               <a:spcBef>
                 <a:spcPts val="300"/>
@@ -5504,19 +6859,19 @@
               <a:buNone/>
             </a:pPr>
             <a:r>
-              <a:rPr lang="en-US" sz="1200" dirty="0">
-                <a:solidFill>
-                  <a:srgbClr val="1A1A1A"/>
-                </a:solidFill>
-                <a:latin typeface="Georgia" pitchFamily="34" charset="0"/>
-                <a:ea typeface="Georgia" pitchFamily="34" charset="-122"/>
-                <a:cs typeface="Georgia" pitchFamily="34" charset="-120"/>
-              </a:rPr>
-              <a:t> point matters more than students realise. Many will assume "old framework = primitive." The Sāṅkhya enumeration is </a:t>
-            </a:r>
-            <a:pPr algn="l" indent="0" marL="0">
-              <a:lnSpc>
-                <a:spcPts val="1680"/>
+              <a:rPr lang="en-US" sz="1300" i="1" dirty="0">
+                <a:solidFill>
+                  <a:srgbClr val="1A1A1A"/>
+                </a:solidFill>
+                <a:latin typeface="Times New Roman" pitchFamily="34" charset="0"/>
+                <a:ea typeface="Times New Roman" pitchFamily="34" charset="-122"/>
+                <a:cs typeface="Times New Roman" pitchFamily="34" charset="-120"/>
+              </a:rPr>
+              <a:t>sparśa</a:t>
+            </a:r>
+            <a:pPr algn="l" indent="0" marL="0">
+              <a:lnSpc>
+                <a:spcPts val="1820"/>
               </a:lnSpc>
               <a:spcBef>
                 <a:spcPts val="300"/>
@@ -5527,19 +6882,19 @@
               <a:buNone/>
             </a:pPr>
             <a:r>
-              <a:rPr lang="en-US" sz="1200" i="1" dirty="0">
-                <a:solidFill>
-                  <a:srgbClr val="1A1A1A"/>
-                </a:solidFill>
-                <a:latin typeface="Georgia" pitchFamily="34" charset="0"/>
-                <a:ea typeface="Georgia" pitchFamily="34" charset="-122"/>
-                <a:cs typeface="Georgia" pitchFamily="34" charset="-120"/>
-              </a:rPr>
-              <a:t>not</a:t>
-            </a:r>
-            <a:pPr algn="l" indent="0" marL="0">
-              <a:lnSpc>
-                <a:spcPts val="1680"/>
+              <a:rPr lang="en-US" sz="1300" dirty="0">
+                <a:solidFill>
+                  <a:srgbClr val="1A1A1A"/>
+                </a:solidFill>
+                <a:latin typeface="Times New Roman" pitchFamily="34" charset="0"/>
+                <a:ea typeface="Times New Roman" pitchFamily="34" charset="-122"/>
+                <a:cs typeface="Times New Roman" pitchFamily="34" charset="-120"/>
+              </a:rPr>
+              <a:t>), the subtle attribute (</a:t>
+            </a:r>
+            <a:pPr algn="l" indent="0" marL="0">
+              <a:lnSpc>
+                <a:spcPts val="1820"/>
               </a:lnSpc>
               <a:spcBef>
                 <a:spcPts val="300"/>
@@ -5550,23 +6905,92 @@
               <a:buNone/>
             </a:pPr>
             <a:r>
-              <a:rPr lang="en-US" sz="1200" dirty="0">
-                <a:solidFill>
-                  <a:srgbClr val="1A1A1A"/>
-                </a:solidFill>
-                <a:latin typeface="Georgia" pitchFamily="34" charset="0"/>
-                <a:ea typeface="Georgia" pitchFamily="34" charset="-122"/>
-                <a:cs typeface="Georgia" pitchFamily="34" charset="-120"/>
-              </a:rPr>
-              <a:t> primitive — it's tightly self-consistent in a way that the Greek four-element scheme isn't. – The Empedocles scheme (Day 4) has NO equivalent of the tanmātra-indriya symmetry. That asymmetry is one of the most interesting cross-cultural points in the module.</a:t>
-            </a:r>
-            <a:endParaRPr lang="en-US" sz="1200" dirty="0"/>
-          </a:p>
-        </p:txBody>
-      </p:sp>
-      <p:sp>
-        <p:nvSpPr>
-          <p:cNvPr id="5" name="Text 3"/>
+              <a:rPr lang="en-US" sz="1300" i="1" dirty="0">
+                <a:solidFill>
+                  <a:srgbClr val="1A1A1A"/>
+                </a:solidFill>
+                <a:latin typeface="Times New Roman" pitchFamily="34" charset="0"/>
+                <a:ea typeface="Times New Roman" pitchFamily="34" charset="-122"/>
+                <a:cs typeface="Times New Roman" pitchFamily="34" charset="-120"/>
+              </a:rPr>
+              <a:t>tanmātra</a:t>
+            </a:r>
+            <a:pPr algn="l" indent="0" marL="0">
+              <a:lnSpc>
+                <a:spcPts val="1820"/>
+              </a:lnSpc>
+              <a:spcBef>
+                <a:spcPts val="300"/>
+              </a:spcBef>
+              <a:spcAft>
+                <a:spcPts val="300"/>
+              </a:spcAft>
+              <a:buNone/>
+            </a:pPr>
+            <a:r>
+              <a:rPr lang="en-US" sz="1300" dirty="0">
+                <a:solidFill>
+                  <a:srgbClr val="1A1A1A"/>
+                </a:solidFill>
+                <a:latin typeface="Times New Roman" pitchFamily="34" charset="0"/>
+                <a:ea typeface="Times New Roman" pitchFamily="34" charset="-122"/>
+                <a:cs typeface="Times New Roman" pitchFamily="34" charset="-120"/>
+              </a:rPr>
+              <a:t>) of air (</a:t>
+            </a:r>
+            <a:pPr algn="l" indent="0" marL="0">
+              <a:lnSpc>
+                <a:spcPts val="1820"/>
+              </a:lnSpc>
+              <a:spcBef>
+                <a:spcPts val="300"/>
+              </a:spcBef>
+              <a:spcAft>
+                <a:spcPts val="300"/>
+              </a:spcAft>
+              <a:buNone/>
+            </a:pPr>
+            <a:r>
+              <a:rPr lang="en-US" sz="1300" i="1" dirty="0">
+                <a:solidFill>
+                  <a:srgbClr val="1A1A1A"/>
+                </a:solidFill>
+                <a:latin typeface="Times New Roman" pitchFamily="34" charset="0"/>
+                <a:ea typeface="Times New Roman" pitchFamily="34" charset="-122"/>
+                <a:cs typeface="Times New Roman" pitchFamily="34" charset="-120"/>
+              </a:rPr>
+              <a:t>nabhasvat</a:t>
+            </a:r>
+            <a:pPr algn="l" indent="0" marL="0">
+              <a:lnSpc>
+                <a:spcPts val="1820"/>
+              </a:lnSpc>
+              <a:spcBef>
+                <a:spcPts val="300"/>
+              </a:spcBef>
+              <a:spcAft>
+                <a:spcPts val="300"/>
+              </a:spcAft>
+              <a:buNone/>
+            </a:pPr>
+            <a:r>
+              <a:rPr lang="en-US" sz="1300" dirty="0">
+                <a:solidFill>
+                  <a:srgbClr val="1A1A1A"/>
+                </a:solidFill>
+                <a:latin typeface="Times New Roman" pitchFamily="34" charset="0"/>
+                <a:ea typeface="Times New Roman" pitchFamily="34" charset="-122"/>
+                <a:cs typeface="Times New Roman" pitchFamily="34" charset="-120"/>
+              </a:rPr>
+              <a:t>)."</a:t>
+            </a:r>
+            <a:endParaRPr lang="en-US" sz="1300" dirty="0"/>
+          </a:p>
+        </p:txBody>
+      </p:sp>
+      <p:sp>
+        <p:nvSpPr>
+          <p:cNvPr id="8" name="Text 6"/>
           <p:cNvSpPr/>
           <p:nvPr/>
         </p:nvSpPr>
